--- a/aulas/aula-06-implementacao-segura.pptx
+++ b/aulas/aula-06-implementacao-segura.pptx
@@ -6,14 +6,15 @@
   </p:sldMasterIdLst>
   <p:sldIdLst>
     <p:sldId id="256" r:id="rId7"/>
-    <p:sldId id="257" r:id="rId8"/>
-    <p:sldId id="258" r:id="rId9"/>
-    <p:sldId id="259" r:id="rId10"/>
-    <p:sldId id="260" r:id="rId11"/>
-    <p:sldId id="261" r:id="rId12"/>
-    <p:sldId id="262" r:id="rId13"/>
-    <p:sldId id="263" r:id="rId14"/>
-    <p:sldId id="264" r:id="rId15"/>
+    <p:sldId id="257" r:id="rId9"/>
+    <p:sldId id="258" r:id="rId10"/>
+    <p:sldId id="259" r:id="rId11"/>
+    <p:sldId id="260" r:id="rId12"/>
+    <p:sldId id="261" r:id="rId13"/>
+    <p:sldId id="262" r:id="rId14"/>
+    <p:sldId id="263" r:id="rId15"/>
+    <p:sldId id="264" r:id="rId16"/>
+    <p:sldId id="265" r:id="rId17"/>
   </p:sldIdLst>
   <p:sldSz cx="12191695" cy="6858000" type="screen4x3"/>
   <p:notesSz cx="6858000" cy="9144000"/>
@@ -113,6 +114,776 @@
     </a:lvl9pPr>
   </p:defaultTextStyle>
 </p:presentation>
+</file>
+
+<file path=ppt/notesMasters/notesMaster1.xml><?xml version="1.0" encoding="utf-8"?>
+<p:notesMaster xmlns:a="http://schemas.openxmlformats.org/drawingml/2006/main" xmlns:p="http://schemas.openxmlformats.org/presentationml/2006/main" xmlns:r="http://schemas.openxmlformats.org/officeDocument/2006/relationships">
+  <p:cSld>
+    <p:bg>
+      <p:bgRef idx="1001">
+        <a:schemeClr val="bg1"/>
+      </p:bgRef>
+    </p:bg>
+    <p:spTree>
+      <p:nvGrpSpPr>
+        <p:cNvPr id="1" name=""/>
+        <p:cNvGrpSpPr/>
+        <p:nvPr/>
+      </p:nvGrpSpPr>
+      <p:grpSpPr>
+        <a:xfrm>
+          <a:off x="0" y="0"/>
+          <a:ext cx="0" cy="0"/>
+          <a:chOff x="0" y="0"/>
+          <a:chExt cx="0" cy="0"/>
+        </a:xfrm>
+      </p:grpSpPr>
+      <p:sp>
+        <p:nvSpPr>
+          <p:cNvPr id="2" name="Header Placeholder 1"/>
+          <p:cNvSpPr>
+            <a:spLocks noGrp="1"/>
+          </p:cNvSpPr>
+          <p:nvPr>
+            <p:ph type="hdr" sz="quarter"/>
+          </p:nvPr>
+        </p:nvSpPr>
+        <p:spPr>
+          <a:xfrm>
+            <a:off x="0" y="0"/>
+            <a:ext cx="2971800" cy="457200"/>
+          </a:xfrm>
+          <a:prstGeom prst="rect">
+            <a:avLst/>
+          </a:prstGeom>
+        </p:spPr>
+        <p:txBody>
+          <a:bodyPr vert="horz" lIns="91440" tIns="45720" rIns="91440" bIns="45720" rtlCol="0"/>
+          <a:lstStyle>
+            <a:lvl1pPr algn="l">
+              <a:defRPr sz="1200"/>
+            </a:lvl1pPr>
+          </a:lstStyle>
+          <a:p>
+            <a:endParaRPr lang="en-US"/>
+          </a:p>
+        </p:txBody>
+      </p:sp>
+      <p:sp>
+        <p:nvSpPr>
+          <p:cNvPr id="3" name="Date Placeholder 2"/>
+          <p:cNvSpPr>
+            <a:spLocks noGrp="1"/>
+          </p:cNvSpPr>
+          <p:nvPr>
+            <p:ph type="dt" idx="1"/>
+          </p:nvPr>
+        </p:nvSpPr>
+        <p:spPr>
+          <a:xfrm>
+            <a:off x="3884613" y="0"/>
+            <a:ext cx="2971800" cy="457200"/>
+          </a:xfrm>
+          <a:prstGeom prst="rect">
+            <a:avLst/>
+          </a:prstGeom>
+        </p:spPr>
+        <p:txBody>
+          <a:bodyPr vert="horz" lIns="91440" tIns="45720" rIns="91440" bIns="45720" rtlCol="0"/>
+          <a:lstStyle>
+            <a:lvl1pPr algn="r">
+              <a:defRPr sz="1200"/>
+            </a:lvl1pPr>
+          </a:lstStyle>
+          <a:p>
+            <a:fld id="{0F89C1C7-3DCD-1040-A9CF-14679D8B5DDD}" type="datetimeFigureOut">
+              <a:rPr lang="en-US" smtClean="0"/>
+              <a:t>10/17/16</a:t>
+            </a:fld>
+            <a:endParaRPr lang="en-US"/>
+          </a:p>
+        </p:txBody>
+      </p:sp>
+      <p:sp>
+        <p:nvSpPr>
+          <p:cNvPr id="4" name="Slide Image Placeholder 3"/>
+          <p:cNvSpPr>
+            <a:spLocks noGrp="1" noRot="1" noChangeAspect="1"/>
+          </p:cNvSpPr>
+          <p:nvPr>
+            <p:ph type="sldImg" idx="2"/>
+          </p:nvPr>
+        </p:nvSpPr>
+        <p:spPr>
+          <a:xfrm>
+            <a:off x="1143000" y="685800"/>
+            <a:ext cx="4572000" cy="3429000"/>
+          </a:xfrm>
+          <a:prstGeom prst="rect">
+            <a:avLst/>
+          </a:prstGeom>
+          <a:noFill/>
+          <a:ln w="12700">
+            <a:solidFill>
+              <a:prstClr val="black"/>
+            </a:solidFill>
+          </a:ln>
+        </p:spPr>
+        <p:txBody>
+          <a:bodyPr vert="horz" lIns="91440" tIns="45720" rIns="91440" bIns="45720" rtlCol="0" anchor="ctr"/>
+          <a:lstStyle/>
+          <a:p>
+            <a:endParaRPr lang="en-US"/>
+          </a:p>
+        </p:txBody>
+      </p:sp>
+      <p:sp>
+        <p:nvSpPr>
+          <p:cNvPr id="5" name="Notes Placeholder 4"/>
+          <p:cNvSpPr>
+            <a:spLocks noGrp="1"/>
+          </p:cNvSpPr>
+          <p:nvPr>
+            <p:ph type="body" sz="quarter" idx="3"/>
+          </p:nvPr>
+        </p:nvSpPr>
+        <p:spPr>
+          <a:xfrm>
+            <a:off x="685800" y="4343400"/>
+            <a:ext cx="5486400" cy="4114800"/>
+          </a:xfrm>
+          <a:prstGeom prst="rect">
+            <a:avLst/>
+          </a:prstGeom>
+        </p:spPr>
+        <p:txBody>
+          <a:bodyPr vert="horz" lIns="91440" tIns="45720" rIns="91440" bIns="45720" rtlCol="0"/>
+          <a:lstStyle/>
+          <a:p>
+            <a:pPr lvl="0"/>
+            <a:r>
+              <a:rPr lang="en-US" smtClean="0"/>
+              <a:t>Click to edit Master text styles</a:t>
+            </a:r>
+          </a:p>
+          <a:p>
+            <a:pPr lvl="1"/>
+            <a:r>
+              <a:rPr lang="en-US" smtClean="0"/>
+              <a:t>Second level</a:t>
+            </a:r>
+          </a:p>
+          <a:p>
+            <a:pPr lvl="2"/>
+            <a:r>
+              <a:rPr lang="en-US" smtClean="0"/>
+              <a:t>Third level</a:t>
+            </a:r>
+          </a:p>
+          <a:p>
+            <a:pPr lvl="3"/>
+            <a:r>
+              <a:rPr lang="en-US" smtClean="0"/>
+              <a:t>Fourth level</a:t>
+            </a:r>
+          </a:p>
+          <a:p>
+            <a:pPr lvl="4"/>
+            <a:r>
+              <a:rPr lang="en-US" smtClean="0"/>
+              <a:t>Fifth level</a:t>
+            </a:r>
+            <a:endParaRPr lang="en-US"/>
+          </a:p>
+        </p:txBody>
+      </p:sp>
+      <p:sp>
+        <p:nvSpPr>
+          <p:cNvPr id="6" name="Footer Placeholder 5"/>
+          <p:cNvSpPr>
+            <a:spLocks noGrp="1"/>
+          </p:cNvSpPr>
+          <p:nvPr>
+            <p:ph type="ftr" sz="quarter" idx="4"/>
+          </p:nvPr>
+        </p:nvSpPr>
+        <p:spPr>
+          <a:xfrm>
+            <a:off x="0" y="8685213"/>
+            <a:ext cx="2971800" cy="457200"/>
+          </a:xfrm>
+          <a:prstGeom prst="rect">
+            <a:avLst/>
+          </a:prstGeom>
+        </p:spPr>
+        <p:txBody>
+          <a:bodyPr vert="horz" lIns="91440" tIns="45720" rIns="91440" bIns="45720" rtlCol="0" anchor="b"/>
+          <a:lstStyle>
+            <a:lvl1pPr algn="l">
+              <a:defRPr sz="1200"/>
+            </a:lvl1pPr>
+          </a:lstStyle>
+          <a:p>
+            <a:endParaRPr lang="en-US"/>
+          </a:p>
+        </p:txBody>
+      </p:sp>
+      <p:sp>
+        <p:nvSpPr>
+          <p:cNvPr id="7" name="Slide Number Placeholder 6"/>
+          <p:cNvSpPr>
+            <a:spLocks noGrp="1"/>
+          </p:cNvSpPr>
+          <p:nvPr>
+            <p:ph type="sldNum" sz="quarter" idx="5"/>
+          </p:nvPr>
+        </p:nvSpPr>
+        <p:spPr>
+          <a:xfrm>
+            <a:off x="3884613" y="8685213"/>
+            <a:ext cx="2971800" cy="457200"/>
+          </a:xfrm>
+          <a:prstGeom prst="rect">
+            <a:avLst/>
+          </a:prstGeom>
+        </p:spPr>
+        <p:txBody>
+          <a:bodyPr vert="horz" lIns="91440" tIns="45720" rIns="91440" bIns="45720" rtlCol="0" anchor="b"/>
+          <a:lstStyle>
+            <a:lvl1pPr algn="r">
+              <a:defRPr sz="1200"/>
+            </a:lvl1pPr>
+          </a:lstStyle>
+          <a:p>
+            <a:fld id="{BB5E49A5-4136-284D-997B-48E1D791AD67}" type="slidenum">
+              <a:rPr lang="en-US" smtClean="0"/>
+              <a:t>‹#›</a:t>
+            </a:fld>
+            <a:endParaRPr lang="en-US"/>
+          </a:p>
+        </p:txBody>
+      </p:sp>
+    </p:spTree>
+    <p:extLst>
+      <p:ext uri="{BB962C8B-B14F-4D97-AF65-F5344CB8AC3E}">
+        <p14:creationId xmlns:p14="http://schemas.microsoft.com/office/powerpoint/2010/main" val="2623252185"/>
+      </p:ext>
+    </p:extLst>
+  </p:cSld>
+  <p:clrMap bg1="lt1" tx1="dk1" bg2="lt2" tx2="dk2" accent1="accent1" accent2="accent2" accent3="accent3" accent4="accent4" accent5="accent5" accent6="accent6" hlink="hlink" folHlink="folHlink"/>
+  <p:notesStyle>
+    <a:lvl1pPr marL="0" algn="l" defTabSz="457200" rtl="0" eaLnBrk="1" latinLnBrk="0" hangingPunct="1">
+      <a:defRPr sz="1200" kern="1200">
+        <a:solidFill>
+          <a:schemeClr val="tx1"/>
+        </a:solidFill>
+        <a:latin typeface="+mn-lt"/>
+        <a:ea typeface="+mn-ea"/>
+        <a:cs typeface="+mn-cs"/>
+      </a:defRPr>
+    </a:lvl1pPr>
+    <a:lvl2pPr marL="457200" algn="l" defTabSz="457200" rtl="0" eaLnBrk="1" latinLnBrk="0" hangingPunct="1">
+      <a:defRPr sz="1200" kern="1200">
+        <a:solidFill>
+          <a:schemeClr val="tx1"/>
+        </a:solidFill>
+        <a:latin typeface="+mn-lt"/>
+        <a:ea typeface="+mn-ea"/>
+        <a:cs typeface="+mn-cs"/>
+      </a:defRPr>
+    </a:lvl2pPr>
+    <a:lvl3pPr marL="914400" algn="l" defTabSz="457200" rtl="0" eaLnBrk="1" latinLnBrk="0" hangingPunct="1">
+      <a:defRPr sz="1200" kern="1200">
+        <a:solidFill>
+          <a:schemeClr val="tx1"/>
+        </a:solidFill>
+        <a:latin typeface="+mn-lt"/>
+        <a:ea typeface="+mn-ea"/>
+        <a:cs typeface="+mn-cs"/>
+      </a:defRPr>
+    </a:lvl3pPr>
+    <a:lvl4pPr marL="1371600" algn="l" defTabSz="457200" rtl="0" eaLnBrk="1" latinLnBrk="0" hangingPunct="1">
+      <a:defRPr sz="1200" kern="1200">
+        <a:solidFill>
+          <a:schemeClr val="tx1"/>
+        </a:solidFill>
+        <a:latin typeface="+mn-lt"/>
+        <a:ea typeface="+mn-ea"/>
+        <a:cs typeface="+mn-cs"/>
+      </a:defRPr>
+    </a:lvl4pPr>
+    <a:lvl5pPr marL="1828800" algn="l" defTabSz="457200" rtl="0" eaLnBrk="1" latinLnBrk="0" hangingPunct="1">
+      <a:defRPr sz="1200" kern="1200">
+        <a:solidFill>
+          <a:schemeClr val="tx1"/>
+        </a:solidFill>
+        <a:latin typeface="+mn-lt"/>
+        <a:ea typeface="+mn-ea"/>
+        <a:cs typeface="+mn-cs"/>
+      </a:defRPr>
+    </a:lvl5pPr>
+    <a:lvl6pPr marL="2286000" algn="l" defTabSz="457200" rtl="0" eaLnBrk="1" latinLnBrk="0" hangingPunct="1">
+      <a:defRPr sz="1200" kern="1200">
+        <a:solidFill>
+          <a:schemeClr val="tx1"/>
+        </a:solidFill>
+        <a:latin typeface="+mn-lt"/>
+        <a:ea typeface="+mn-ea"/>
+        <a:cs typeface="+mn-cs"/>
+      </a:defRPr>
+    </a:lvl6pPr>
+    <a:lvl7pPr marL="2743200" algn="l" defTabSz="457200" rtl="0" eaLnBrk="1" latinLnBrk="0" hangingPunct="1">
+      <a:defRPr sz="1200" kern="1200">
+        <a:solidFill>
+          <a:schemeClr val="tx1"/>
+        </a:solidFill>
+        <a:latin typeface="+mn-lt"/>
+        <a:ea typeface="+mn-ea"/>
+        <a:cs typeface="+mn-cs"/>
+      </a:defRPr>
+    </a:lvl7pPr>
+    <a:lvl8pPr marL="3200400" algn="l" defTabSz="457200" rtl="0" eaLnBrk="1" latinLnBrk="0" hangingPunct="1">
+      <a:defRPr sz="1200" kern="1200">
+        <a:solidFill>
+          <a:schemeClr val="tx1"/>
+        </a:solidFill>
+        <a:latin typeface="+mn-lt"/>
+        <a:ea typeface="+mn-ea"/>
+        <a:cs typeface="+mn-cs"/>
+      </a:defRPr>
+    </a:lvl8pPr>
+    <a:lvl9pPr marL="3657600" algn="l" defTabSz="457200" rtl="0" eaLnBrk="1" latinLnBrk="0" hangingPunct="1">
+      <a:defRPr sz="1200" kern="1200">
+        <a:solidFill>
+          <a:schemeClr val="tx1"/>
+        </a:solidFill>
+        <a:latin typeface="+mn-lt"/>
+        <a:ea typeface="+mn-ea"/>
+        <a:cs typeface="+mn-cs"/>
+      </a:defRPr>
+    </a:lvl9pPr>
+  </p:notesStyle>
+</p:notesMaster>
+</file>
+
+<file path=ppt/notesSlides/notesSlide1.xml><?xml version="1.0" encoding="utf-8"?>
+<p:notes xmlns:a="http://schemas.openxmlformats.org/drawingml/2006/main" xmlns:p="http://schemas.openxmlformats.org/presentationml/2006/main" xmlns:r="http://schemas.openxmlformats.org/officeDocument/2006/relationships">
+  <p:cSld>
+    <p:spTree>
+      <p:nvGrpSpPr>
+        <p:cNvPr id="1" name=""/>
+        <p:cNvGrpSpPr/>
+        <p:nvPr/>
+      </p:nvGrpSpPr>
+      <p:grpSpPr>
+        <a:xfrm>
+          <a:off x="0" y="0"/>
+          <a:ext cx="0" cy="0"/>
+          <a:chOff x="0" y="0"/>
+          <a:chExt cx="0" cy="0"/>
+        </a:xfrm>
+      </p:grpSpPr>
+      <p:sp>
+        <p:nvSpPr>
+          <p:cNvPr id="2" name="Slide Image Placeholder 1"/>
+          <p:cNvSpPr>
+            <a:spLocks noGrp="1"/>
+          </p:cNvSpPr>
+          <p:nvPr>
+            <p:ph type="sldImg" idx="2"/>
+          </p:nvPr>
+        </p:nvSpPr>
+        <p:spPr/>
+      </p:sp>
+      <p:sp>
+        <p:nvSpPr>
+          <p:cNvPr id="3" name="Notes Placeholder 2"/>
+          <p:cNvSpPr>
+            <a:spLocks noGrp="1"/>
+          </p:cNvSpPr>
+          <p:nvPr>
+            <p:ph type="body" idx="3" sz="quarter"/>
+          </p:nvPr>
+        </p:nvSpPr>
+        <p:spPr/>
+        <p:txBody>
+          <a:bodyPr/>
+          <a:lstStyle/>
+          <a:p>
+            <a:r>
+              <a:t>Aula 6 (cobre as semanas 6-9). Agora corrigimos o código: as classes de falha do OWASP Top 10 e como remediá-las. Entregável: 1-2 controles corrigidos ponta-a-ponta (prova de conceito) + plano de remediação do restante (Fase 4).</a:t>
+            </a:r>
+          </a:p>
+        </p:txBody>
+      </p:sp>
+      <p:sp>
+        <p:nvSpPr>
+          <p:cNvPr id="4" name="Slide Number Placeholder 3"/>
+          <p:cNvSpPr>
+            <a:spLocks noGrp="1"/>
+          </p:cNvSpPr>
+          <p:nvPr>
+            <p:ph type="sldNum" idx="5" sz="quarter"/>
+          </p:nvPr>
+        </p:nvSpPr>
+        <p:spPr/>
+      </p:sp>
+    </p:spTree>
+  </p:cSld>
+  <p:clrMapOvr>
+    <a:masterClrMapping/>
+  </p:clrMapOvr>
+</p:notes>
+</file>
+
+<file path=ppt/notesSlides/notesSlide2.xml><?xml version="1.0" encoding="utf-8"?>
+<p:notes xmlns:a="http://schemas.openxmlformats.org/drawingml/2006/main" xmlns:p="http://schemas.openxmlformats.org/presentationml/2006/main" xmlns:r="http://schemas.openxmlformats.org/officeDocument/2006/relationships">
+  <p:cSld>
+    <p:spTree>
+      <p:nvGrpSpPr>
+        <p:cNvPr id="1" name=""/>
+        <p:cNvGrpSpPr/>
+        <p:nvPr/>
+      </p:nvGrpSpPr>
+      <p:grpSpPr>
+        <a:xfrm>
+          <a:off x="0" y="0"/>
+          <a:ext cx="0" cy="0"/>
+          <a:chOff x="0" y="0"/>
+          <a:chExt cx="0" cy="0"/>
+        </a:xfrm>
+      </p:grpSpPr>
+      <p:sp>
+        <p:nvSpPr>
+          <p:cNvPr id="2" name="Slide Image Placeholder 1"/>
+          <p:cNvSpPr>
+            <a:spLocks noGrp="1"/>
+          </p:cNvSpPr>
+          <p:nvPr>
+            <p:ph type="sldImg" idx="2"/>
+          </p:nvPr>
+        </p:nvSpPr>
+        <p:spPr/>
+      </p:sp>
+      <p:sp>
+        <p:nvSpPr>
+          <p:cNvPr id="3" name="Notes Placeholder 2"/>
+          <p:cNvSpPr>
+            <a:spLocks noGrp="1"/>
+          </p:cNvSpPr>
+          <p:nvPr>
+            <p:ph type="body" idx="3" sz="quarter"/>
+          </p:nvPr>
+        </p:nvSpPr>
+        <p:spPr/>
+        <p:txBody>
+          <a:bodyPr/>
+          <a:lstStyle/>
+          <a:p>
+            <a:r>
+              <a:t>O OWASP Top 10 é a lista das categorias de falha mais frequentes, revisada com base em milhões de aplicações. A01 (Broken Access Control) é o #1 — e é exatamente o IDOR do VidaPlus. Em 2025 surgiram A03 (Supply Chain) e A10 (Mishandling of Exceptional Conditions). Quase toda vulnerabilidade plantada no projeto cai em uma dessas classes.</a:t>
+            </a:r>
+          </a:p>
+        </p:txBody>
+      </p:sp>
+      <p:sp>
+        <p:nvSpPr>
+          <p:cNvPr id="4" name="Slide Number Placeholder 3"/>
+          <p:cNvSpPr>
+            <a:spLocks noGrp="1"/>
+          </p:cNvSpPr>
+          <p:nvPr>
+            <p:ph type="sldNum" idx="5" sz="quarter"/>
+          </p:nvPr>
+        </p:nvSpPr>
+        <p:spPr/>
+      </p:sp>
+    </p:spTree>
+  </p:cSld>
+  <p:clrMapOvr>
+    <a:masterClrMapping/>
+  </p:clrMapOvr>
+</p:notes>
+</file>
+
+<file path=ppt/notesSlides/notesSlide3.xml><?xml version="1.0" encoding="utf-8"?>
+<p:notes xmlns:a="http://schemas.openxmlformats.org/drawingml/2006/main" xmlns:p="http://schemas.openxmlformats.org/presentationml/2006/main" xmlns:r="http://schemas.openxmlformats.org/officeDocument/2006/relationships">
+  <p:cSld>
+    <p:spTree>
+      <p:nvGrpSpPr>
+        <p:cNvPr id="1" name=""/>
+        <p:cNvGrpSpPr/>
+        <p:nvPr/>
+      </p:nvGrpSpPr>
+      <p:grpSpPr>
+        <a:xfrm>
+          <a:off x="0" y="0"/>
+          <a:ext cx="0" cy="0"/>
+          <a:chOff x="0" y="0"/>
+          <a:chExt cx="0" cy="0"/>
+        </a:xfrm>
+      </p:grpSpPr>
+      <p:sp>
+        <p:nvSpPr>
+          <p:cNvPr id="2" name="Slide Image Placeholder 1"/>
+          <p:cNvSpPr>
+            <a:spLocks noGrp="1"/>
+          </p:cNvSpPr>
+          <p:nvPr>
+            <p:ph type="sldImg" idx="2"/>
+          </p:nvPr>
+        </p:nvSpPr>
+        <p:spPr/>
+      </p:sp>
+      <p:sp>
+        <p:nvSpPr>
+          <p:cNvPr id="3" name="Notes Placeholder 2"/>
+          <p:cNvSpPr>
+            <a:spLocks noGrp="1"/>
+          </p:cNvSpPr>
+          <p:nvPr>
+            <p:ph type="body" idx="3" sz="quarter"/>
+          </p:nvPr>
+        </p:nvSpPr>
+        <p:spPr/>
+        <p:txBody>
+          <a:bodyPr/>
+          <a:lstStyle/>
+          <a:p>
+            <a:r>
+              <a:t>Para cada classe há um padrão de correção consagrado. Injection: nunca concatenar SQL — use parâmetros ('SELECT ... WHERE email = ?'). Access Control: valide no SERVIDOR que o recurso pertence ao usuário; nunca confie no cliente. Crypto: use primitivas modernas. Segredos: fora do código, em cofre/variável de ambiente.</a:t>
+            </a:r>
+          </a:p>
+        </p:txBody>
+      </p:sp>
+      <p:sp>
+        <p:nvSpPr>
+          <p:cNvPr id="4" name="Slide Number Placeholder 3"/>
+          <p:cNvSpPr>
+            <a:spLocks noGrp="1"/>
+          </p:cNvSpPr>
+          <p:nvPr>
+            <p:ph type="sldNum" idx="5" sz="quarter"/>
+          </p:nvPr>
+        </p:nvSpPr>
+        <p:spPr/>
+      </p:sp>
+    </p:spTree>
+  </p:cSld>
+  <p:clrMapOvr>
+    <a:masterClrMapping/>
+  </p:clrMapOvr>
+</p:notes>
+</file>
+
+<file path=ppt/notesSlides/notesSlide4.xml><?xml version="1.0" encoding="utf-8"?>
+<p:notes xmlns:a="http://schemas.openxmlformats.org/drawingml/2006/main" xmlns:p="http://schemas.openxmlformats.org/presentationml/2006/main" xmlns:r="http://schemas.openxmlformats.org/officeDocument/2006/relationships">
+  <p:cSld>
+    <p:spTree>
+      <p:nvGrpSpPr>
+        <p:cNvPr id="1" name=""/>
+        <p:cNvGrpSpPr/>
+        <p:nvPr/>
+      </p:nvGrpSpPr>
+      <p:grpSpPr>
+        <a:xfrm>
+          <a:off x="0" y="0"/>
+          <a:ext cx="0" cy="0"/>
+          <a:chOff x="0" y="0"/>
+          <a:chExt cx="0" cy="0"/>
+        </a:xfrm>
+      </p:grpSpPr>
+      <p:sp>
+        <p:nvSpPr>
+          <p:cNvPr id="2" name="Slide Image Placeholder 1"/>
+          <p:cNvSpPr>
+            <a:spLocks noGrp="1"/>
+          </p:cNvSpPr>
+          <p:nvPr>
+            <p:ph type="sldImg" idx="2"/>
+          </p:nvPr>
+        </p:nvSpPr>
+        <p:spPr/>
+      </p:sp>
+      <p:sp>
+        <p:nvSpPr>
+          <p:cNvPr id="3" name="Notes Placeholder 2"/>
+          <p:cNvSpPr>
+            <a:spLocks noGrp="1"/>
+          </p:cNvSpPr>
+          <p:nvPr>
+            <p:ph type="body" idx="3" sz="quarter"/>
+          </p:nvPr>
+        </p:nvSpPr>
+        <p:spPr/>
+        <p:txBody>
+          <a:bodyPr/>
+          <a:lstStyle/>
+          <a:p>
+            <a:r>
+              <a:t>Exemplo trabalhado do controle P0 mais importante do projeto. O legado confia no id vindo do cliente (IDOR). A correção é validar o OWNERSHIP no servidor antes de devolver o recurso; se não for do usuário, HTTP 403 — e a resposta não pode vazar metadados (nome do exame, tipo), senão vira enumeração. O RGS é o teste automatizado que prova o 403.</a:t>
+            </a:r>
+          </a:p>
+        </p:txBody>
+      </p:sp>
+      <p:sp>
+        <p:nvSpPr>
+          <p:cNvPr id="4" name="Slide Number Placeholder 3"/>
+          <p:cNvSpPr>
+            <a:spLocks noGrp="1"/>
+          </p:cNvSpPr>
+          <p:nvPr>
+            <p:ph type="sldNum" idx="5" sz="quarter"/>
+          </p:nvPr>
+        </p:nvSpPr>
+        <p:spPr/>
+      </p:sp>
+    </p:spTree>
+  </p:cSld>
+  <p:clrMapOvr>
+    <a:masterClrMapping/>
+  </p:clrMapOvr>
+</p:notes>
+</file>
+
+<file path=ppt/notesSlides/notesSlide5.xml><?xml version="1.0" encoding="utf-8"?>
+<p:notes xmlns:a="http://schemas.openxmlformats.org/drawingml/2006/main" xmlns:p="http://schemas.openxmlformats.org/presentationml/2006/main" xmlns:r="http://schemas.openxmlformats.org/officeDocument/2006/relationships">
+  <p:cSld>
+    <p:spTree>
+      <p:nvGrpSpPr>
+        <p:cNvPr id="1" name=""/>
+        <p:cNvGrpSpPr/>
+        <p:nvPr/>
+      </p:nvGrpSpPr>
+      <p:grpSpPr>
+        <a:xfrm>
+          <a:off x="0" y="0"/>
+          <a:ext cx="0" cy="0"/>
+          <a:chOff x="0" y="0"/>
+          <a:chExt cx="0" cy="0"/>
+        </a:xfrm>
+      </p:grpSpPr>
+      <p:sp>
+        <p:nvSpPr>
+          <p:cNvPr id="2" name="Slide Image Placeholder 1"/>
+          <p:cNvSpPr>
+            <a:spLocks noGrp="1"/>
+          </p:cNvSpPr>
+          <p:nvPr>
+            <p:ph type="sldImg" idx="2"/>
+          </p:nvPr>
+        </p:nvSpPr>
+        <p:spPr/>
+      </p:sp>
+      <p:sp>
+        <p:nvSpPr>
+          <p:cNvPr id="3" name="Notes Placeholder 2"/>
+          <p:cNvSpPr>
+            <a:spLocks noGrp="1"/>
+          </p:cNvSpPr>
+          <p:nvPr>
+            <p:ph type="body" idx="3" sz="quarter"/>
+          </p:nvPr>
+        </p:nvSpPr>
+        <p:spPr/>
+        <p:txBody>
+          <a:bodyPr/>
+          <a:lstStyle/>
+          <a:p>
+            <a:r>
+              <a:t>Além de corrigir falhas, alguns grupos criam módulos que a LGPD exige e não existem no legado. Consentimento: registro versionado e revogável. Portabilidade: exportar os dados do titular. Eliminação: anonimizar o prontuário (dever de guarda) e remover a credencial. Auditoria: trilha imutável encadeada por hash, sem PII no log.</a:t>
+            </a:r>
+          </a:p>
+        </p:txBody>
+      </p:sp>
+      <p:sp>
+        <p:nvSpPr>
+          <p:cNvPr id="4" name="Slide Number Placeholder 3"/>
+          <p:cNvSpPr>
+            <a:spLocks noGrp="1"/>
+          </p:cNvSpPr>
+          <p:nvPr>
+            <p:ph type="sldNum" idx="5" sz="quarter"/>
+          </p:nvPr>
+        </p:nvSpPr>
+        <p:spPr/>
+      </p:sp>
+    </p:spTree>
+  </p:cSld>
+  <p:clrMapOvr>
+    <a:masterClrMapping/>
+  </p:clrMapOvr>
+</p:notes>
+</file>
+
+<file path=ppt/notesSlides/notesSlide6.xml><?xml version="1.0" encoding="utf-8"?>
+<p:notes xmlns:a="http://schemas.openxmlformats.org/drawingml/2006/main" xmlns:p="http://schemas.openxmlformats.org/presentationml/2006/main" xmlns:r="http://schemas.openxmlformats.org/officeDocument/2006/relationships">
+  <p:cSld>
+    <p:spTree>
+      <p:nvGrpSpPr>
+        <p:cNvPr id="1" name=""/>
+        <p:cNvGrpSpPr/>
+        <p:nvPr/>
+      </p:nvGrpSpPr>
+      <p:grpSpPr>
+        <a:xfrm>
+          <a:off x="0" y="0"/>
+          <a:ext cx="0" cy="0"/>
+          <a:chOff x="0" y="0"/>
+          <a:chExt cx="0" cy="0"/>
+        </a:xfrm>
+      </p:grpSpPr>
+      <p:sp>
+        <p:nvSpPr>
+          <p:cNvPr id="2" name="Slide Image Placeholder 1"/>
+          <p:cNvSpPr>
+            <a:spLocks noGrp="1"/>
+          </p:cNvSpPr>
+          <p:nvPr>
+            <p:ph type="sldImg" idx="2"/>
+          </p:nvPr>
+        </p:nvSpPr>
+        <p:spPr/>
+      </p:sp>
+      <p:sp>
+        <p:nvSpPr>
+          <p:cNvPr id="3" name="Notes Placeholder 2"/>
+          <p:cNvSpPr>
+            <a:spLocks noGrp="1"/>
+          </p:cNvSpPr>
+          <p:nvPr>
+            <p:ph type="body" idx="3" sz="quarter"/>
+          </p:nvPr>
+        </p:nvSpPr>
+        <p:spPr/>
+        <p:txBody>
+          <a:bodyPr/>
+          <a:lstStyle/>
+          <a:p>
+            <a:r>
+              <a:t>A remediação é PROVA DE CONCEITO: como a disciplina foca em processo, o grupo corrige poucos controles (1-2), mas ponta-a-ponta — do requisito à evidência. Para o restante das falhas do seu pacote, entrega um plano de remediação (o quê, como, esforço, prioridade), sem precisar codar. Trabalhe por Pull Request, com revisão por pares.</a:t>
+            </a:r>
+          </a:p>
+        </p:txBody>
+      </p:sp>
+      <p:sp>
+        <p:nvSpPr>
+          <p:cNvPr id="4" name="Slide Number Placeholder 3"/>
+          <p:cNvSpPr>
+            <a:spLocks noGrp="1"/>
+          </p:cNvSpPr>
+          <p:nvPr>
+            <p:ph type="sldNum" idx="5" sz="quarter"/>
+          </p:nvPr>
+        </p:nvSpPr>
+        <p:spPr/>
+      </p:sp>
+    </p:spTree>
+  </p:cSld>
+  <p:clrMapOvr>
+    <a:masterClrMapping/>
+  </p:clrMapOvr>
+</p:notes>
 </file>
 
 <file path=ppt/slideLayouts/slideLayout1.xml><?xml version="1.0" encoding="utf-8"?>
@@ -3441,6 +4212,316 @@
 </p:sld>
 </file>
 
+<file path=ppt/slides/slide10.xml><?xml version="1.0" encoding="utf-8"?>
+<p:sld xmlns:a="http://schemas.openxmlformats.org/drawingml/2006/main" xmlns:p="http://schemas.openxmlformats.org/presentationml/2006/main" xmlns:r="http://schemas.openxmlformats.org/officeDocument/2006/relationships">
+  <p:cSld>
+    <p:spTree>
+      <p:nvGrpSpPr>
+        <p:cNvPr id="1" name=""/>
+        <p:cNvGrpSpPr/>
+        <p:nvPr/>
+      </p:nvGrpSpPr>
+      <p:grpSpPr/>
+      <p:sp>
+        <p:nvSpPr>
+          <p:cNvPr id="2" name="Rectangle 1"/>
+          <p:cNvSpPr/>
+          <p:nvPr/>
+        </p:nvSpPr>
+        <p:spPr>
+          <a:xfrm>
+            <a:off x="0" y="0"/>
+            <a:ext cx="12191695" cy="6858000"/>
+          </a:xfrm>
+          <a:prstGeom prst="rect">
+            <a:avLst/>
+          </a:prstGeom>
+          <a:solidFill>
+            <a:srgbClr val="1F5232"/>
+          </a:solidFill>
+          <a:ln>
+            <a:noFill/>
+          </a:ln>
+          <a:effectLst/>
+        </p:spPr>
+        <p:style>
+          <a:lnRef idx="1">
+            <a:schemeClr val="accent1"/>
+          </a:lnRef>
+          <a:fillRef idx="3">
+            <a:schemeClr val="accent1"/>
+          </a:fillRef>
+          <a:effectRef idx="2">
+            <a:schemeClr val="accent1"/>
+          </a:effectRef>
+          <a:fontRef idx="minor">
+            <a:schemeClr val="lt1"/>
+          </a:fontRef>
+        </p:style>
+        <p:txBody>
+          <a:bodyPr rtlCol="0" anchor="ctr"/>
+          <a:lstStyle/>
+          <a:p>
+            <a:pPr algn="ctr"/>
+          </a:p>
+        </p:txBody>
+      </p:sp>
+      <p:pic>
+        <p:nvPicPr>
+          <p:cNvPr id="3" name="Picture 2" descr="logo_branco.png"/>
+          <p:cNvPicPr>
+            <a:picLocks noChangeAspect="1"/>
+          </p:cNvPicPr>
+          <p:nvPr/>
+        </p:nvPicPr>
+        <p:blipFill>
+          <a:blip r:embed="rId2"/>
+          <a:stretch>
+            <a:fillRect/>
+          </a:stretch>
+        </p:blipFill>
+        <p:spPr>
+          <a:xfrm>
+            <a:off x="4142232" y="548640"/>
+            <a:ext cx="3909060" cy="868680"/>
+          </a:xfrm>
+          <a:prstGeom prst="rect">
+            <a:avLst/>
+          </a:prstGeom>
+        </p:spPr>
+      </p:pic>
+      <p:sp>
+        <p:nvSpPr>
+          <p:cNvPr id="4" name="TextBox 3"/>
+          <p:cNvSpPr txBox="1"/>
+          <p:nvPr/>
+        </p:nvSpPr>
+        <p:spPr>
+          <a:xfrm>
+            <a:off x="457200" y="2194560"/>
+            <a:ext cx="11247120" cy="1371600"/>
+          </a:xfrm>
+          <a:prstGeom prst="rect">
+            <a:avLst/>
+          </a:prstGeom>
+          <a:noFill/>
+        </p:spPr>
+        <p:txBody>
+          <a:bodyPr wrap="square" anchor="t" lIns="0" rIns="0" tIns="0" bIns="0">
+            <a:spAutoFit/>
+          </a:bodyPr>
+          <a:lstStyle/>
+          <a:p>
+            <a:pPr algn="ctr">
+              <a:lnSpc>
+                <a:spcPct val="100000"/>
+              </a:lnSpc>
+              <a:spcBef>
+                <a:spcPts val="0"/>
+              </a:spcBef>
+              <a:spcAft>
+                <a:spcPts val="600"/>
+              </a:spcAft>
+            </a:pPr>
+            <a:r>
+              <a:rPr sz="8800" b="1" i="0">
+                <a:solidFill>
+                  <a:srgbClr val="7CB342"/>
+                </a:solidFill>
+                <a:latin typeface="Open Sans"/>
+              </a:rPr>
+              <a:t>Perguntas?</a:t>
+            </a:r>
+          </a:p>
+        </p:txBody>
+      </p:sp>
+      <p:sp>
+        <p:nvSpPr>
+          <p:cNvPr id="5" name="Rectangle 4"/>
+          <p:cNvSpPr/>
+          <p:nvPr/>
+        </p:nvSpPr>
+        <p:spPr>
+          <a:xfrm>
+            <a:off x="5184648" y="3977639"/>
+            <a:ext cx="1828800" cy="25400"/>
+          </a:xfrm>
+          <a:prstGeom prst="rect">
+            <a:avLst/>
+          </a:prstGeom>
+          <a:solidFill>
+            <a:srgbClr val="7CB342"/>
+          </a:solidFill>
+          <a:ln>
+            <a:noFill/>
+          </a:ln>
+          <a:effectLst/>
+        </p:spPr>
+        <p:style>
+          <a:lnRef idx="1">
+            <a:schemeClr val="accent1"/>
+          </a:lnRef>
+          <a:fillRef idx="3">
+            <a:schemeClr val="accent1"/>
+          </a:fillRef>
+          <a:effectRef idx="2">
+            <a:schemeClr val="accent1"/>
+          </a:effectRef>
+          <a:fontRef idx="minor">
+            <a:schemeClr val="lt1"/>
+          </a:fontRef>
+        </p:style>
+        <p:txBody>
+          <a:bodyPr rtlCol="0" anchor="ctr"/>
+          <a:lstStyle/>
+          <a:p>
+            <a:pPr algn="ctr"/>
+          </a:p>
+        </p:txBody>
+      </p:sp>
+      <p:sp>
+        <p:nvSpPr>
+          <p:cNvPr id="6" name="TextBox 5"/>
+          <p:cNvSpPr txBox="1"/>
+          <p:nvPr/>
+        </p:nvSpPr>
+        <p:spPr>
+          <a:xfrm>
+            <a:off x="457200" y="4297680"/>
+            <a:ext cx="11247120" cy="457200"/>
+          </a:xfrm>
+          <a:prstGeom prst="rect">
+            <a:avLst/>
+          </a:prstGeom>
+          <a:noFill/>
+        </p:spPr>
+        <p:txBody>
+          <a:bodyPr wrap="square" anchor="t" lIns="0" rIns="0" tIns="0" bIns="0">
+            <a:spAutoFit/>
+          </a:bodyPr>
+          <a:lstStyle/>
+          <a:p>
+            <a:pPr algn="ctr">
+              <a:lnSpc>
+                <a:spcPct val="100000"/>
+              </a:lnSpc>
+              <a:spcBef>
+                <a:spcPts val="0"/>
+              </a:spcBef>
+              <a:spcAft>
+                <a:spcPts val="600"/>
+              </a:spcAft>
+            </a:pPr>
+            <a:r>
+              <a:rPr sz="2200" b="1" i="0">
+                <a:solidFill>
+                  <a:srgbClr val="FFFFFF"/>
+                </a:solidFill>
+                <a:latin typeface="Open Sans"/>
+              </a:rPr>
+              <a:t>Prof. Dr. Alex Mulattieri Suarez Orozco</a:t>
+            </a:r>
+          </a:p>
+        </p:txBody>
+      </p:sp>
+      <p:sp>
+        <p:nvSpPr>
+          <p:cNvPr id="7" name="TextBox 6"/>
+          <p:cNvSpPr txBox="1"/>
+          <p:nvPr/>
+        </p:nvSpPr>
+        <p:spPr>
+          <a:xfrm>
+            <a:off x="457200" y="4800600"/>
+            <a:ext cx="11247120" cy="457200"/>
+          </a:xfrm>
+          <a:prstGeom prst="rect">
+            <a:avLst/>
+          </a:prstGeom>
+          <a:noFill/>
+        </p:spPr>
+        <p:txBody>
+          <a:bodyPr wrap="square" anchor="t" lIns="0" rIns="0" tIns="0" bIns="0">
+            <a:spAutoFit/>
+          </a:bodyPr>
+          <a:lstStyle/>
+          <a:p>
+            <a:pPr algn="ctr">
+              <a:lnSpc>
+                <a:spcPct val="100000"/>
+              </a:lnSpc>
+              <a:spcBef>
+                <a:spcPts val="0"/>
+              </a:spcBef>
+              <a:spcAft>
+                <a:spcPts val="600"/>
+              </a:spcAft>
+            </a:pPr>
+            <a:r>
+              <a:rPr sz="1800" b="0" i="1">
+                <a:solidFill>
+                  <a:srgbClr val="CCD7C0"/>
+                </a:solidFill>
+                <a:latin typeface="Open Sans"/>
+              </a:rPr>
+              <a:t>alexorozco@ifsul.edu.br</a:t>
+            </a:r>
+          </a:p>
+        </p:txBody>
+      </p:sp>
+      <p:sp>
+        <p:nvSpPr>
+          <p:cNvPr id="8" name="TextBox 7"/>
+          <p:cNvSpPr txBox="1"/>
+          <p:nvPr/>
+        </p:nvSpPr>
+        <p:spPr>
+          <a:xfrm>
+            <a:off x="457200" y="5943600"/>
+            <a:ext cx="11247120" cy="457200"/>
+          </a:xfrm>
+          <a:prstGeom prst="rect">
+            <a:avLst/>
+          </a:prstGeom>
+          <a:noFill/>
+        </p:spPr>
+        <p:txBody>
+          <a:bodyPr wrap="square" anchor="t" lIns="0" rIns="0" tIns="0" bIns="0">
+            <a:spAutoFit/>
+          </a:bodyPr>
+          <a:lstStyle/>
+          <a:p>
+            <a:pPr algn="ctr">
+              <a:lnSpc>
+                <a:spcPct val="100000"/>
+              </a:lnSpc>
+              <a:spcBef>
+                <a:spcPts val="0"/>
+              </a:spcBef>
+              <a:spcAft>
+                <a:spcPts val="600"/>
+              </a:spcAft>
+            </a:pPr>
+            <a:r>
+              <a:rPr sz="1400" b="0" i="0">
+                <a:solidFill>
+                  <a:srgbClr val="CCD7C0"/>
+                </a:solidFill>
+                <a:latin typeface="Open Sans"/>
+              </a:rPr>
+              <a:t>IFSul · Câmpus Sapucaia do Sul</a:t>
+            </a:r>
+          </a:p>
+        </p:txBody>
+      </p:sp>
+    </p:spTree>
+  </p:cSld>
+  <p:clrMapOvr>
+    <a:masterClrMapping/>
+  </p:clrMapOvr>
+</p:sld>
+</file>
+
 <file path=ppt/slides/slide2.xml><?xml version="1.0" encoding="utf-8"?>
 <p:sld xmlns:a="http://schemas.openxmlformats.org/drawingml/2006/main" xmlns:p="http://schemas.openxmlformats.org/presentationml/2006/main" xmlns:r="http://schemas.openxmlformats.org/officeDocument/2006/relationships">
   <p:cSld>
@@ -3821,7 +4902,7 @@
                 </a:solidFill>
                 <a:latin typeface="Open Sans"/>
               </a:rPr>
-              <a:t>As categorias (2 novas)</a:t>
+              <a:t>As categorias (2 novas em 2025)</a:t>
             </a:r>
           </a:p>
         </p:txBody>
@@ -4271,7 +5352,7 @@
                 </a:solidFill>
                 <a:latin typeface="Open Sans"/>
               </a:rPr>
-              <a:t>CORS, headers, defaults inseguros</a:t>
+              <a:t>CORS aberto, headers ausentes, defaults</a:t>
             </a:r>
           </a:p>
         </p:txBody>
@@ -4721,7 +5802,7 @@
                 </a:solidFill>
                 <a:latin typeface="Open Sans"/>
               </a:rPr>
-              <a:t>MD5, TLS fraco, segredos</a:t>
+              <a:t>MD5, TLS fraco, segredos hardcoded</a:t>
             </a:r>
           </a:p>
         </p:txBody>
@@ -5745,7 +6826,7 @@
                 </a:solidFill>
                 <a:latin typeface="Open Sans"/>
               </a:rPr>
-              <a:t>consultas parametrizadas; allowlist</a:t>
+              <a:t>consultas parametrizadas (prepared statements); allowlist</a:t>
             </a:r>
           </a:p>
         </p:txBody>
@@ -5881,7 +6962,7 @@
                 </a:solidFill>
                 <a:latin typeface="Open Sans"/>
               </a:rPr>
-              <a:t>ownership no servidor; deny by default; RBAC</a:t>
+              <a:t>validar ownership no servidor; deny by default; RBAC</a:t>
             </a:r>
           </a:p>
         </p:txBody>
@@ -6017,7 +7098,7 @@
                 </a:solidFill>
                 <a:latin typeface="Open Sans"/>
               </a:rPr>
-              <a:t>Argon2id; TLS 1.3; AES-256-GCM; nada de MD5</a:t>
+              <a:t>Argon2id; TLS 1.3; AES-256-GCM; nunca MD5/SHA-1</a:t>
             </a:r>
           </a:p>
         </p:txBody>
@@ -6153,7 +7234,7 @@
                 </a:solidFill>
                 <a:latin typeface="Open Sans"/>
               </a:rPr>
-              <a:t>cofre/variável de ambiente; secret scanning</a:t>
+              <a:t>cofre/variável de ambiente; secret scanning no CI</a:t>
             </a:r>
           </a:p>
         </p:txBody>
@@ -6305,7 +7386,7 @@
                 </a:solidFill>
                 <a:latin typeface="Open Sans"/>
               </a:rPr>
-              <a:t>Módulos LGPD a criar</a:t>
+              <a:t>Exemplo: corrigir o IDOR (A01)</a:t>
             </a:r>
           </a:p>
         </p:txBody>
@@ -6350,7 +7431,7 @@
                 </a:solidFill>
                 <a:latin typeface="Open Sans"/>
               </a:rPr>
-              <a:t>Direitos do titular viram código</a:t>
+              <a:t>O padrão do VidaPlus (F-02)</a:t>
             </a:r>
           </a:p>
         </p:txBody>
@@ -6364,7 +7445,7 @@
         <p:spPr>
           <a:xfrm>
             <a:off x="411480" y="1463040"/>
-            <a:ext cx="5468112" cy="2423160"/>
+            <a:ext cx="11384280" cy="5029200"/>
           </a:xfrm>
           <a:prstGeom prst="roundRect">
             <a:avLst/>
@@ -6372,9 +7453,9 @@
           <a:solidFill>
             <a:srgbClr val="F5F5F5"/>
           </a:solidFill>
-          <a:ln w="19050">
+          <a:ln w="15875">
             <a:solidFill>
-              <a:srgbClr val="2D7A3D"/>
+              <a:srgbClr val="7CB342"/>
             </a:solidFill>
           </a:ln>
           <a:effectLst/>
@@ -6409,8 +7490,8 @@
         </p:nvSpPr>
         <p:spPr>
           <a:xfrm>
-            <a:off x="777240" y="1737360"/>
-            <a:ext cx="4754880" cy="548640"/>
+            <a:off x="868680" y="1783080"/>
+            <a:ext cx="10515600" cy="4572000"/>
           </a:xfrm>
           <a:prstGeom prst="rect">
             <a:avLst/>
@@ -6418,52 +7499,7 @@
           <a:noFill/>
         </p:spPr>
         <p:txBody>
-          <a:bodyPr wrap="square" anchor="t" lIns="0" rIns="0" tIns="0" bIns="0">
-            <a:spAutoFit/>
-          </a:bodyPr>
-          <a:lstStyle/>
-          <a:p>
-            <a:pPr algn="l">
-              <a:lnSpc>
-                <a:spcPct val="100000"/>
-              </a:lnSpc>
-              <a:spcBef>
-                <a:spcPts val="0"/>
-              </a:spcBef>
-              <a:spcAft>
-                <a:spcPts val="600"/>
-              </a:spcAft>
-            </a:pPr>
-            <a:r>
-              <a:rPr sz="2200" b="1" i="0">
-                <a:solidFill>
-                  <a:srgbClr val="2D7A3D"/>
-                </a:solidFill>
-                <a:latin typeface="Open Sans"/>
-              </a:rPr>
-              <a:t>Consentimento</a:t>
-            </a:r>
-          </a:p>
-        </p:txBody>
-      </p:sp>
-      <p:sp>
-        <p:nvSpPr>
-          <p:cNvPr id="7" name="TextBox 6"/>
-          <p:cNvSpPr txBox="1"/>
-          <p:nvPr/>
-        </p:nvSpPr>
-        <p:spPr>
-          <a:xfrm>
-            <a:off x="777240" y="2377440"/>
-            <a:ext cx="4754880" cy="1371600"/>
-          </a:xfrm>
-          <a:prstGeom prst="rect">
-            <a:avLst/>
-          </a:prstGeom>
-          <a:noFill/>
-        </p:spPr>
-        <p:txBody>
-          <a:bodyPr wrap="square" anchor="t" lIns="0" rIns="0" tIns="0" bIns="0">
+          <a:bodyPr wrap="square">
             <a:spAutoFit/>
           </a:bodyPr>
           <a:lstStyle/>
@@ -6472,436 +7508,191 @@
               <a:lnSpc>
                 <a:spcPct val="110000"/>
               </a:lnSpc>
-              <a:spcBef>
-                <a:spcPts val="0"/>
-              </a:spcBef>
               <a:spcAft>
-                <a:spcPts val="600"/>
+                <a:spcPts val="1400"/>
               </a:spcAft>
             </a:pPr>
             <a:r>
-              <a:rPr sz="1500" b="0" i="0">
-                <a:solidFill>
-                  <a:srgbClr val="212121"/>
+              <a:rPr sz="2000" b="1">
+                <a:solidFill>
+                  <a:srgbClr val="7CB342"/>
                 </a:solidFill>
                 <a:latin typeface="Open Sans"/>
               </a:rPr>
-              <a:t>específico, versionado, revogável (art. 8/9)</a:t>
-            </a:r>
-          </a:p>
-        </p:txBody>
-      </p:sp>
-      <p:sp>
-        <p:nvSpPr>
-          <p:cNvPr id="8" name="Rounded Rectangle 7"/>
-          <p:cNvSpPr/>
-          <p:nvPr/>
-        </p:nvSpPr>
-        <p:spPr>
-          <a:xfrm>
-            <a:off x="6309360" y="1463040"/>
-            <a:ext cx="5468112" cy="2423160"/>
-          </a:xfrm>
-          <a:prstGeom prst="roundRect">
-            <a:avLst/>
-          </a:prstGeom>
-          <a:solidFill>
-            <a:srgbClr val="F5F5F5"/>
-          </a:solidFill>
-          <a:ln w="19050">
-            <a:solidFill>
-              <a:srgbClr val="1976D2"/>
-            </a:solidFill>
-          </a:ln>
-          <a:effectLst/>
-        </p:spPr>
-        <p:style>
-          <a:lnRef idx="1">
-            <a:schemeClr val="accent1"/>
-          </a:lnRef>
-          <a:fillRef idx="3">
-            <a:schemeClr val="accent1"/>
-          </a:fillRef>
-          <a:effectRef idx="2">
-            <a:schemeClr val="accent1"/>
-          </a:effectRef>
-          <a:fontRef idx="minor">
-            <a:schemeClr val="lt1"/>
-          </a:fontRef>
-        </p:style>
-        <p:txBody>
-          <a:bodyPr rtlCol="0" anchor="ctr"/>
-          <a:lstStyle/>
-          <a:p>
-            <a:pPr algn="ctr"/>
-          </a:p>
-        </p:txBody>
-      </p:sp>
-      <p:sp>
-        <p:nvSpPr>
-          <p:cNvPr id="9" name="TextBox 8"/>
-          <p:cNvSpPr txBox="1"/>
-          <p:nvPr/>
-        </p:nvSpPr>
-        <p:spPr>
-          <a:xfrm>
-            <a:off x="6675120" y="1737360"/>
-            <a:ext cx="4754880" cy="548640"/>
-          </a:xfrm>
-          <a:prstGeom prst="rect">
-            <a:avLst/>
-          </a:prstGeom>
-          <a:noFill/>
-        </p:spPr>
-        <p:txBody>
-          <a:bodyPr wrap="square" anchor="t" lIns="0" rIns="0" tIns="0" bIns="0">
-            <a:spAutoFit/>
-          </a:bodyPr>
-          <a:lstStyle/>
-          <a:p>
-            <a:pPr algn="l">
-              <a:lnSpc>
-                <a:spcPct val="100000"/>
-              </a:lnSpc>
-              <a:spcBef>
-                <a:spcPts val="0"/>
-              </a:spcBef>
-              <a:spcAft>
-                <a:spcPts val="600"/>
-              </a:spcAft>
-            </a:pPr>
-            <a:r>
-              <a:rPr sz="2200" b="1" i="0">
-                <a:solidFill>
-                  <a:srgbClr val="1976D2"/>
+              <a:t>▸ </a:t>
+            </a:r>
+            <a:r>
+              <a:rPr sz="1800" b="1">
+                <a:solidFill>
+                  <a:srgbClr val="2D7A3D"/>
                 </a:solidFill>
                 <a:latin typeface="Open Sans"/>
               </a:rPr>
-              <a:t>Portabilidade</a:t>
-            </a:r>
-          </a:p>
-        </p:txBody>
-      </p:sp>
-      <p:sp>
-        <p:nvSpPr>
-          <p:cNvPr id="10" name="TextBox 9"/>
-          <p:cNvSpPr txBox="1"/>
-          <p:nvPr/>
-        </p:nvSpPr>
-        <p:spPr>
-          <a:xfrm>
-            <a:off x="6675120" y="2377440"/>
-            <a:ext cx="4754880" cy="1371600"/>
-          </a:xfrm>
-          <a:prstGeom prst="rect">
-            <a:avLst/>
-          </a:prstGeom>
-          <a:noFill/>
-        </p:spPr>
-        <p:txBody>
-          <a:bodyPr wrap="square" anchor="t" lIns="0" rIns="0" tIns="0" bIns="0">
-            <a:spAutoFit/>
-          </a:bodyPr>
-          <a:lstStyle/>
+              <a:t>Antes (vulnerável): </a:t>
+            </a:r>
+            <a:r>
+              <a:rPr sz="1800">
+                <a:solidFill>
+                  <a:srgbClr val="212121"/>
+                </a:solidFill>
+                <a:latin typeface="Open Sans"/>
+              </a:rPr>
+              <a:t>GET /api/exames/{id} devolve qualquer exame.</a:t>
+            </a:r>
+          </a:p>
           <a:p>
             <a:pPr algn="l">
               <a:lnSpc>
                 <a:spcPct val="110000"/>
               </a:lnSpc>
-              <a:spcBef>
-                <a:spcPts val="0"/>
-              </a:spcBef>
               <a:spcAft>
-                <a:spcPts val="600"/>
+                <a:spcPts val="1400"/>
               </a:spcAft>
             </a:pPr>
             <a:r>
-              <a:rPr sz="1500" b="0" i="0">
-                <a:solidFill>
-                  <a:srgbClr val="212121"/>
+              <a:rPr sz="2000" b="1">
+                <a:solidFill>
+                  <a:srgbClr val="7CB342"/>
                 </a:solidFill>
                 <a:latin typeface="Open Sans"/>
               </a:rPr>
-              <a:t>exportar todos os dados (art. 18)</a:t>
-            </a:r>
-          </a:p>
-        </p:txBody>
-      </p:sp>
-      <p:sp>
-        <p:nvSpPr>
-          <p:cNvPr id="11" name="Rounded Rectangle 10"/>
-          <p:cNvSpPr/>
-          <p:nvPr/>
-        </p:nvSpPr>
-        <p:spPr>
-          <a:xfrm>
-            <a:off x="411480" y="4069080"/>
-            <a:ext cx="5468112" cy="2423160"/>
-          </a:xfrm>
-          <a:prstGeom prst="roundRect">
-            <a:avLst/>
-          </a:prstGeom>
-          <a:solidFill>
-            <a:srgbClr val="F5F5F5"/>
-          </a:solidFill>
-          <a:ln w="19050">
-            <a:solidFill>
-              <a:srgbClr val="7CB342"/>
-            </a:solidFill>
-          </a:ln>
-          <a:effectLst/>
-        </p:spPr>
-        <p:style>
-          <a:lnRef idx="1">
-            <a:schemeClr val="accent1"/>
-          </a:lnRef>
-          <a:fillRef idx="3">
-            <a:schemeClr val="accent1"/>
-          </a:fillRef>
-          <a:effectRef idx="2">
-            <a:schemeClr val="accent1"/>
-          </a:effectRef>
-          <a:fontRef idx="minor">
-            <a:schemeClr val="lt1"/>
-          </a:fontRef>
-        </p:style>
-        <p:txBody>
-          <a:bodyPr rtlCol="0" anchor="ctr"/>
-          <a:lstStyle/>
-          <a:p>
-            <a:pPr algn="ctr"/>
-          </a:p>
-        </p:txBody>
-      </p:sp>
-      <p:sp>
-        <p:nvSpPr>
-          <p:cNvPr id="12" name="TextBox 11"/>
-          <p:cNvSpPr txBox="1"/>
-          <p:nvPr/>
-        </p:nvSpPr>
-        <p:spPr>
-          <a:xfrm>
-            <a:off x="777240" y="4343400"/>
-            <a:ext cx="4754880" cy="548640"/>
-          </a:xfrm>
-          <a:prstGeom prst="rect">
-            <a:avLst/>
-          </a:prstGeom>
-          <a:noFill/>
-        </p:spPr>
-        <p:txBody>
-          <a:bodyPr wrap="square" anchor="t" lIns="0" rIns="0" tIns="0" bIns="0">
-            <a:spAutoFit/>
-          </a:bodyPr>
-          <a:lstStyle/>
-          <a:p>
-            <a:pPr algn="l">
-              <a:lnSpc>
-                <a:spcPct val="100000"/>
-              </a:lnSpc>
-              <a:spcBef>
-                <a:spcPts val="0"/>
-              </a:spcBef>
-              <a:spcAft>
-                <a:spcPts val="600"/>
-              </a:spcAft>
-            </a:pPr>
-            <a:r>
-              <a:rPr sz="2200" b="1" i="0">
-                <a:solidFill>
-                  <a:srgbClr val="7CB342"/>
+              <a:t>▸ </a:t>
+            </a:r>
+            <a:r>
+              <a:rPr sz="1800" b="1">
+                <a:solidFill>
+                  <a:srgbClr val="2D7A3D"/>
                 </a:solidFill>
                 <a:latin typeface="Open Sans"/>
               </a:rPr>
-              <a:t>Eliminação</a:t>
-            </a:r>
-          </a:p>
-        </p:txBody>
-      </p:sp>
-      <p:sp>
-        <p:nvSpPr>
-          <p:cNvPr id="13" name="TextBox 12"/>
-          <p:cNvSpPr txBox="1"/>
-          <p:nvPr/>
-        </p:nvSpPr>
-        <p:spPr>
-          <a:xfrm>
-            <a:off x="777240" y="4983480"/>
-            <a:ext cx="4754880" cy="1371600"/>
-          </a:xfrm>
-          <a:prstGeom prst="rect">
-            <a:avLst/>
-          </a:prstGeom>
-          <a:noFill/>
-        </p:spPr>
-        <p:txBody>
-          <a:bodyPr wrap="square" anchor="t" lIns="0" rIns="0" tIns="0" bIns="0">
-            <a:spAutoFit/>
-          </a:bodyPr>
-          <a:lstStyle/>
+              <a:t>Ataque: </a:t>
+            </a:r>
+            <a:r>
+              <a:rPr sz="1800">
+                <a:solidFill>
+                  <a:srgbClr val="212121"/>
+                </a:solidFill>
+                <a:latin typeface="Open Sans"/>
+              </a:rPr>
+              <a:t>paciente A troca o id e baixa o exame do paciente B.</a:t>
+            </a:r>
+          </a:p>
           <a:p>
             <a:pPr algn="l">
               <a:lnSpc>
                 <a:spcPct val="110000"/>
               </a:lnSpc>
-              <a:spcBef>
-                <a:spcPts val="0"/>
-              </a:spcBef>
               <a:spcAft>
-                <a:spcPts val="600"/>
+                <a:spcPts val="1400"/>
               </a:spcAft>
             </a:pPr>
             <a:r>
-              <a:rPr sz="1500" b="0" i="0">
-                <a:solidFill>
-                  <a:srgbClr val="212121"/>
+              <a:rPr sz="2000" b="1">
+                <a:solidFill>
+                  <a:srgbClr val="7CB342"/>
                 </a:solidFill>
                 <a:latin typeface="Open Sans"/>
               </a:rPr>
-              <a:t>excluir/anonimizar com retenção (art. 18)</a:t>
-            </a:r>
-          </a:p>
-        </p:txBody>
-      </p:sp>
-      <p:sp>
-        <p:nvSpPr>
-          <p:cNvPr id="14" name="Rounded Rectangle 13"/>
-          <p:cNvSpPr/>
-          <p:nvPr/>
-        </p:nvSpPr>
-        <p:spPr>
-          <a:xfrm>
-            <a:off x="6309360" y="4069080"/>
-            <a:ext cx="5468112" cy="2423160"/>
-          </a:xfrm>
-          <a:prstGeom prst="roundRect">
-            <a:avLst/>
-          </a:prstGeom>
-          <a:solidFill>
-            <a:srgbClr val="F5F5F5"/>
-          </a:solidFill>
-          <a:ln w="19050">
-            <a:solidFill>
-              <a:srgbClr val="E65100"/>
-            </a:solidFill>
-          </a:ln>
-          <a:effectLst/>
-        </p:spPr>
-        <p:style>
-          <a:lnRef idx="1">
-            <a:schemeClr val="accent1"/>
-          </a:lnRef>
-          <a:fillRef idx="3">
-            <a:schemeClr val="accent1"/>
-          </a:fillRef>
-          <a:effectRef idx="2">
-            <a:schemeClr val="accent1"/>
-          </a:effectRef>
-          <a:fontRef idx="minor">
-            <a:schemeClr val="lt1"/>
-          </a:fontRef>
-        </p:style>
-        <p:txBody>
-          <a:bodyPr rtlCol="0" anchor="ctr"/>
-          <a:lstStyle/>
-          <a:p>
-            <a:pPr algn="ctr"/>
-          </a:p>
-        </p:txBody>
-      </p:sp>
-      <p:sp>
-        <p:nvSpPr>
-          <p:cNvPr id="15" name="TextBox 14"/>
-          <p:cNvSpPr txBox="1"/>
-          <p:nvPr/>
-        </p:nvSpPr>
-        <p:spPr>
-          <a:xfrm>
-            <a:off x="6675120" y="4343400"/>
-            <a:ext cx="4754880" cy="548640"/>
-          </a:xfrm>
-          <a:prstGeom prst="rect">
-            <a:avLst/>
-          </a:prstGeom>
-          <a:noFill/>
-        </p:spPr>
-        <p:txBody>
-          <a:bodyPr wrap="square" anchor="t" lIns="0" rIns="0" tIns="0" bIns="0">
-            <a:spAutoFit/>
-          </a:bodyPr>
-          <a:lstStyle/>
-          <a:p>
-            <a:pPr algn="l">
-              <a:lnSpc>
-                <a:spcPct val="100000"/>
-              </a:lnSpc>
-              <a:spcBef>
-                <a:spcPts val="0"/>
-              </a:spcBef>
-              <a:spcAft>
-                <a:spcPts val="600"/>
-              </a:spcAft>
-            </a:pPr>
-            <a:r>
-              <a:rPr sz="2200" b="1" i="0">
-                <a:solidFill>
-                  <a:srgbClr val="E65100"/>
+              <a:t>▸ </a:t>
+            </a:r>
+            <a:r>
+              <a:rPr sz="1800" b="1">
+                <a:solidFill>
+                  <a:srgbClr val="2D7A3D"/>
                 </a:solidFill>
                 <a:latin typeface="Open Sans"/>
               </a:rPr>
-              <a:t>Auditoria</a:t>
-            </a:r>
-          </a:p>
-        </p:txBody>
-      </p:sp>
-      <p:sp>
-        <p:nvSpPr>
-          <p:cNvPr id="16" name="TextBox 15"/>
-          <p:cNvSpPr txBox="1"/>
-          <p:nvPr/>
-        </p:nvSpPr>
-        <p:spPr>
-          <a:xfrm>
-            <a:off x="6675120" y="4983480"/>
-            <a:ext cx="4754880" cy="1371600"/>
-          </a:xfrm>
-          <a:prstGeom prst="rect">
-            <a:avLst/>
-          </a:prstGeom>
-          <a:noFill/>
-        </p:spPr>
-        <p:txBody>
-          <a:bodyPr wrap="square" anchor="t" lIns="0" rIns="0" tIns="0" bIns="0">
-            <a:spAutoFit/>
-          </a:bodyPr>
-          <a:lstStyle/>
+              <a:t>Correção: </a:t>
+            </a:r>
+            <a:r>
+              <a:rPr sz="1800">
+                <a:solidFill>
+                  <a:srgbClr val="212121"/>
+                </a:solidFill>
+                <a:latin typeface="Open Sans"/>
+              </a:rPr>
+              <a:t>if (exame.pacienteId != usuarioAtual.id) return 403;</a:t>
+            </a:r>
+          </a:p>
           <a:p>
             <a:pPr algn="l">
               <a:lnSpc>
                 <a:spcPct val="110000"/>
               </a:lnSpc>
-              <a:spcBef>
-                <a:spcPts val="0"/>
-              </a:spcBef>
               <a:spcAft>
-                <a:spcPts val="600"/>
+                <a:spcPts val="1400"/>
               </a:spcAft>
             </a:pPr>
             <a:r>
-              <a:rPr sz="1500" b="0" i="0">
-                <a:solidFill>
-                  <a:srgbClr val="212121"/>
+              <a:rPr sz="2000" b="1">
+                <a:solidFill>
+                  <a:srgbClr val="7CB342"/>
                 </a:solidFill>
                 <a:latin typeface="Open Sans"/>
               </a:rPr>
-              <a:t>trilha append-only, sem PII (art. 37/46)</a:t>
-            </a:r>
-          </a:p>
-        </p:txBody>
-      </p:sp>
-      <p:sp>
-        <p:nvSpPr>
-          <p:cNvPr id="17" name="TextBox 16"/>
+              <a:t>▸ </a:t>
+            </a:r>
+            <a:r>
+              <a:rPr sz="1800" b="1">
+                <a:solidFill>
+                  <a:srgbClr val="2D7A3D"/>
+                </a:solidFill>
+                <a:latin typeface="Open Sans"/>
+              </a:rPr>
+              <a:t>Fail-secure: </a:t>
+            </a:r>
+            <a:r>
+              <a:rPr sz="1800">
+                <a:solidFill>
+                  <a:srgbClr val="212121"/>
+                </a:solidFill>
+                <a:latin typeface="Open Sans"/>
+              </a:rPr>
+              <a:t>deny by default; 403 sem vazar metadados do exame.</a:t>
+            </a:r>
+          </a:p>
+          <a:p>
+            <a:pPr algn="l">
+              <a:lnSpc>
+                <a:spcPct val="110000"/>
+              </a:lnSpc>
+              <a:spcAft>
+                <a:spcPts val="1400"/>
+              </a:spcAft>
+            </a:pPr>
+            <a:r>
+              <a:rPr sz="2000" b="1">
+                <a:solidFill>
+                  <a:srgbClr val="7CB342"/>
+                </a:solidFill>
+                <a:latin typeface="Open Sans"/>
+              </a:rPr>
+              <a:t>▸ </a:t>
+            </a:r>
+            <a:r>
+              <a:rPr sz="1800" b="1">
+                <a:solidFill>
+                  <a:srgbClr val="2D7A3D"/>
+                </a:solidFill>
+                <a:latin typeface="Open Sans"/>
+              </a:rPr>
+              <a:t>Garantia (RGS): </a:t>
+            </a:r>
+            <a:r>
+              <a:rPr sz="1800">
+                <a:solidFill>
+                  <a:srgbClr val="212121"/>
+                </a:solidFill>
+                <a:latin typeface="Open Sans"/>
+              </a:rPr>
+              <a:t>teste anti-IDOR no CI — falha bloqueia o merge.</a:t>
+            </a:r>
+          </a:p>
+        </p:txBody>
+      </p:sp>
+      <p:sp>
+        <p:nvSpPr>
+          <p:cNvPr id="7" name="TextBox 6"/>
           <p:cNvSpPr txBox="1"/>
           <p:nvPr/>
         </p:nvSpPr>
@@ -6971,13 +7762,13 @@
         <p:spPr>
           <a:xfrm>
             <a:off x="0" y="0"/>
-            <a:ext cx="12191695" cy="6858000"/>
+            <a:ext cx="12191695" cy="1234440"/>
           </a:xfrm>
           <a:prstGeom prst="rect">
             <a:avLst/>
           </a:prstGeom>
           <a:solidFill>
-            <a:srgbClr val="1F5232"/>
+            <a:srgbClr val="2D7A3D"/>
           </a:solidFill>
           <a:ln>
             <a:noFill/>
@@ -7014,8 +7805,8 @@
         </p:nvSpPr>
         <p:spPr>
           <a:xfrm>
-            <a:off x="457200" y="2194560"/>
-            <a:ext cx="11247120" cy="548640"/>
+            <a:off x="457200" y="164592"/>
+            <a:ext cx="11247120" cy="640080"/>
           </a:xfrm>
           <a:prstGeom prst="rect">
             <a:avLst/>
@@ -7028,7 +7819,7 @@
           </a:bodyPr>
           <a:lstStyle/>
           <a:p>
-            <a:pPr algn="ctr">
+            <a:pPr algn="l">
               <a:lnSpc>
                 <a:spcPct val="100000"/>
               </a:lnSpc>
@@ -7040,13 +7831,13 @@
               </a:spcAft>
             </a:pPr>
             <a:r>
-              <a:rPr sz="2000" b="1" i="0">
-                <a:solidFill>
-                  <a:srgbClr val="7CB342"/>
+              <a:rPr sz="3200" b="1" i="0">
+                <a:solidFill>
+                  <a:srgbClr val="FFFFFF"/>
                 </a:solidFill>
                 <a:latin typeface="Open Sans"/>
               </a:rPr>
-              <a:t>PARTE 3</a:t>
+              <a:t>Módulos LGPD a criar</a:t>
             </a:r>
           </a:p>
         </p:txBody>
@@ -7059,8 +7850,8 @@
         </p:nvSpPr>
         <p:spPr>
           <a:xfrm>
-            <a:off x="457200" y="2834640"/>
-            <a:ext cx="11247120" cy="1280160"/>
+            <a:off x="457200" y="777240"/>
+            <a:ext cx="11247120" cy="365760"/>
           </a:xfrm>
           <a:prstGeom prst="rect">
             <a:avLst/>
@@ -7073,7 +7864,7 @@
           </a:bodyPr>
           <a:lstStyle/>
           <a:p>
-            <a:pPr algn="ctr">
+            <a:pPr algn="l">
               <a:lnSpc>
                 <a:spcPct val="100000"/>
               </a:lnSpc>
@@ -7085,27 +7876,73 @@
               </a:spcAft>
             </a:pPr>
             <a:r>
-              <a:rPr sz="6000" b="1" i="0">
-                <a:solidFill>
-                  <a:srgbClr val="FFFFFF"/>
+              <a:rPr sz="1600" b="0" i="1">
+                <a:solidFill>
+                  <a:srgbClr val="E0E8DB"/>
                 </a:solidFill>
                 <a:latin typeface="Open Sans"/>
               </a:rPr>
-              <a:t>No VidaPlus</a:t>
-            </a:r>
-          </a:p>
-        </p:txBody>
-      </p:sp>
-      <p:sp>
-        <p:nvSpPr>
-          <p:cNvPr id="5" name="TextBox 4"/>
+              <a:t>Direitos do titular viram código</a:t>
+            </a:r>
+          </a:p>
+        </p:txBody>
+      </p:sp>
+      <p:sp>
+        <p:nvSpPr>
+          <p:cNvPr id="5" name="Rounded Rectangle 4"/>
+          <p:cNvSpPr/>
+          <p:nvPr/>
+        </p:nvSpPr>
+        <p:spPr>
+          <a:xfrm>
+            <a:off x="411480" y="1463040"/>
+            <a:ext cx="5468112" cy="2423160"/>
+          </a:xfrm>
+          <a:prstGeom prst="roundRect">
+            <a:avLst/>
+          </a:prstGeom>
+          <a:solidFill>
+            <a:srgbClr val="F5F5F5"/>
+          </a:solidFill>
+          <a:ln w="19050">
+            <a:solidFill>
+              <a:srgbClr val="2D7A3D"/>
+            </a:solidFill>
+          </a:ln>
+          <a:effectLst/>
+        </p:spPr>
+        <p:style>
+          <a:lnRef idx="1">
+            <a:schemeClr val="accent1"/>
+          </a:lnRef>
+          <a:fillRef idx="3">
+            <a:schemeClr val="accent1"/>
+          </a:fillRef>
+          <a:effectRef idx="2">
+            <a:schemeClr val="accent1"/>
+          </a:effectRef>
+          <a:fontRef idx="minor">
+            <a:schemeClr val="lt1"/>
+          </a:fontRef>
+        </p:style>
+        <p:txBody>
+          <a:bodyPr rtlCol="0" anchor="ctr"/>
+          <a:lstStyle/>
+          <a:p>
+            <a:pPr algn="ctr"/>
+          </a:p>
+        </p:txBody>
+      </p:sp>
+      <p:sp>
+        <p:nvSpPr>
+          <p:cNvPr id="6" name="TextBox 5"/>
           <p:cNvSpPr txBox="1"/>
           <p:nvPr/>
         </p:nvSpPr>
         <p:spPr>
           <a:xfrm>
-            <a:off x="457200" y="4297680"/>
-            <a:ext cx="11247120" cy="457200"/>
+            <a:off x="777240" y="1737360"/>
+            <a:ext cx="4754880" cy="548640"/>
           </a:xfrm>
           <a:prstGeom prst="rect">
             <a:avLst/>
@@ -7118,7 +7955,7 @@
           </a:bodyPr>
           <a:lstStyle/>
           <a:p>
-            <a:pPr algn="ctr">
+            <a:pPr algn="l">
               <a:lnSpc>
                 <a:spcPct val="100000"/>
               </a:lnSpc>
@@ -7130,36 +7967,83 @@
               </a:spcAft>
             </a:pPr>
             <a:r>
-              <a:rPr sz="2200" b="0" i="1">
-                <a:solidFill>
-                  <a:srgbClr val="CCD7C0"/>
+              <a:rPr sz="2200" b="1" i="0">
+                <a:solidFill>
+                  <a:srgbClr val="2D7A3D"/>
                 </a:solidFill>
                 <a:latin typeface="Open Sans"/>
               </a:rPr>
-              <a:t>A etapa das próximas semanas (Fase 4)</a:t>
-            </a:r>
-          </a:p>
-        </p:txBody>
-      </p:sp>
-      <p:sp>
-        <p:nvSpPr>
-          <p:cNvPr id="6" name="Rectangle 5"/>
+              <a:t>Consentimento</a:t>
+            </a:r>
+          </a:p>
+        </p:txBody>
+      </p:sp>
+      <p:sp>
+        <p:nvSpPr>
+          <p:cNvPr id="7" name="TextBox 6"/>
+          <p:cNvSpPr txBox="1"/>
+          <p:nvPr/>
+        </p:nvSpPr>
+        <p:spPr>
+          <a:xfrm>
+            <a:off x="777240" y="2377440"/>
+            <a:ext cx="4754880" cy="1371600"/>
+          </a:xfrm>
+          <a:prstGeom prst="rect">
+            <a:avLst/>
+          </a:prstGeom>
+          <a:noFill/>
+        </p:spPr>
+        <p:txBody>
+          <a:bodyPr wrap="square" anchor="t" lIns="0" rIns="0" tIns="0" bIns="0">
+            <a:spAutoFit/>
+          </a:bodyPr>
+          <a:lstStyle/>
+          <a:p>
+            <a:pPr algn="l">
+              <a:lnSpc>
+                <a:spcPct val="110000"/>
+              </a:lnSpc>
+              <a:spcBef>
+                <a:spcPts val="0"/>
+              </a:spcBef>
+              <a:spcAft>
+                <a:spcPts val="600"/>
+              </a:spcAft>
+            </a:pPr>
+            <a:r>
+              <a:rPr sz="1500" b="0" i="0">
+                <a:solidFill>
+                  <a:srgbClr val="212121"/>
+                </a:solidFill>
+                <a:latin typeface="Open Sans"/>
+              </a:rPr>
+              <a:t>específico, versionado, revogável (art. 8/9)</a:t>
+            </a:r>
+          </a:p>
+        </p:txBody>
+      </p:sp>
+      <p:sp>
+        <p:nvSpPr>
+          <p:cNvPr id="8" name="Rounded Rectangle 7"/>
           <p:cNvSpPr/>
           <p:nvPr/>
         </p:nvSpPr>
         <p:spPr>
           <a:xfrm>
-            <a:off x="5184648" y="4983480"/>
-            <a:ext cx="1828800" cy="25400"/>
-          </a:xfrm>
-          <a:prstGeom prst="rect">
+            <a:off x="6309360" y="1463040"/>
+            <a:ext cx="5468112" cy="2423160"/>
+          </a:xfrm>
+          <a:prstGeom prst="roundRect">
             <a:avLst/>
           </a:prstGeom>
           <a:solidFill>
-            <a:srgbClr val="7CB342"/>
+            <a:srgbClr val="F5F5F5"/>
           </a:solidFill>
-          <a:ln>
-            <a:noFill/>
+          <a:ln w="19050">
+            <a:solidFill>
+              <a:srgbClr val="1976D2"/>
+            </a:solidFill>
           </a:ln>
           <a:effectLst/>
         </p:spPr>
@@ -7182,6 +8066,413 @@
           <a:lstStyle/>
           <a:p>
             <a:pPr algn="ctr"/>
+          </a:p>
+        </p:txBody>
+      </p:sp>
+      <p:sp>
+        <p:nvSpPr>
+          <p:cNvPr id="9" name="TextBox 8"/>
+          <p:cNvSpPr txBox="1"/>
+          <p:nvPr/>
+        </p:nvSpPr>
+        <p:spPr>
+          <a:xfrm>
+            <a:off x="6675120" y="1737360"/>
+            <a:ext cx="4754880" cy="548640"/>
+          </a:xfrm>
+          <a:prstGeom prst="rect">
+            <a:avLst/>
+          </a:prstGeom>
+          <a:noFill/>
+        </p:spPr>
+        <p:txBody>
+          <a:bodyPr wrap="square" anchor="t" lIns="0" rIns="0" tIns="0" bIns="0">
+            <a:spAutoFit/>
+          </a:bodyPr>
+          <a:lstStyle/>
+          <a:p>
+            <a:pPr algn="l">
+              <a:lnSpc>
+                <a:spcPct val="100000"/>
+              </a:lnSpc>
+              <a:spcBef>
+                <a:spcPts val="0"/>
+              </a:spcBef>
+              <a:spcAft>
+                <a:spcPts val="600"/>
+              </a:spcAft>
+            </a:pPr>
+            <a:r>
+              <a:rPr sz="2200" b="1" i="0">
+                <a:solidFill>
+                  <a:srgbClr val="1976D2"/>
+                </a:solidFill>
+                <a:latin typeface="Open Sans"/>
+              </a:rPr>
+              <a:t>Portabilidade</a:t>
+            </a:r>
+          </a:p>
+        </p:txBody>
+      </p:sp>
+      <p:sp>
+        <p:nvSpPr>
+          <p:cNvPr id="10" name="TextBox 9"/>
+          <p:cNvSpPr txBox="1"/>
+          <p:nvPr/>
+        </p:nvSpPr>
+        <p:spPr>
+          <a:xfrm>
+            <a:off x="6675120" y="2377440"/>
+            <a:ext cx="4754880" cy="1371600"/>
+          </a:xfrm>
+          <a:prstGeom prst="rect">
+            <a:avLst/>
+          </a:prstGeom>
+          <a:noFill/>
+        </p:spPr>
+        <p:txBody>
+          <a:bodyPr wrap="square" anchor="t" lIns="0" rIns="0" tIns="0" bIns="0">
+            <a:spAutoFit/>
+          </a:bodyPr>
+          <a:lstStyle/>
+          <a:p>
+            <a:pPr algn="l">
+              <a:lnSpc>
+                <a:spcPct val="110000"/>
+              </a:lnSpc>
+              <a:spcBef>
+                <a:spcPts val="0"/>
+              </a:spcBef>
+              <a:spcAft>
+                <a:spcPts val="600"/>
+              </a:spcAft>
+            </a:pPr>
+            <a:r>
+              <a:rPr sz="1500" b="0" i="0">
+                <a:solidFill>
+                  <a:srgbClr val="212121"/>
+                </a:solidFill>
+                <a:latin typeface="Open Sans"/>
+              </a:rPr>
+              <a:t>exportar todos os dados do titular (art. 18)</a:t>
+            </a:r>
+          </a:p>
+        </p:txBody>
+      </p:sp>
+      <p:sp>
+        <p:nvSpPr>
+          <p:cNvPr id="11" name="Rounded Rectangle 10"/>
+          <p:cNvSpPr/>
+          <p:nvPr/>
+        </p:nvSpPr>
+        <p:spPr>
+          <a:xfrm>
+            <a:off x="411480" y="4069080"/>
+            <a:ext cx="5468112" cy="2423160"/>
+          </a:xfrm>
+          <a:prstGeom prst="roundRect">
+            <a:avLst/>
+          </a:prstGeom>
+          <a:solidFill>
+            <a:srgbClr val="F5F5F5"/>
+          </a:solidFill>
+          <a:ln w="19050">
+            <a:solidFill>
+              <a:srgbClr val="7CB342"/>
+            </a:solidFill>
+          </a:ln>
+          <a:effectLst/>
+        </p:spPr>
+        <p:style>
+          <a:lnRef idx="1">
+            <a:schemeClr val="accent1"/>
+          </a:lnRef>
+          <a:fillRef idx="3">
+            <a:schemeClr val="accent1"/>
+          </a:fillRef>
+          <a:effectRef idx="2">
+            <a:schemeClr val="accent1"/>
+          </a:effectRef>
+          <a:fontRef idx="minor">
+            <a:schemeClr val="lt1"/>
+          </a:fontRef>
+        </p:style>
+        <p:txBody>
+          <a:bodyPr rtlCol="0" anchor="ctr"/>
+          <a:lstStyle/>
+          <a:p>
+            <a:pPr algn="ctr"/>
+          </a:p>
+        </p:txBody>
+      </p:sp>
+      <p:sp>
+        <p:nvSpPr>
+          <p:cNvPr id="12" name="TextBox 11"/>
+          <p:cNvSpPr txBox="1"/>
+          <p:nvPr/>
+        </p:nvSpPr>
+        <p:spPr>
+          <a:xfrm>
+            <a:off x="777240" y="4343400"/>
+            <a:ext cx="4754880" cy="548640"/>
+          </a:xfrm>
+          <a:prstGeom prst="rect">
+            <a:avLst/>
+          </a:prstGeom>
+          <a:noFill/>
+        </p:spPr>
+        <p:txBody>
+          <a:bodyPr wrap="square" anchor="t" lIns="0" rIns="0" tIns="0" bIns="0">
+            <a:spAutoFit/>
+          </a:bodyPr>
+          <a:lstStyle/>
+          <a:p>
+            <a:pPr algn="l">
+              <a:lnSpc>
+                <a:spcPct val="100000"/>
+              </a:lnSpc>
+              <a:spcBef>
+                <a:spcPts val="0"/>
+              </a:spcBef>
+              <a:spcAft>
+                <a:spcPts val="600"/>
+              </a:spcAft>
+            </a:pPr>
+            <a:r>
+              <a:rPr sz="2200" b="1" i="0">
+                <a:solidFill>
+                  <a:srgbClr val="7CB342"/>
+                </a:solidFill>
+                <a:latin typeface="Open Sans"/>
+              </a:rPr>
+              <a:t>Eliminação</a:t>
+            </a:r>
+          </a:p>
+        </p:txBody>
+      </p:sp>
+      <p:sp>
+        <p:nvSpPr>
+          <p:cNvPr id="13" name="TextBox 12"/>
+          <p:cNvSpPr txBox="1"/>
+          <p:nvPr/>
+        </p:nvSpPr>
+        <p:spPr>
+          <a:xfrm>
+            <a:off x="777240" y="4983480"/>
+            <a:ext cx="4754880" cy="1371600"/>
+          </a:xfrm>
+          <a:prstGeom prst="rect">
+            <a:avLst/>
+          </a:prstGeom>
+          <a:noFill/>
+        </p:spPr>
+        <p:txBody>
+          <a:bodyPr wrap="square" anchor="t" lIns="0" rIns="0" tIns="0" bIns="0">
+            <a:spAutoFit/>
+          </a:bodyPr>
+          <a:lstStyle/>
+          <a:p>
+            <a:pPr algn="l">
+              <a:lnSpc>
+                <a:spcPct val="110000"/>
+              </a:lnSpc>
+              <a:spcBef>
+                <a:spcPts val="0"/>
+              </a:spcBef>
+              <a:spcAft>
+                <a:spcPts val="600"/>
+              </a:spcAft>
+            </a:pPr>
+            <a:r>
+              <a:rPr sz="1500" b="0" i="0">
+                <a:solidFill>
+                  <a:srgbClr val="212121"/>
+                </a:solidFill>
+                <a:latin typeface="Open Sans"/>
+              </a:rPr>
+              <a:t>excluir/anonimizar respeitando retenção (art. 18)</a:t>
+            </a:r>
+          </a:p>
+        </p:txBody>
+      </p:sp>
+      <p:sp>
+        <p:nvSpPr>
+          <p:cNvPr id="14" name="Rounded Rectangle 13"/>
+          <p:cNvSpPr/>
+          <p:nvPr/>
+        </p:nvSpPr>
+        <p:spPr>
+          <a:xfrm>
+            <a:off x="6309360" y="4069080"/>
+            <a:ext cx="5468112" cy="2423160"/>
+          </a:xfrm>
+          <a:prstGeom prst="roundRect">
+            <a:avLst/>
+          </a:prstGeom>
+          <a:solidFill>
+            <a:srgbClr val="F5F5F5"/>
+          </a:solidFill>
+          <a:ln w="19050">
+            <a:solidFill>
+              <a:srgbClr val="E65100"/>
+            </a:solidFill>
+          </a:ln>
+          <a:effectLst/>
+        </p:spPr>
+        <p:style>
+          <a:lnRef idx="1">
+            <a:schemeClr val="accent1"/>
+          </a:lnRef>
+          <a:fillRef idx="3">
+            <a:schemeClr val="accent1"/>
+          </a:fillRef>
+          <a:effectRef idx="2">
+            <a:schemeClr val="accent1"/>
+          </a:effectRef>
+          <a:fontRef idx="minor">
+            <a:schemeClr val="lt1"/>
+          </a:fontRef>
+        </p:style>
+        <p:txBody>
+          <a:bodyPr rtlCol="0" anchor="ctr"/>
+          <a:lstStyle/>
+          <a:p>
+            <a:pPr algn="ctr"/>
+          </a:p>
+        </p:txBody>
+      </p:sp>
+      <p:sp>
+        <p:nvSpPr>
+          <p:cNvPr id="15" name="TextBox 14"/>
+          <p:cNvSpPr txBox="1"/>
+          <p:nvPr/>
+        </p:nvSpPr>
+        <p:spPr>
+          <a:xfrm>
+            <a:off x="6675120" y="4343400"/>
+            <a:ext cx="4754880" cy="548640"/>
+          </a:xfrm>
+          <a:prstGeom prst="rect">
+            <a:avLst/>
+          </a:prstGeom>
+          <a:noFill/>
+        </p:spPr>
+        <p:txBody>
+          <a:bodyPr wrap="square" anchor="t" lIns="0" rIns="0" tIns="0" bIns="0">
+            <a:spAutoFit/>
+          </a:bodyPr>
+          <a:lstStyle/>
+          <a:p>
+            <a:pPr algn="l">
+              <a:lnSpc>
+                <a:spcPct val="100000"/>
+              </a:lnSpc>
+              <a:spcBef>
+                <a:spcPts val="0"/>
+              </a:spcBef>
+              <a:spcAft>
+                <a:spcPts val="600"/>
+              </a:spcAft>
+            </a:pPr>
+            <a:r>
+              <a:rPr sz="2200" b="1" i="0">
+                <a:solidFill>
+                  <a:srgbClr val="E65100"/>
+                </a:solidFill>
+                <a:latin typeface="Open Sans"/>
+              </a:rPr>
+              <a:t>Auditoria</a:t>
+            </a:r>
+          </a:p>
+        </p:txBody>
+      </p:sp>
+      <p:sp>
+        <p:nvSpPr>
+          <p:cNvPr id="16" name="TextBox 15"/>
+          <p:cNvSpPr txBox="1"/>
+          <p:nvPr/>
+        </p:nvSpPr>
+        <p:spPr>
+          <a:xfrm>
+            <a:off x="6675120" y="4983480"/>
+            <a:ext cx="4754880" cy="1371600"/>
+          </a:xfrm>
+          <a:prstGeom prst="rect">
+            <a:avLst/>
+          </a:prstGeom>
+          <a:noFill/>
+        </p:spPr>
+        <p:txBody>
+          <a:bodyPr wrap="square" anchor="t" lIns="0" rIns="0" tIns="0" bIns="0">
+            <a:spAutoFit/>
+          </a:bodyPr>
+          <a:lstStyle/>
+          <a:p>
+            <a:pPr algn="l">
+              <a:lnSpc>
+                <a:spcPct val="110000"/>
+              </a:lnSpc>
+              <a:spcBef>
+                <a:spcPts val="0"/>
+              </a:spcBef>
+              <a:spcAft>
+                <a:spcPts val="600"/>
+              </a:spcAft>
+            </a:pPr>
+            <a:r>
+              <a:rPr sz="1500" b="0" i="0">
+                <a:solidFill>
+                  <a:srgbClr val="212121"/>
+                </a:solidFill>
+                <a:latin typeface="Open Sans"/>
+              </a:rPr>
+              <a:t>trilha append-only, sem PII, hash-chain (art. 37/46)</a:t>
+            </a:r>
+          </a:p>
+        </p:txBody>
+      </p:sp>
+      <p:sp>
+        <p:nvSpPr>
+          <p:cNvPr id="17" name="TextBox 16"/>
+          <p:cNvSpPr txBox="1"/>
+          <p:nvPr/>
+        </p:nvSpPr>
+        <p:spPr>
+          <a:xfrm>
+            <a:off x="10972800" y="6446520"/>
+            <a:ext cx="914400" cy="320040"/>
+          </a:xfrm>
+          <a:prstGeom prst="rect">
+            <a:avLst/>
+          </a:prstGeom>
+          <a:noFill/>
+        </p:spPr>
+        <p:txBody>
+          <a:bodyPr wrap="square" anchor="t" lIns="0" rIns="0" tIns="0" bIns="0">
+            <a:spAutoFit/>
+          </a:bodyPr>
+          <a:lstStyle/>
+          <a:p>
+            <a:pPr algn="r">
+              <a:lnSpc>
+                <a:spcPct val="100000"/>
+              </a:lnSpc>
+              <a:spcBef>
+                <a:spcPts val="0"/>
+              </a:spcBef>
+              <a:spcAft>
+                <a:spcPts val="600"/>
+              </a:spcAft>
+            </a:pPr>
+            <a:r>
+              <a:rPr sz="1100" b="0" i="0">
+                <a:solidFill>
+                  <a:srgbClr val="616161"/>
+                </a:solidFill>
+                <a:latin typeface="Open Sans"/>
+              </a:rPr>
+              <a:t>7</a:t>
+            </a:r>
           </a:p>
         </p:txBody>
       </p:sp>
@@ -7212,13 +8503,13 @@
         <p:spPr>
           <a:xfrm>
             <a:off x="0" y="0"/>
-            <a:ext cx="12191695" cy="1234440"/>
+            <a:ext cx="12191695" cy="6858000"/>
           </a:xfrm>
           <a:prstGeom prst="rect">
             <a:avLst/>
           </a:prstGeom>
           <a:solidFill>
-            <a:srgbClr val="2D7A3D"/>
+            <a:srgbClr val="1F5232"/>
           </a:solidFill>
           <a:ln>
             <a:noFill/>
@@ -7255,8 +8546,8 @@
         </p:nvSpPr>
         <p:spPr>
           <a:xfrm>
-            <a:off x="457200" y="164592"/>
-            <a:ext cx="11247120" cy="640080"/>
+            <a:off x="457200" y="2194560"/>
+            <a:ext cx="11247120" cy="548640"/>
           </a:xfrm>
           <a:prstGeom prst="rect">
             <a:avLst/>
@@ -7269,7 +8560,7 @@
           </a:bodyPr>
           <a:lstStyle/>
           <a:p>
-            <a:pPr algn="l">
+            <a:pPr algn="ctr">
               <a:lnSpc>
                 <a:spcPct val="100000"/>
               </a:lnSpc>
@@ -7281,13 +8572,13 @@
               </a:spcAft>
             </a:pPr>
             <a:r>
-              <a:rPr sz="3200" b="1" i="0">
-                <a:solidFill>
-                  <a:srgbClr val="FFFFFF"/>
+              <a:rPr sz="2000" b="1" i="0">
+                <a:solidFill>
+                  <a:srgbClr val="7CB342"/>
                 </a:solidFill>
                 <a:latin typeface="Open Sans"/>
               </a:rPr>
-              <a:t>Entregável da Fase 4</a:t>
+              <a:t>PARTE 3</a:t>
             </a:r>
           </a:p>
         </p:txBody>
@@ -7300,8 +8591,8 @@
         </p:nvSpPr>
         <p:spPr>
           <a:xfrm>
-            <a:off x="457200" y="777240"/>
-            <a:ext cx="11247120" cy="365760"/>
+            <a:off x="457200" y="2834640"/>
+            <a:ext cx="11247120" cy="1280160"/>
           </a:xfrm>
           <a:prstGeom prst="rect">
             <a:avLst/>
@@ -7314,7 +8605,7 @@
           </a:bodyPr>
           <a:lstStyle/>
           <a:p>
-            <a:pPr algn="l">
+            <a:pPr algn="ctr">
               <a:lnSpc>
                 <a:spcPct val="100000"/>
               </a:lnSpc>
@@ -7326,281 +8617,27 @@
               </a:spcAft>
             </a:pPr>
             <a:r>
-              <a:rPr sz="1600" b="0" i="1">
-                <a:solidFill>
-                  <a:srgbClr val="E0E8DB"/>
+              <a:rPr sz="6000" b="1" i="0">
+                <a:solidFill>
+                  <a:srgbClr val="FFFFFF"/>
                 </a:solidFill>
                 <a:latin typeface="Open Sans"/>
               </a:rPr>
-              <a:t>Remediação como prova de conceito</a:t>
-            </a:r>
-          </a:p>
-        </p:txBody>
-      </p:sp>
-      <p:sp>
-        <p:nvSpPr>
-          <p:cNvPr id="5" name="Rounded Rectangle 4"/>
-          <p:cNvSpPr/>
-          <p:nvPr/>
-        </p:nvSpPr>
-        <p:spPr>
-          <a:xfrm>
-            <a:off x="411480" y="1463040"/>
-            <a:ext cx="11384280" cy="5029200"/>
-          </a:xfrm>
-          <a:prstGeom prst="roundRect">
-            <a:avLst/>
-          </a:prstGeom>
-          <a:solidFill>
-            <a:srgbClr val="F5F5F5"/>
-          </a:solidFill>
-          <a:ln w="15875">
-            <a:solidFill>
-              <a:srgbClr val="7CB342"/>
-            </a:solidFill>
-          </a:ln>
-          <a:effectLst/>
-        </p:spPr>
-        <p:style>
-          <a:lnRef idx="1">
-            <a:schemeClr val="accent1"/>
-          </a:lnRef>
-          <a:fillRef idx="3">
-            <a:schemeClr val="accent1"/>
-          </a:fillRef>
-          <a:effectRef idx="2">
-            <a:schemeClr val="accent1"/>
-          </a:effectRef>
-          <a:fontRef idx="minor">
-            <a:schemeClr val="lt1"/>
-          </a:fontRef>
-        </p:style>
-        <p:txBody>
-          <a:bodyPr rtlCol="0" anchor="ctr"/>
-          <a:lstStyle/>
-          <a:p>
-            <a:pPr algn="ctr"/>
-          </a:p>
-        </p:txBody>
-      </p:sp>
-      <p:sp>
-        <p:nvSpPr>
-          <p:cNvPr id="6" name="TextBox 5"/>
+              <a:t>No VidaPlus</a:t>
+            </a:r>
+          </a:p>
+        </p:txBody>
+      </p:sp>
+      <p:sp>
+        <p:nvSpPr>
+          <p:cNvPr id="5" name="TextBox 4"/>
           <p:cNvSpPr txBox="1"/>
           <p:nvPr/>
         </p:nvSpPr>
         <p:spPr>
           <a:xfrm>
-            <a:off x="868680" y="1783080"/>
-            <a:ext cx="10515600" cy="4572000"/>
-          </a:xfrm>
-          <a:prstGeom prst="rect">
-            <a:avLst/>
-          </a:prstGeom>
-          <a:noFill/>
-        </p:spPr>
-        <p:txBody>
-          <a:bodyPr wrap="square">
-            <a:spAutoFit/>
-          </a:bodyPr>
-          <a:lstStyle/>
-          <a:p>
-            <a:pPr algn="l">
-              <a:lnSpc>
-                <a:spcPct val="110000"/>
-              </a:lnSpc>
-              <a:spcAft>
-                <a:spcPts val="1400"/>
-              </a:spcAft>
-            </a:pPr>
-            <a:r>
-              <a:rPr sz="2000" b="1">
-                <a:solidFill>
-                  <a:srgbClr val="7CB342"/>
-                </a:solidFill>
-                <a:latin typeface="Open Sans"/>
-              </a:rPr>
-              <a:t>▸ </a:t>
-            </a:r>
-            <a:r>
-              <a:rPr sz="1800" b="1">
-                <a:solidFill>
-                  <a:srgbClr val="2D7A3D"/>
-                </a:solidFill>
-                <a:latin typeface="Open Sans"/>
-              </a:rPr>
-              <a:t>PoC: </a:t>
-            </a:r>
-            <a:r>
-              <a:rPr sz="1800">
-                <a:solidFill>
-                  <a:srgbClr val="212121"/>
-                </a:solidFill>
-                <a:latin typeface="Open Sans"/>
-              </a:rPr>
-              <a:t>corrija 1–2 controles ponta-a-ponta (≥1 P0) num PR.</a:t>
-            </a:r>
-          </a:p>
-          <a:p>
-            <a:pPr algn="l">
-              <a:lnSpc>
-                <a:spcPct val="110000"/>
-              </a:lnSpc>
-              <a:spcAft>
-                <a:spcPts val="1400"/>
-              </a:spcAft>
-            </a:pPr>
-            <a:r>
-              <a:rPr sz="2000" b="1">
-                <a:solidFill>
-                  <a:srgbClr val="7CB342"/>
-                </a:solidFill>
-                <a:latin typeface="Open Sans"/>
-              </a:rPr>
-              <a:t>▸ </a:t>
-            </a:r>
-            <a:r>
-              <a:rPr sz="1800" b="1">
-                <a:solidFill>
-                  <a:srgbClr val="2D7A3D"/>
-                </a:solidFill>
-                <a:latin typeface="Open Sans"/>
-              </a:rPr>
-              <a:t>Teste: </a:t>
-            </a:r>
-            <a:r>
-              <a:rPr sz="1800">
-                <a:solidFill>
-                  <a:srgbClr val="212121"/>
-                </a:solidFill>
-                <a:latin typeface="Open Sans"/>
-              </a:rPr>
-              <a:t>cada correção acompanha o teste que a prova.</a:t>
-            </a:r>
-          </a:p>
-          <a:p>
-            <a:pPr algn="l">
-              <a:lnSpc>
-                <a:spcPct val="110000"/>
-              </a:lnSpc>
-              <a:spcAft>
-                <a:spcPts val="1400"/>
-              </a:spcAft>
-            </a:pPr>
-            <a:r>
-              <a:rPr sz="2000" b="1">
-                <a:solidFill>
-                  <a:srgbClr val="7CB342"/>
-                </a:solidFill>
-                <a:latin typeface="Open Sans"/>
-              </a:rPr>
-              <a:t>▸ </a:t>
-            </a:r>
-            <a:r>
-              <a:rPr sz="1800" b="1">
-                <a:solidFill>
-                  <a:srgbClr val="2D7A3D"/>
-                </a:solidFill>
-                <a:latin typeface="Open Sans"/>
-              </a:rPr>
-              <a:t>Plano: </a:t>
-            </a:r>
-            <a:r>
-              <a:rPr sz="1800">
-                <a:solidFill>
-                  <a:srgbClr val="212121"/>
-                </a:solidFill>
-                <a:latin typeface="Open Sans"/>
-              </a:rPr>
-              <a:t>para o resto do pacote, entregue plano de remediação.</a:t>
-            </a:r>
-          </a:p>
-          <a:p>
-            <a:pPr algn="l">
-              <a:lnSpc>
-                <a:spcPct val="110000"/>
-              </a:lnSpc>
-              <a:spcAft>
-                <a:spcPts val="1400"/>
-              </a:spcAft>
-            </a:pPr>
-            <a:r>
-              <a:rPr sz="2000" b="1">
-                <a:solidFill>
-                  <a:srgbClr val="7CB342"/>
-                </a:solidFill>
-                <a:latin typeface="Open Sans"/>
-              </a:rPr>
-              <a:t>▸ </a:t>
-            </a:r>
-            <a:r>
-              <a:rPr sz="1800" b="1">
-                <a:solidFill>
-                  <a:srgbClr val="2D7A3D"/>
-                </a:solidFill>
-                <a:latin typeface="Open Sans"/>
-              </a:rPr>
-              <a:t>Foco: </a:t>
-            </a:r>
-            <a:r>
-              <a:rPr sz="1800">
-                <a:solidFill>
-                  <a:srgbClr val="212121"/>
-                </a:solidFill>
-                <a:latin typeface="Open Sans"/>
-              </a:rPr>
-              <a:t>o objetivo é fechar o fio, não corrigir tudo.</a:t>
-            </a:r>
-          </a:p>
-          <a:p>
-            <a:pPr algn="l">
-              <a:lnSpc>
-                <a:spcPct val="110000"/>
-              </a:lnSpc>
-              <a:spcAft>
-                <a:spcPts val="1400"/>
-              </a:spcAft>
-            </a:pPr>
-            <a:r>
-              <a:rPr sz="2000" b="1">
-                <a:solidFill>
-                  <a:srgbClr val="7CB342"/>
-                </a:solidFill>
-                <a:latin typeface="Open Sans"/>
-              </a:rPr>
-              <a:t>▸ </a:t>
-            </a:r>
-            <a:r>
-              <a:rPr sz="1800" b="1">
-                <a:solidFill>
-                  <a:srgbClr val="2D7A3D"/>
-                </a:solidFill>
-                <a:latin typeface="Open Sans"/>
-              </a:rPr>
-              <a:t>Gate: </a:t>
-            </a:r>
-            <a:r>
-              <a:rPr sz="1800">
-                <a:solidFill>
-                  <a:srgbClr val="212121"/>
-                </a:solidFill>
-                <a:latin typeface="Open Sans"/>
-              </a:rPr>
-              <a:t>a classe corrigida deve passar de vermelho a verde no CI.</a:t>
-            </a:r>
-          </a:p>
-        </p:txBody>
-      </p:sp>
-      <p:sp>
-        <p:nvSpPr>
-          <p:cNvPr id="7" name="TextBox 6"/>
-          <p:cNvSpPr txBox="1"/>
-          <p:nvPr/>
-        </p:nvSpPr>
-        <p:spPr>
-          <a:xfrm>
-            <a:off x="10972800" y="6446520"/>
-            <a:ext cx="914400" cy="320040"/>
+            <a:off x="457200" y="4297680"/>
+            <a:ext cx="11247120" cy="457200"/>
           </a:xfrm>
           <a:prstGeom prst="rect">
             <a:avLst/>
@@ -7613,7 +8650,7 @@
           </a:bodyPr>
           <a:lstStyle/>
           <a:p>
-            <a:pPr algn="r">
+            <a:pPr algn="ctr">
               <a:lnSpc>
                 <a:spcPct val="100000"/>
               </a:lnSpc>
@@ -7625,14 +8662,58 @@
               </a:spcAft>
             </a:pPr>
             <a:r>
-              <a:rPr sz="1100" b="0" i="0">
-                <a:solidFill>
-                  <a:srgbClr val="616161"/>
+              <a:rPr sz="2200" b="0" i="1">
+                <a:solidFill>
+                  <a:srgbClr val="CCD7C0"/>
                 </a:solidFill>
                 <a:latin typeface="Open Sans"/>
               </a:rPr>
-              <a:t>8</a:t>
-            </a:r>
+              <a:t>A etapa das próximas semanas (Fase 4)</a:t>
+            </a:r>
+          </a:p>
+        </p:txBody>
+      </p:sp>
+      <p:sp>
+        <p:nvSpPr>
+          <p:cNvPr id="6" name="Rectangle 5"/>
+          <p:cNvSpPr/>
+          <p:nvPr/>
+        </p:nvSpPr>
+        <p:spPr>
+          <a:xfrm>
+            <a:off x="5184648" y="4983480"/>
+            <a:ext cx="1828800" cy="25400"/>
+          </a:xfrm>
+          <a:prstGeom prst="rect">
+            <a:avLst/>
+          </a:prstGeom>
+          <a:solidFill>
+            <a:srgbClr val="7CB342"/>
+          </a:solidFill>
+          <a:ln>
+            <a:noFill/>
+          </a:ln>
+          <a:effectLst/>
+        </p:spPr>
+        <p:style>
+          <a:lnRef idx="1">
+            <a:schemeClr val="accent1"/>
+          </a:lnRef>
+          <a:fillRef idx="3">
+            <a:schemeClr val="accent1"/>
+          </a:fillRef>
+          <a:effectRef idx="2">
+            <a:schemeClr val="accent1"/>
+          </a:effectRef>
+          <a:fontRef idx="minor">
+            <a:schemeClr val="lt1"/>
+          </a:fontRef>
+        </p:style>
+        <p:txBody>
+          <a:bodyPr rtlCol="0" anchor="ctr"/>
+          <a:lstStyle/>
+          <a:p>
+            <a:pPr algn="ctr"/>
           </a:p>
         </p:txBody>
       </p:sp>
@@ -7663,13 +8744,13 @@
         <p:spPr>
           <a:xfrm>
             <a:off x="0" y="0"/>
-            <a:ext cx="12191695" cy="6858000"/>
+            <a:ext cx="12191695" cy="1234440"/>
           </a:xfrm>
           <a:prstGeom prst="rect">
             <a:avLst/>
           </a:prstGeom>
           <a:solidFill>
-            <a:srgbClr val="1F5232"/>
+            <a:srgbClr val="2D7A3D"/>
           </a:solidFill>
           <a:ln>
             <a:noFill/>
@@ -7698,40 +8779,16 @@
           </a:p>
         </p:txBody>
       </p:sp>
-      <p:pic>
-        <p:nvPicPr>
-          <p:cNvPr id="3" name="Picture 2" descr="logo_branco.png"/>
-          <p:cNvPicPr>
-            <a:picLocks noChangeAspect="1"/>
-          </p:cNvPicPr>
-          <p:nvPr/>
-        </p:nvPicPr>
-        <p:blipFill>
-          <a:blip r:embed="rId2"/>
-          <a:stretch>
-            <a:fillRect/>
-          </a:stretch>
-        </p:blipFill>
-        <p:spPr>
-          <a:xfrm>
-            <a:off x="4142232" y="548640"/>
-            <a:ext cx="3909060" cy="868680"/>
-          </a:xfrm>
-          <a:prstGeom prst="rect">
-            <a:avLst/>
-          </a:prstGeom>
-        </p:spPr>
-      </p:pic>
-      <p:sp>
-        <p:nvSpPr>
-          <p:cNvPr id="4" name="TextBox 3"/>
+      <p:sp>
+        <p:nvSpPr>
+          <p:cNvPr id="3" name="TextBox 2"/>
           <p:cNvSpPr txBox="1"/>
           <p:nvPr/>
         </p:nvSpPr>
         <p:spPr>
           <a:xfrm>
-            <a:off x="457200" y="2194560"/>
-            <a:ext cx="11247120" cy="1371600"/>
+            <a:off x="457200" y="164592"/>
+            <a:ext cx="11247120" cy="640080"/>
           </a:xfrm>
           <a:prstGeom prst="rect">
             <a:avLst/>
@@ -7744,7 +8801,7 @@
           </a:bodyPr>
           <a:lstStyle/>
           <a:p>
-            <a:pPr algn="ctr">
+            <a:pPr algn="l">
               <a:lnSpc>
                 <a:spcPct val="100000"/>
               </a:lnSpc>
@@ -7756,71 +8813,27 @@
               </a:spcAft>
             </a:pPr>
             <a:r>
-              <a:rPr sz="8800" b="1" i="0">
-                <a:solidFill>
-                  <a:srgbClr val="7CB342"/>
+              <a:rPr sz="3200" b="1" i="0">
+                <a:solidFill>
+                  <a:srgbClr val="FFFFFF"/>
                 </a:solidFill>
                 <a:latin typeface="Open Sans"/>
               </a:rPr>
-              <a:t>Perguntas?</a:t>
-            </a:r>
-          </a:p>
-        </p:txBody>
-      </p:sp>
-      <p:sp>
-        <p:nvSpPr>
-          <p:cNvPr id="5" name="Rectangle 4"/>
-          <p:cNvSpPr/>
-          <p:nvPr/>
-        </p:nvSpPr>
-        <p:spPr>
-          <a:xfrm>
-            <a:off x="5184648" y="3977639"/>
-            <a:ext cx="1828800" cy="25400"/>
-          </a:xfrm>
-          <a:prstGeom prst="rect">
-            <a:avLst/>
-          </a:prstGeom>
-          <a:solidFill>
-            <a:srgbClr val="7CB342"/>
-          </a:solidFill>
-          <a:ln>
-            <a:noFill/>
-          </a:ln>
-          <a:effectLst/>
-        </p:spPr>
-        <p:style>
-          <a:lnRef idx="1">
-            <a:schemeClr val="accent1"/>
-          </a:lnRef>
-          <a:fillRef idx="3">
-            <a:schemeClr val="accent1"/>
-          </a:fillRef>
-          <a:effectRef idx="2">
-            <a:schemeClr val="accent1"/>
-          </a:effectRef>
-          <a:fontRef idx="minor">
-            <a:schemeClr val="lt1"/>
-          </a:fontRef>
-        </p:style>
-        <p:txBody>
-          <a:bodyPr rtlCol="0" anchor="ctr"/>
-          <a:lstStyle/>
-          <a:p>
-            <a:pPr algn="ctr"/>
-          </a:p>
-        </p:txBody>
-      </p:sp>
-      <p:sp>
-        <p:nvSpPr>
-          <p:cNvPr id="6" name="TextBox 5"/>
+              <a:t>Entregável da Fase 4</a:t>
+            </a:r>
+          </a:p>
+        </p:txBody>
+      </p:sp>
+      <p:sp>
+        <p:nvSpPr>
+          <p:cNvPr id="4" name="TextBox 3"/>
           <p:cNvSpPr txBox="1"/>
           <p:nvPr/>
         </p:nvSpPr>
         <p:spPr>
           <a:xfrm>
-            <a:off x="457200" y="4297680"/>
-            <a:ext cx="11247120" cy="457200"/>
+            <a:off x="457200" y="777240"/>
+            <a:ext cx="11247120" cy="365760"/>
           </a:xfrm>
           <a:prstGeom prst="rect">
             <a:avLst/>
@@ -7833,7 +8846,7 @@
           </a:bodyPr>
           <a:lstStyle/>
           <a:p>
-            <a:pPr algn="ctr">
+            <a:pPr algn="l">
               <a:lnSpc>
                 <a:spcPct val="100000"/>
               </a:lnSpc>
@@ -7845,13 +8858,267 @@
               </a:spcAft>
             </a:pPr>
             <a:r>
-              <a:rPr sz="2200" b="1" i="0">
-                <a:solidFill>
-                  <a:srgbClr val="FFFFFF"/>
+              <a:rPr sz="1600" b="0" i="1">
+                <a:solidFill>
+                  <a:srgbClr val="E0E8DB"/>
                 </a:solidFill>
                 <a:latin typeface="Open Sans"/>
               </a:rPr>
-              <a:t>Prof. Dr. Alex Mulattieri Suarez Orozco</a:t>
+              <a:t>Remediação como prova de conceito</a:t>
+            </a:r>
+          </a:p>
+        </p:txBody>
+      </p:sp>
+      <p:sp>
+        <p:nvSpPr>
+          <p:cNvPr id="5" name="Rounded Rectangle 4"/>
+          <p:cNvSpPr/>
+          <p:nvPr/>
+        </p:nvSpPr>
+        <p:spPr>
+          <a:xfrm>
+            <a:off x="411480" y="1463040"/>
+            <a:ext cx="11384280" cy="5029200"/>
+          </a:xfrm>
+          <a:prstGeom prst="roundRect">
+            <a:avLst/>
+          </a:prstGeom>
+          <a:solidFill>
+            <a:srgbClr val="F5F5F5"/>
+          </a:solidFill>
+          <a:ln w="15875">
+            <a:solidFill>
+              <a:srgbClr val="7CB342"/>
+            </a:solidFill>
+          </a:ln>
+          <a:effectLst/>
+        </p:spPr>
+        <p:style>
+          <a:lnRef idx="1">
+            <a:schemeClr val="accent1"/>
+          </a:lnRef>
+          <a:fillRef idx="3">
+            <a:schemeClr val="accent1"/>
+          </a:fillRef>
+          <a:effectRef idx="2">
+            <a:schemeClr val="accent1"/>
+          </a:effectRef>
+          <a:fontRef idx="minor">
+            <a:schemeClr val="lt1"/>
+          </a:fontRef>
+        </p:style>
+        <p:txBody>
+          <a:bodyPr rtlCol="0" anchor="ctr"/>
+          <a:lstStyle/>
+          <a:p>
+            <a:pPr algn="ctr"/>
+          </a:p>
+        </p:txBody>
+      </p:sp>
+      <p:sp>
+        <p:nvSpPr>
+          <p:cNvPr id="6" name="TextBox 5"/>
+          <p:cNvSpPr txBox="1"/>
+          <p:nvPr/>
+        </p:nvSpPr>
+        <p:spPr>
+          <a:xfrm>
+            <a:off x="868680" y="1783080"/>
+            <a:ext cx="10515600" cy="4572000"/>
+          </a:xfrm>
+          <a:prstGeom prst="rect">
+            <a:avLst/>
+          </a:prstGeom>
+          <a:noFill/>
+        </p:spPr>
+        <p:txBody>
+          <a:bodyPr wrap="square">
+            <a:spAutoFit/>
+          </a:bodyPr>
+          <a:lstStyle/>
+          <a:p>
+            <a:pPr algn="l">
+              <a:lnSpc>
+                <a:spcPct val="110000"/>
+              </a:lnSpc>
+              <a:spcAft>
+                <a:spcPts val="1400"/>
+              </a:spcAft>
+            </a:pPr>
+            <a:r>
+              <a:rPr sz="2000" b="1">
+                <a:solidFill>
+                  <a:srgbClr val="7CB342"/>
+                </a:solidFill>
+                <a:latin typeface="Open Sans"/>
+              </a:rPr>
+              <a:t>▸ </a:t>
+            </a:r>
+            <a:r>
+              <a:rPr sz="1800" b="1">
+                <a:solidFill>
+                  <a:srgbClr val="2D7A3D"/>
+                </a:solidFill>
+                <a:latin typeface="Open Sans"/>
+              </a:rPr>
+              <a:t>PoC: </a:t>
+            </a:r>
+            <a:r>
+              <a:rPr sz="1800">
+                <a:solidFill>
+                  <a:srgbClr val="212121"/>
+                </a:solidFill>
+                <a:latin typeface="Open Sans"/>
+              </a:rPr>
+              <a:t>corrija 1-2 controles ponta-a-ponta (≥1 P0) num Pull Request.</a:t>
+            </a:r>
+          </a:p>
+          <a:p>
+            <a:pPr algn="l">
+              <a:lnSpc>
+                <a:spcPct val="110000"/>
+              </a:lnSpc>
+              <a:spcAft>
+                <a:spcPts val="1400"/>
+              </a:spcAft>
+            </a:pPr>
+            <a:r>
+              <a:rPr sz="2000" b="1">
+                <a:solidFill>
+                  <a:srgbClr val="7CB342"/>
+                </a:solidFill>
+                <a:latin typeface="Open Sans"/>
+              </a:rPr>
+              <a:t>▸ </a:t>
+            </a:r>
+            <a:r>
+              <a:rPr sz="1800" b="1">
+                <a:solidFill>
+                  <a:srgbClr val="2D7A3D"/>
+                </a:solidFill>
+                <a:latin typeface="Open Sans"/>
+              </a:rPr>
+              <a:t>Teste: </a:t>
+            </a:r>
+            <a:r>
+              <a:rPr sz="1800">
+                <a:solidFill>
+                  <a:srgbClr val="212121"/>
+                </a:solidFill>
+                <a:latin typeface="Open Sans"/>
+              </a:rPr>
+              <a:t>cada correção acompanha o teste que a prova.</a:t>
+            </a:r>
+          </a:p>
+          <a:p>
+            <a:pPr algn="l">
+              <a:lnSpc>
+                <a:spcPct val="110000"/>
+              </a:lnSpc>
+              <a:spcAft>
+                <a:spcPts val="1400"/>
+              </a:spcAft>
+            </a:pPr>
+            <a:r>
+              <a:rPr sz="2000" b="1">
+                <a:solidFill>
+                  <a:srgbClr val="7CB342"/>
+                </a:solidFill>
+                <a:latin typeface="Open Sans"/>
+              </a:rPr>
+              <a:t>▸ </a:t>
+            </a:r>
+            <a:r>
+              <a:rPr sz="1800" b="1">
+                <a:solidFill>
+                  <a:srgbClr val="2D7A3D"/>
+                </a:solidFill>
+                <a:latin typeface="Open Sans"/>
+              </a:rPr>
+              <a:t>Plano: </a:t>
+            </a:r>
+            <a:r>
+              <a:rPr sz="1800">
+                <a:solidFill>
+                  <a:srgbClr val="212121"/>
+                </a:solidFill>
+                <a:latin typeface="Open Sans"/>
+              </a:rPr>
+              <a:t>para o resto do pacote, entregue um plano de remediação.</a:t>
+            </a:r>
+          </a:p>
+          <a:p>
+            <a:pPr algn="l">
+              <a:lnSpc>
+                <a:spcPct val="110000"/>
+              </a:lnSpc>
+              <a:spcAft>
+                <a:spcPts val="1400"/>
+              </a:spcAft>
+            </a:pPr>
+            <a:r>
+              <a:rPr sz="2000" b="1">
+                <a:solidFill>
+                  <a:srgbClr val="7CB342"/>
+                </a:solidFill>
+                <a:latin typeface="Open Sans"/>
+              </a:rPr>
+              <a:t>▸ </a:t>
+            </a:r>
+            <a:r>
+              <a:rPr sz="1800" b="1">
+                <a:solidFill>
+                  <a:srgbClr val="2D7A3D"/>
+                </a:solidFill>
+                <a:latin typeface="Open Sans"/>
+              </a:rPr>
+              <a:t>Foco: </a:t>
+            </a:r>
+            <a:r>
+              <a:rPr sz="1800">
+                <a:solidFill>
+                  <a:srgbClr val="212121"/>
+                </a:solidFill>
+                <a:latin typeface="Open Sans"/>
+              </a:rPr>
+              <a:t>o objetivo é fechar o fio completo, não corrigir tudo.</a:t>
+            </a:r>
+          </a:p>
+          <a:p>
+            <a:pPr algn="l">
+              <a:lnSpc>
+                <a:spcPct val="110000"/>
+              </a:lnSpc>
+              <a:spcAft>
+                <a:spcPts val="1400"/>
+              </a:spcAft>
+            </a:pPr>
+            <a:r>
+              <a:rPr sz="2000" b="1">
+                <a:solidFill>
+                  <a:srgbClr val="7CB342"/>
+                </a:solidFill>
+                <a:latin typeface="Open Sans"/>
+              </a:rPr>
+              <a:t>▸ </a:t>
+            </a:r>
+            <a:r>
+              <a:rPr sz="1800" b="1">
+                <a:solidFill>
+                  <a:srgbClr val="2D7A3D"/>
+                </a:solidFill>
+                <a:latin typeface="Open Sans"/>
+              </a:rPr>
+              <a:t>Gate: </a:t>
+            </a:r>
+            <a:r>
+              <a:rPr sz="1800">
+                <a:solidFill>
+                  <a:srgbClr val="212121"/>
+                </a:solidFill>
+                <a:latin typeface="Open Sans"/>
+              </a:rPr>
+              <a:t>a classe corrigida deve passar de vermelho a verde no CI.</a:t>
             </a:r>
           </a:p>
         </p:txBody>
@@ -7864,8 +9131,8 @@
         </p:nvSpPr>
         <p:spPr>
           <a:xfrm>
-            <a:off x="457200" y="4800600"/>
-            <a:ext cx="11247120" cy="457200"/>
+            <a:off x="10972800" y="6446520"/>
+            <a:ext cx="914400" cy="320040"/>
           </a:xfrm>
           <a:prstGeom prst="rect">
             <a:avLst/>
@@ -7878,7 +9145,7 @@
           </a:bodyPr>
           <a:lstStyle/>
           <a:p>
-            <a:pPr algn="ctr">
+            <a:pPr algn="r">
               <a:lnSpc>
                 <a:spcPct val="100000"/>
               </a:lnSpc>
@@ -7890,58 +9157,13 @@
               </a:spcAft>
             </a:pPr>
             <a:r>
-              <a:rPr sz="1800" b="0" i="1">
-                <a:solidFill>
-                  <a:srgbClr val="CCD7C0"/>
+              <a:rPr sz="1100" b="0" i="0">
+                <a:solidFill>
+                  <a:srgbClr val="616161"/>
                 </a:solidFill>
                 <a:latin typeface="Open Sans"/>
               </a:rPr>
-              <a:t>alexorozco@ifsul.edu.br</a:t>
-            </a:r>
-          </a:p>
-        </p:txBody>
-      </p:sp>
-      <p:sp>
-        <p:nvSpPr>
-          <p:cNvPr id="8" name="TextBox 7"/>
-          <p:cNvSpPr txBox="1"/>
-          <p:nvPr/>
-        </p:nvSpPr>
-        <p:spPr>
-          <a:xfrm>
-            <a:off x="457200" y="5943600"/>
-            <a:ext cx="11247120" cy="457200"/>
-          </a:xfrm>
-          <a:prstGeom prst="rect">
-            <a:avLst/>
-          </a:prstGeom>
-          <a:noFill/>
-        </p:spPr>
-        <p:txBody>
-          <a:bodyPr wrap="square" anchor="t" lIns="0" rIns="0" tIns="0" bIns="0">
-            <a:spAutoFit/>
-          </a:bodyPr>
-          <a:lstStyle/>
-          <a:p>
-            <a:pPr algn="ctr">
-              <a:lnSpc>
-                <a:spcPct val="100000"/>
-              </a:lnSpc>
-              <a:spcBef>
-                <a:spcPts val="0"/>
-              </a:spcBef>
-              <a:spcAft>
-                <a:spcPts val="600"/>
-              </a:spcAft>
-            </a:pPr>
-            <a:r>
-              <a:rPr sz="1400" b="0" i="0">
-                <a:solidFill>
-                  <a:srgbClr val="CCD7C0"/>
-                </a:solidFill>
-                <a:latin typeface="Open Sans"/>
-              </a:rPr>
-              <a:t>IFSul · Câmpus Sapucaia do Sul</a:t>
+              <a:t>9</a:t>
             </a:r>
           </a:p>
         </p:txBody>
@@ -8272,4 +9494,324 @@
   </a:objectDefaults>
   <a:extraClrSchemeLst/>
 </a:theme>
+</file>
+
+<file path=ppt/theme/theme2.xml><?xml version="1.0" encoding="utf-8"?>
+<a:theme xmlns:a="http://schemas.openxmlformats.org/drawingml/2006/main" name="Office Theme">
+  <a:themeElements>
+    <a:clrScheme name="Office">
+      <a:dk1>
+        <a:sysClr val="windowText" lastClr="000000"/>
+      </a:dk1>
+      <a:lt1>
+        <a:sysClr val="window" lastClr="FFFFFF"/>
+      </a:lt1>
+      <a:dk2>
+        <a:srgbClr val="1F497D"/>
+      </a:dk2>
+      <a:lt2>
+        <a:srgbClr val="EEECE1"/>
+      </a:lt2>
+      <a:accent1>
+        <a:srgbClr val="4F81BD"/>
+      </a:accent1>
+      <a:accent2>
+        <a:srgbClr val="C0504D"/>
+      </a:accent2>
+      <a:accent3>
+        <a:srgbClr val="9BBB59"/>
+      </a:accent3>
+      <a:accent4>
+        <a:srgbClr val="8064A2"/>
+      </a:accent4>
+      <a:accent5>
+        <a:srgbClr val="4BACC6"/>
+      </a:accent5>
+      <a:accent6>
+        <a:srgbClr val="F79646"/>
+      </a:accent6>
+      <a:hlink>
+        <a:srgbClr val="0000FF"/>
+      </a:hlink>
+      <a:folHlink>
+        <a:srgbClr val="800080"/>
+      </a:folHlink>
+    </a:clrScheme>
+    <a:fontScheme name="Office">
+      <a:majorFont>
+        <a:latin typeface="Calibri"/>
+        <a:ea typeface=""/>
+        <a:cs typeface=""/>
+        <a:font script="Jpan" typeface="ＭＳ Ｐゴシック"/>
+        <a:font script="Hang" typeface="맑은 고딕"/>
+        <a:font script="Hans" typeface="宋体"/>
+        <a:font script="Hant" typeface="新細明體"/>
+        <a:font script="Arab" typeface="Times New Roman"/>
+        <a:font script="Hebr" typeface="Times New Roman"/>
+        <a:font script="Thai" typeface="Angsana New"/>
+        <a:font script="Ethi" typeface="Nyala"/>
+        <a:font script="Beng" typeface="Vrinda"/>
+        <a:font script="Gujr" typeface="Shruti"/>
+        <a:font script="Khmr" typeface="MoolBoran"/>
+        <a:font script="Knda" typeface="Tunga"/>
+        <a:font script="Guru" typeface="Raavi"/>
+        <a:font script="Cans" typeface="Euphemia"/>
+        <a:font script="Cher" typeface="Plantagenet Cherokee"/>
+        <a:font script="Yiii" typeface="Microsoft Yi Baiti"/>
+        <a:font script="Tibt" typeface="Microsoft Himalaya"/>
+        <a:font script="Thaa" typeface="MV Boli"/>
+        <a:font script="Deva" typeface="Mangal"/>
+        <a:font script="Telu" typeface="Gautami"/>
+        <a:font script="Taml" typeface="Latha"/>
+        <a:font script="Syrc" typeface="Estrangelo Edessa"/>
+        <a:font script="Orya" typeface="Kalinga"/>
+        <a:font script="Mlym" typeface="Kartika"/>
+        <a:font script="Laoo" typeface="DokChampa"/>
+        <a:font script="Sinh" typeface="Iskoola Pota"/>
+        <a:font script="Mong" typeface="Mongolian Baiti"/>
+        <a:font script="Viet" typeface="Times New Roman"/>
+        <a:font script="Uigh" typeface="Microsoft Uighur"/>
+        <a:font script="Geor" typeface="Sylfaen"/>
+      </a:majorFont>
+      <a:minorFont>
+        <a:latin typeface="Calibri"/>
+        <a:ea typeface=""/>
+        <a:cs typeface=""/>
+        <a:font script="Jpan" typeface="ＭＳ Ｐゴシック"/>
+        <a:font script="Hang" typeface="맑은 고딕"/>
+        <a:font script="Hans" typeface="宋体"/>
+        <a:font script="Hant" typeface="新細明體"/>
+        <a:font script="Arab" typeface="Arial"/>
+        <a:font script="Hebr" typeface="Arial"/>
+        <a:font script="Thai" typeface="Cordia New"/>
+        <a:font script="Ethi" typeface="Nyala"/>
+        <a:font script="Beng" typeface="Vrinda"/>
+        <a:font script="Gujr" typeface="Shruti"/>
+        <a:font script="Khmr" typeface="DaunPenh"/>
+        <a:font script="Knda" typeface="Tunga"/>
+        <a:font script="Guru" typeface="Raavi"/>
+        <a:font script="Cans" typeface="Euphemia"/>
+        <a:font script="Cher" typeface="Plantagenet Cherokee"/>
+        <a:font script="Yiii" typeface="Microsoft Yi Baiti"/>
+        <a:font script="Tibt" typeface="Microsoft Himalaya"/>
+        <a:font script="Thaa" typeface="MV Boli"/>
+        <a:font script="Deva" typeface="Mangal"/>
+        <a:font script="Telu" typeface="Gautami"/>
+        <a:font script="Taml" typeface="Latha"/>
+        <a:font script="Syrc" typeface="Estrangelo Edessa"/>
+        <a:font script="Orya" typeface="Kalinga"/>
+        <a:font script="Mlym" typeface="Kartika"/>
+        <a:font script="Laoo" typeface="DokChampa"/>
+        <a:font script="Sinh" typeface="Iskoola Pota"/>
+        <a:font script="Mong" typeface="Mongolian Baiti"/>
+        <a:font script="Viet" typeface="Arial"/>
+        <a:font script="Uigh" typeface="Microsoft Uighur"/>
+        <a:font script="Geor" typeface="Sylfaen"/>
+      </a:minorFont>
+    </a:fontScheme>
+    <a:fmtScheme name="Office">
+      <a:fillStyleLst>
+        <a:solidFill>
+          <a:schemeClr val="phClr"/>
+        </a:solidFill>
+        <a:gradFill rotWithShape="1">
+          <a:gsLst>
+            <a:gs pos="0">
+              <a:schemeClr val="phClr">
+                <a:tint val="50000"/>
+                <a:satMod val="300000"/>
+              </a:schemeClr>
+            </a:gs>
+            <a:gs pos="35000">
+              <a:schemeClr val="phClr">
+                <a:tint val="37000"/>
+                <a:satMod val="300000"/>
+              </a:schemeClr>
+            </a:gs>
+            <a:gs pos="100000">
+              <a:schemeClr val="phClr">
+                <a:tint val="15000"/>
+                <a:satMod val="350000"/>
+              </a:schemeClr>
+            </a:gs>
+          </a:gsLst>
+          <a:lin ang="16200000" scaled="1"/>
+        </a:gradFill>
+        <a:gradFill rotWithShape="1">
+          <a:gsLst>
+            <a:gs pos="0">
+              <a:schemeClr val="phClr">
+                <a:tint val="100000"/>
+                <a:shade val="100000"/>
+                <a:satMod val="130000"/>
+              </a:schemeClr>
+            </a:gs>
+            <a:gs pos="100000">
+              <a:schemeClr val="phClr">
+                <a:tint val="50000"/>
+                <a:shade val="100000"/>
+                <a:satMod val="350000"/>
+              </a:schemeClr>
+            </a:gs>
+          </a:gsLst>
+          <a:lin ang="16200000" scaled="0"/>
+        </a:gradFill>
+      </a:fillStyleLst>
+      <a:lnStyleLst>
+        <a:ln w="9525" cap="flat" cmpd="sng" algn="ctr">
+          <a:solidFill>
+            <a:schemeClr val="phClr">
+              <a:shade val="95000"/>
+              <a:satMod val="105000"/>
+            </a:schemeClr>
+          </a:solidFill>
+          <a:prstDash val="solid"/>
+        </a:ln>
+        <a:ln w="25400" cap="flat" cmpd="sng" algn="ctr">
+          <a:solidFill>
+            <a:schemeClr val="phClr"/>
+          </a:solidFill>
+          <a:prstDash val="solid"/>
+        </a:ln>
+        <a:ln w="38100" cap="flat" cmpd="sng" algn="ctr">
+          <a:solidFill>
+            <a:schemeClr val="phClr"/>
+          </a:solidFill>
+          <a:prstDash val="solid"/>
+        </a:ln>
+      </a:lnStyleLst>
+      <a:effectStyleLst>
+        <a:effectStyle>
+          <a:effectLst>
+            <a:outerShdw blurRad="40000" dist="20000" dir="5400000" rotWithShape="0">
+              <a:srgbClr val="000000">
+                <a:alpha val="38000"/>
+              </a:srgbClr>
+            </a:outerShdw>
+          </a:effectLst>
+        </a:effectStyle>
+        <a:effectStyle>
+          <a:effectLst>
+            <a:outerShdw blurRad="40000" dist="23000" dir="5400000" rotWithShape="0">
+              <a:srgbClr val="000000">
+                <a:alpha val="35000"/>
+              </a:srgbClr>
+            </a:outerShdw>
+          </a:effectLst>
+        </a:effectStyle>
+        <a:effectStyle>
+          <a:effectLst>
+            <a:outerShdw blurRad="40000" dist="23000" dir="5400000" rotWithShape="0">
+              <a:srgbClr val="000000">
+                <a:alpha val="35000"/>
+              </a:srgbClr>
+            </a:outerShdw>
+          </a:effectLst>
+          <a:scene3d>
+            <a:camera prst="orthographicFront">
+              <a:rot lat="0" lon="0" rev="0"/>
+            </a:camera>
+            <a:lightRig rig="threePt" dir="t">
+              <a:rot lat="0" lon="0" rev="1200000"/>
+            </a:lightRig>
+          </a:scene3d>
+          <a:sp3d>
+            <a:bevelT w="63500" h="25400"/>
+          </a:sp3d>
+        </a:effectStyle>
+      </a:effectStyleLst>
+      <a:bgFillStyleLst>
+        <a:solidFill>
+          <a:schemeClr val="phClr"/>
+        </a:solidFill>
+        <a:gradFill rotWithShape="1">
+          <a:gsLst>
+            <a:gs pos="0">
+              <a:schemeClr val="phClr">
+                <a:tint val="40000"/>
+                <a:satMod val="350000"/>
+              </a:schemeClr>
+            </a:gs>
+            <a:gs pos="40000">
+              <a:schemeClr val="phClr">
+                <a:tint val="45000"/>
+                <a:shade val="99000"/>
+                <a:satMod val="350000"/>
+              </a:schemeClr>
+            </a:gs>
+            <a:gs pos="100000">
+              <a:schemeClr val="phClr">
+                <a:shade val="20000"/>
+                <a:satMod val="255000"/>
+              </a:schemeClr>
+            </a:gs>
+          </a:gsLst>
+          <a:path path="circle">
+            <a:fillToRect l="50000" t="-80000" r="50000" b="180000"/>
+          </a:path>
+        </a:gradFill>
+        <a:gradFill rotWithShape="1">
+          <a:gsLst>
+            <a:gs pos="0">
+              <a:schemeClr val="phClr">
+                <a:tint val="80000"/>
+                <a:satMod val="300000"/>
+              </a:schemeClr>
+            </a:gs>
+            <a:gs pos="100000">
+              <a:schemeClr val="phClr">
+                <a:shade val="30000"/>
+                <a:satMod val="200000"/>
+              </a:schemeClr>
+            </a:gs>
+          </a:gsLst>
+          <a:path path="circle">
+            <a:fillToRect l="50000" t="50000" r="50000" b="50000"/>
+          </a:path>
+        </a:gradFill>
+      </a:bgFillStyleLst>
+    </a:fmtScheme>
+  </a:themeElements>
+  <a:objectDefaults>
+    <a:spDef>
+      <a:spPr/>
+      <a:bodyPr/>
+      <a:lstStyle/>
+      <a:style>
+        <a:lnRef idx="1">
+          <a:schemeClr val="accent1"/>
+        </a:lnRef>
+        <a:fillRef idx="3">
+          <a:schemeClr val="accent1"/>
+        </a:fillRef>
+        <a:effectRef idx="2">
+          <a:schemeClr val="accent1"/>
+        </a:effectRef>
+        <a:fontRef idx="minor">
+          <a:schemeClr val="lt1"/>
+        </a:fontRef>
+      </a:style>
+    </a:spDef>
+    <a:lnDef>
+      <a:spPr/>
+      <a:bodyPr/>
+      <a:lstStyle/>
+      <a:style>
+        <a:lnRef idx="2">
+          <a:schemeClr val="accent1"/>
+        </a:lnRef>
+        <a:fillRef idx="0">
+          <a:schemeClr val="accent1"/>
+        </a:fillRef>
+        <a:effectRef idx="1">
+          <a:schemeClr val="accent1"/>
+        </a:effectRef>
+        <a:fontRef idx="minor">
+          <a:schemeClr val="tx1"/>
+        </a:fontRef>
+      </a:style>
+    </a:lnDef>
+  </a:objectDefaults>
+  <a:extraClrSchemeLst/>
+</a:theme>
 </file>
--- a/aulas/aula-06-implementacao-segura.pptx
+++ b/aulas/aula-06-implementacao-segura.pptx
@@ -15,6 +15,7 @@
     <p:sldId id="263" r:id="rId15"/>
     <p:sldId id="264" r:id="rId16"/>
     <p:sldId id="265" r:id="rId17"/>
+    <p:sldId id="266" r:id="rId18"/>
   </p:sldIdLst>
   <p:sldSz cx="12191695" cy="6858000" type="screen4x3"/>
   <p:notesSz cx="6858000" cy="9144000"/>
@@ -581,7 +582,7 @@
           <a:lstStyle/>
           <a:p>
             <a:r>
-              <a:t>O OWASP Top 10 é a lista das categorias de falha mais frequentes, revisada com base em milhões de aplicações. A01 (Broken Access Control) é o #1 — e é exatamente o IDOR do VidaPlus. Em 2025 surgiram A03 (Supply Chain) e A10 (Mishandling of Exceptional Conditions). Quase toda vulnerabilidade plantada no projeto cai em uma dessas classes.</a:t>
+              <a:t>O OWASP Top 10 é a lista das categorias de falha mais frequentes, revisada com base em milhões de aplicações. A01 (Broken Access Control) é o #1 — e é exatamente o IDOR do VidaPlus. Em 2025 houve reordenação: Misconfiguration subiu para A02 e Supply Chain entrou como A03. Quase toda vulnerabilidade plantada no projeto cai em uma dessas classes.</a:t>
             </a:r>
           </a:p>
         </p:txBody>
@@ -651,7 +652,7 @@
           <a:lstStyle/>
           <a:p>
             <a:r>
-              <a:t>Para cada classe há um padrão de correção consagrado. Injection: nunca concatenar SQL — use parâmetros ('SELECT ... WHERE email = ?'). Access Control: valide no SERVIDOR que o recurso pertence ao usuário; nunca confie no cliente. Crypto: use primitivas modernas. Segredos: fora do código, em cofre/variável de ambiente.</a:t>
+              <a:t>As cinco restantes. A06 (Insecure Design) cobre a falha de PROJETO — no VidaPlus, a sobrecoleta de dados (falta de minimização). A08 trata da integridade (laudo sem hash/assinatura). A09 é a ausência de trilha de auditoria — e o antipadrão de PII no log. A10 (Mishandling of Exceptional Conditions) é NOVA em 2025: o stack trace devolvido ao cliente. Assim, o VidaPlus tem representante em quase todas as 10 classes.</a:t>
             </a:r>
           </a:p>
         </p:txBody>
@@ -721,7 +722,7 @@
           <a:lstStyle/>
           <a:p>
             <a:r>
-              <a:t>Exemplo trabalhado do controle P0 mais importante do projeto. O legado confia no id vindo do cliente (IDOR). A correção é validar o OWNERSHIP no servidor antes de devolver o recurso; se não for do usuário, HTTP 403 — e a resposta não pode vazar metadados (nome do exame, tipo), senão vira enumeração. O RGS é o teste automatizado que prova o 403.</a:t>
+              <a:t>Para cada classe há um padrão de correção consagrado. Injection: nunca concatenar SQL — use parâmetros ('SELECT ... WHERE email = ?'). Access Control: valide no SERVIDOR que o recurso pertence ao usuário; nunca confie no cliente. Crypto: use primitivas modernas. Segredos: fora do código, em cofre/variável de ambiente.</a:t>
             </a:r>
           </a:p>
         </p:txBody>
@@ -791,7 +792,7 @@
           <a:lstStyle/>
           <a:p>
             <a:r>
-              <a:t>Além de corrigir falhas, alguns grupos criam módulos que a LGPD exige e não existem no legado. Consentimento: registro versionado e revogável. Portabilidade: exportar os dados do titular. Eliminação: anonimizar o prontuário (dever de guarda) e remover a credencial. Auditoria: trilha imutável encadeada por hash, sem PII no log.</a:t>
+              <a:t>Exemplo trabalhado do controle P0 mais importante do projeto. O legado confia no id vindo do cliente (IDOR). A correção é validar o OWNERSHIP no servidor antes de devolver o recurso; se não for do usuário, HTTP 403 — e a resposta não pode vazar metadados (nome do exame, tipo), senão vira enumeração. O RGS é o teste automatizado que prova o 403.</a:t>
             </a:r>
           </a:p>
         </p:txBody>
@@ -817,6 +818,76 @@
 </file>
 
 <file path=ppt/notesSlides/notesSlide6.xml><?xml version="1.0" encoding="utf-8"?>
+<p:notes xmlns:a="http://schemas.openxmlformats.org/drawingml/2006/main" xmlns:p="http://schemas.openxmlformats.org/presentationml/2006/main" xmlns:r="http://schemas.openxmlformats.org/officeDocument/2006/relationships">
+  <p:cSld>
+    <p:spTree>
+      <p:nvGrpSpPr>
+        <p:cNvPr id="1" name=""/>
+        <p:cNvGrpSpPr/>
+        <p:nvPr/>
+      </p:nvGrpSpPr>
+      <p:grpSpPr>
+        <a:xfrm>
+          <a:off x="0" y="0"/>
+          <a:ext cx="0" cy="0"/>
+          <a:chOff x="0" y="0"/>
+          <a:chExt cx="0" cy="0"/>
+        </a:xfrm>
+      </p:grpSpPr>
+      <p:sp>
+        <p:nvSpPr>
+          <p:cNvPr id="2" name="Slide Image Placeholder 1"/>
+          <p:cNvSpPr>
+            <a:spLocks noGrp="1"/>
+          </p:cNvSpPr>
+          <p:nvPr>
+            <p:ph type="sldImg" idx="2"/>
+          </p:nvPr>
+        </p:nvSpPr>
+        <p:spPr/>
+      </p:sp>
+      <p:sp>
+        <p:nvSpPr>
+          <p:cNvPr id="3" name="Notes Placeholder 2"/>
+          <p:cNvSpPr>
+            <a:spLocks noGrp="1"/>
+          </p:cNvSpPr>
+          <p:nvPr>
+            <p:ph type="body" idx="3" sz="quarter"/>
+          </p:nvPr>
+        </p:nvSpPr>
+        <p:spPr/>
+        <p:txBody>
+          <a:bodyPr/>
+          <a:lstStyle/>
+          <a:p>
+            <a:r>
+              <a:t>Além de corrigir falhas, alguns grupos criam módulos que a LGPD exige e não existem no legado. Consentimento: registro versionado e revogável. Portabilidade: exportar os dados do titular. Eliminação: anonimizar o prontuário (dever de guarda) e remover a credencial. Auditoria: trilha imutável encadeada por hash, sem PII no log.</a:t>
+            </a:r>
+          </a:p>
+        </p:txBody>
+      </p:sp>
+      <p:sp>
+        <p:nvSpPr>
+          <p:cNvPr id="4" name="Slide Number Placeholder 3"/>
+          <p:cNvSpPr>
+            <a:spLocks noGrp="1"/>
+          </p:cNvSpPr>
+          <p:nvPr>
+            <p:ph type="sldNum" idx="5" sz="quarter"/>
+          </p:nvPr>
+        </p:nvSpPr>
+        <p:spPr/>
+      </p:sp>
+    </p:spTree>
+  </p:cSld>
+  <p:clrMapOvr>
+    <a:masterClrMapping/>
+  </p:clrMapOvr>
+</p:notes>
+</file>
+
+<file path=ppt/notesSlides/notesSlide7.xml><?xml version="1.0" encoding="utf-8"?>
 <p:notes xmlns:a="http://schemas.openxmlformats.org/drawingml/2006/main" xmlns:p="http://schemas.openxmlformats.org/presentationml/2006/main" xmlns:r="http://schemas.openxmlformats.org/officeDocument/2006/relationships">
   <p:cSld>
     <p:spTree>
@@ -4231,6 +4302,457 @@
         <p:spPr>
           <a:xfrm>
             <a:off x="0" y="0"/>
+            <a:ext cx="12191695" cy="1234440"/>
+          </a:xfrm>
+          <a:prstGeom prst="rect">
+            <a:avLst/>
+          </a:prstGeom>
+          <a:solidFill>
+            <a:srgbClr val="2D7A3D"/>
+          </a:solidFill>
+          <a:ln>
+            <a:noFill/>
+          </a:ln>
+          <a:effectLst/>
+        </p:spPr>
+        <p:style>
+          <a:lnRef idx="1">
+            <a:schemeClr val="accent1"/>
+          </a:lnRef>
+          <a:fillRef idx="3">
+            <a:schemeClr val="accent1"/>
+          </a:fillRef>
+          <a:effectRef idx="2">
+            <a:schemeClr val="accent1"/>
+          </a:effectRef>
+          <a:fontRef idx="minor">
+            <a:schemeClr val="lt1"/>
+          </a:fontRef>
+        </p:style>
+        <p:txBody>
+          <a:bodyPr rtlCol="0" anchor="ctr"/>
+          <a:lstStyle/>
+          <a:p>
+            <a:pPr algn="ctr"/>
+          </a:p>
+        </p:txBody>
+      </p:sp>
+      <p:sp>
+        <p:nvSpPr>
+          <p:cNvPr id="3" name="TextBox 2"/>
+          <p:cNvSpPr txBox="1"/>
+          <p:nvPr/>
+        </p:nvSpPr>
+        <p:spPr>
+          <a:xfrm>
+            <a:off x="457200" y="164592"/>
+            <a:ext cx="11247120" cy="640080"/>
+          </a:xfrm>
+          <a:prstGeom prst="rect">
+            <a:avLst/>
+          </a:prstGeom>
+          <a:noFill/>
+        </p:spPr>
+        <p:txBody>
+          <a:bodyPr wrap="square" anchor="t" lIns="0" rIns="0" tIns="0" bIns="0">
+            <a:spAutoFit/>
+          </a:bodyPr>
+          <a:lstStyle/>
+          <a:p>
+            <a:pPr algn="l">
+              <a:lnSpc>
+                <a:spcPct val="100000"/>
+              </a:lnSpc>
+              <a:spcBef>
+                <a:spcPts val="0"/>
+              </a:spcBef>
+              <a:spcAft>
+                <a:spcPts val="600"/>
+              </a:spcAft>
+            </a:pPr>
+            <a:r>
+              <a:rPr sz="3200" b="1" i="0">
+                <a:solidFill>
+                  <a:srgbClr val="FFFFFF"/>
+                </a:solidFill>
+                <a:latin typeface="Open Sans"/>
+              </a:rPr>
+              <a:t>Entregável da Fase 4</a:t>
+            </a:r>
+          </a:p>
+        </p:txBody>
+      </p:sp>
+      <p:sp>
+        <p:nvSpPr>
+          <p:cNvPr id="4" name="TextBox 3"/>
+          <p:cNvSpPr txBox="1"/>
+          <p:nvPr/>
+        </p:nvSpPr>
+        <p:spPr>
+          <a:xfrm>
+            <a:off x="457200" y="777240"/>
+            <a:ext cx="11247120" cy="365760"/>
+          </a:xfrm>
+          <a:prstGeom prst="rect">
+            <a:avLst/>
+          </a:prstGeom>
+          <a:noFill/>
+        </p:spPr>
+        <p:txBody>
+          <a:bodyPr wrap="square" anchor="t" lIns="0" rIns="0" tIns="0" bIns="0">
+            <a:spAutoFit/>
+          </a:bodyPr>
+          <a:lstStyle/>
+          <a:p>
+            <a:pPr algn="l">
+              <a:lnSpc>
+                <a:spcPct val="100000"/>
+              </a:lnSpc>
+              <a:spcBef>
+                <a:spcPts val="0"/>
+              </a:spcBef>
+              <a:spcAft>
+                <a:spcPts val="600"/>
+              </a:spcAft>
+            </a:pPr>
+            <a:r>
+              <a:rPr sz="1600" b="0" i="1">
+                <a:solidFill>
+                  <a:srgbClr val="E0E8DB"/>
+                </a:solidFill>
+                <a:latin typeface="Open Sans"/>
+              </a:rPr>
+              <a:t>Prova de conceito (PR) + plano de remediação (dossiê §6)</a:t>
+            </a:r>
+          </a:p>
+        </p:txBody>
+      </p:sp>
+      <p:sp>
+        <p:nvSpPr>
+          <p:cNvPr id="5" name="Rounded Rectangle 4"/>
+          <p:cNvSpPr/>
+          <p:nvPr/>
+        </p:nvSpPr>
+        <p:spPr>
+          <a:xfrm>
+            <a:off x="411480" y="1463040"/>
+            <a:ext cx="11384280" cy="5029200"/>
+          </a:xfrm>
+          <a:prstGeom prst="roundRect">
+            <a:avLst/>
+          </a:prstGeom>
+          <a:solidFill>
+            <a:srgbClr val="F5F5F5"/>
+          </a:solidFill>
+          <a:ln w="15875">
+            <a:solidFill>
+              <a:srgbClr val="7CB342"/>
+            </a:solidFill>
+          </a:ln>
+          <a:effectLst/>
+        </p:spPr>
+        <p:style>
+          <a:lnRef idx="1">
+            <a:schemeClr val="accent1"/>
+          </a:lnRef>
+          <a:fillRef idx="3">
+            <a:schemeClr val="accent1"/>
+          </a:fillRef>
+          <a:effectRef idx="2">
+            <a:schemeClr val="accent1"/>
+          </a:effectRef>
+          <a:fontRef idx="minor">
+            <a:schemeClr val="lt1"/>
+          </a:fontRef>
+        </p:style>
+        <p:txBody>
+          <a:bodyPr rtlCol="0" anchor="ctr"/>
+          <a:lstStyle/>
+          <a:p>
+            <a:pPr algn="ctr"/>
+          </a:p>
+        </p:txBody>
+      </p:sp>
+      <p:sp>
+        <p:nvSpPr>
+          <p:cNvPr id="6" name="TextBox 5"/>
+          <p:cNvSpPr txBox="1"/>
+          <p:nvPr/>
+        </p:nvSpPr>
+        <p:spPr>
+          <a:xfrm>
+            <a:off x="868680" y="1783080"/>
+            <a:ext cx="10515600" cy="4572000"/>
+          </a:xfrm>
+          <a:prstGeom prst="rect">
+            <a:avLst/>
+          </a:prstGeom>
+          <a:noFill/>
+        </p:spPr>
+        <p:txBody>
+          <a:bodyPr wrap="square">
+            <a:spAutoFit/>
+          </a:bodyPr>
+          <a:lstStyle/>
+          <a:p>
+            <a:pPr algn="l">
+              <a:lnSpc>
+                <a:spcPct val="110000"/>
+              </a:lnSpc>
+              <a:spcAft>
+                <a:spcPts val="1400"/>
+              </a:spcAft>
+            </a:pPr>
+            <a:r>
+              <a:rPr sz="2000" b="1">
+                <a:solidFill>
+                  <a:srgbClr val="7CB342"/>
+                </a:solidFill>
+                <a:latin typeface="Open Sans"/>
+              </a:rPr>
+              <a:t>▸ </a:t>
+            </a:r>
+            <a:r>
+              <a:rPr sz="1800" b="1">
+                <a:solidFill>
+                  <a:srgbClr val="2D7A3D"/>
+                </a:solidFill>
+                <a:latin typeface="Open Sans"/>
+              </a:rPr>
+              <a:t>Entregar (PoC): </a:t>
+            </a:r>
+            <a:r>
+              <a:rPr sz="1800">
+                <a:solidFill>
+                  <a:srgbClr val="212121"/>
+                </a:solidFill>
+                <a:latin typeface="Open Sans"/>
+              </a:rPr>
+              <a:t>1-2 controles corrigidos ponta-a-ponta (≥1 P0) num Pull Request.</a:t>
+            </a:r>
+          </a:p>
+          <a:p>
+            <a:pPr algn="l">
+              <a:lnSpc>
+                <a:spcPct val="110000"/>
+              </a:lnSpc>
+              <a:spcAft>
+                <a:spcPts val="1400"/>
+              </a:spcAft>
+            </a:pPr>
+            <a:r>
+              <a:rPr sz="2000" b="1">
+                <a:solidFill>
+                  <a:srgbClr val="7CB342"/>
+                </a:solidFill>
+                <a:latin typeface="Open Sans"/>
+              </a:rPr>
+              <a:t>▸ </a:t>
+            </a:r>
+            <a:r>
+              <a:rPr sz="1800" b="1">
+                <a:solidFill>
+                  <a:srgbClr val="2D7A3D"/>
+                </a:solidFill>
+                <a:latin typeface="Open Sans"/>
+              </a:rPr>
+              <a:t>Teste: </a:t>
+            </a:r>
+            <a:r>
+              <a:rPr sz="1800">
+                <a:solidFill>
+                  <a:srgbClr val="212121"/>
+                </a:solidFill>
+                <a:latin typeface="Open Sans"/>
+              </a:rPr>
+              <a:t>cada correção acompanha o teste que a prova.</a:t>
+            </a:r>
+          </a:p>
+          <a:p>
+            <a:pPr algn="l">
+              <a:lnSpc>
+                <a:spcPct val="110000"/>
+              </a:lnSpc>
+              <a:spcAft>
+                <a:spcPts val="1400"/>
+              </a:spcAft>
+            </a:pPr>
+            <a:r>
+              <a:rPr sz="2000" b="1">
+                <a:solidFill>
+                  <a:srgbClr val="7CB342"/>
+                </a:solidFill>
+                <a:latin typeface="Open Sans"/>
+              </a:rPr>
+              <a:t>▸ </a:t>
+            </a:r>
+            <a:r>
+              <a:rPr sz="1800" b="1">
+                <a:solidFill>
+                  <a:srgbClr val="2D7A3D"/>
+                </a:solidFill>
+                <a:latin typeface="Open Sans"/>
+              </a:rPr>
+              <a:t>Gate: </a:t>
+            </a:r>
+            <a:r>
+              <a:rPr sz="1800">
+                <a:solidFill>
+                  <a:srgbClr val="212121"/>
+                </a:solidFill>
+                <a:latin typeface="Open Sans"/>
+              </a:rPr>
+              <a:t>a classe corrigida passa de vermelho a verde no CI.</a:t>
+            </a:r>
+          </a:p>
+          <a:p>
+            <a:pPr algn="l">
+              <a:lnSpc>
+                <a:spcPct val="110000"/>
+              </a:lnSpc>
+              <a:spcAft>
+                <a:spcPts val="1400"/>
+              </a:spcAft>
+            </a:pPr>
+            <a:r>
+              <a:rPr sz="2000" b="1">
+                <a:solidFill>
+                  <a:srgbClr val="7CB342"/>
+                </a:solidFill>
+                <a:latin typeface="Open Sans"/>
+              </a:rPr>
+              <a:t>▸ </a:t>
+            </a:r>
+            <a:r>
+              <a:rPr sz="1800" b="1">
+                <a:solidFill>
+                  <a:srgbClr val="2D7A3D"/>
+                </a:solidFill>
+                <a:latin typeface="Open Sans"/>
+              </a:rPr>
+              <a:t>Plano: </a:t>
+            </a:r>
+            <a:r>
+              <a:rPr sz="1800">
+                <a:solidFill>
+                  <a:srgbClr val="212121"/>
+                </a:solidFill>
+                <a:latin typeface="Open Sans"/>
+              </a:rPr>
+              <a:t>para o resto do pacote, plano de remediação (o quê/como/esforço) — §6.2.</a:t>
+            </a:r>
+          </a:p>
+          <a:p>
+            <a:pPr algn="l">
+              <a:lnSpc>
+                <a:spcPct val="110000"/>
+              </a:lnSpc>
+              <a:spcAft>
+                <a:spcPts val="1400"/>
+              </a:spcAft>
+            </a:pPr>
+            <a:r>
+              <a:rPr sz="2000" b="1">
+                <a:solidFill>
+                  <a:srgbClr val="7CB342"/>
+                </a:solidFill>
+                <a:latin typeface="Open Sans"/>
+              </a:rPr>
+              <a:t>▸ </a:t>
+            </a:r>
+            <a:r>
+              <a:rPr sz="1800" b="1">
+                <a:solidFill>
+                  <a:srgbClr val="2D7A3D"/>
+                </a:solidFill>
+                <a:latin typeface="Open Sans"/>
+              </a:rPr>
+              <a:t>Pronto quando: </a:t>
+            </a:r>
+            <a:r>
+              <a:rPr sz="1800">
+                <a:solidFill>
+                  <a:srgbClr val="212121"/>
+                </a:solidFill>
+                <a:latin typeface="Open Sans"/>
+              </a:rPr>
+              <a:t>PR revisado e mergeado + teste verde + plano do restante.</a:t>
+            </a:r>
+          </a:p>
+        </p:txBody>
+      </p:sp>
+      <p:sp>
+        <p:nvSpPr>
+          <p:cNvPr id="7" name="TextBox 6"/>
+          <p:cNvSpPr txBox="1"/>
+          <p:nvPr/>
+        </p:nvSpPr>
+        <p:spPr>
+          <a:xfrm>
+            <a:off x="10972800" y="6446520"/>
+            <a:ext cx="914400" cy="320040"/>
+          </a:xfrm>
+          <a:prstGeom prst="rect">
+            <a:avLst/>
+          </a:prstGeom>
+          <a:noFill/>
+        </p:spPr>
+        <p:txBody>
+          <a:bodyPr wrap="square" anchor="t" lIns="0" rIns="0" tIns="0" bIns="0">
+            <a:spAutoFit/>
+          </a:bodyPr>
+          <a:lstStyle/>
+          <a:p>
+            <a:pPr algn="r">
+              <a:lnSpc>
+                <a:spcPct val="100000"/>
+              </a:lnSpc>
+              <a:spcBef>
+                <a:spcPts val="0"/>
+              </a:spcBef>
+              <a:spcAft>
+                <a:spcPts val="600"/>
+              </a:spcAft>
+            </a:pPr>
+            <a:r>
+              <a:rPr sz="1100" b="0" i="0">
+                <a:solidFill>
+                  <a:srgbClr val="616161"/>
+                </a:solidFill>
+                <a:latin typeface="Open Sans"/>
+              </a:rPr>
+              <a:t>10</a:t>
+            </a:r>
+          </a:p>
+        </p:txBody>
+      </p:sp>
+    </p:spTree>
+  </p:cSld>
+  <p:clrMapOvr>
+    <a:masterClrMapping/>
+  </p:clrMapOvr>
+</p:sld>
+</file>
+
+<file path=ppt/slides/slide11.xml><?xml version="1.0" encoding="utf-8"?>
+<p:sld xmlns:a="http://schemas.openxmlformats.org/drawingml/2006/main" xmlns:p="http://schemas.openxmlformats.org/presentationml/2006/main" xmlns:r="http://schemas.openxmlformats.org/officeDocument/2006/relationships">
+  <p:cSld>
+    <p:spTree>
+      <p:nvGrpSpPr>
+        <p:cNvPr id="1" name=""/>
+        <p:cNvGrpSpPr/>
+        <p:nvPr/>
+      </p:nvGrpSpPr>
+      <p:grpSpPr/>
+      <p:sp>
+        <p:nvSpPr>
+          <p:cNvPr id="2" name="Rectangle 1"/>
+          <p:cNvSpPr/>
+          <p:nvPr/>
+        </p:nvSpPr>
+        <p:spPr>
+          <a:xfrm>
+            <a:off x="0" y="0"/>
             <a:ext cx="12191695" cy="6858000"/>
           </a:xfrm>
           <a:prstGeom prst="rect">
@@ -4857,7 +5379,7 @@
                 </a:solidFill>
                 <a:latin typeface="Open Sans"/>
               </a:rPr>
-              <a:t>OWASP Top 10:2025</a:t>
+              <a:t>OWASP Top 10:2025 — 1/2</a:t>
             </a:r>
           </a:p>
         </p:txBody>
@@ -4902,7 +5424,7 @@
                 </a:solidFill>
                 <a:latin typeface="Open Sans"/>
               </a:rPr>
-              <a:t>As categorias (2 novas em 2025)</a:t>
+              <a:t>As 5 primeiras (e o que cai no VidaPlus)</a:t>
             </a:r>
           </a:p>
         </p:txBody>
@@ -5127,7 +5649,7 @@
                 </a:solidFill>
                 <a:latin typeface="Open Sans"/>
               </a:rPr>
-              <a:t>IDOR, RBAC ausente — #1 há 4 edições</a:t>
+              <a:t>IDOR, RBAC ausente — #1 há 4 edições (V-03/04/09)</a:t>
             </a:r>
           </a:p>
         </p:txBody>
@@ -5352,7 +5874,7 @@
                 </a:solidFill>
                 <a:latin typeface="Open Sans"/>
               </a:rPr>
-              <a:t>CORS aberto, headers ausentes, defaults</a:t>
+              <a:t>CORS aberto, headers ausentes, defaults (V-12/13)</a:t>
             </a:r>
           </a:p>
         </p:txBody>
@@ -5577,7 +6099,7 @@
                 </a:solidFill>
                 <a:latin typeface="Open Sans"/>
               </a:rPr>
-              <a:t>dependências, proveniência</a:t>
+              <a:t>dependências vulneráveis, proveniência (SCA)</a:t>
             </a:r>
           </a:p>
         </p:txBody>
@@ -5802,7 +6324,7 @@
                 </a:solidFill>
                 <a:latin typeface="Open Sans"/>
               </a:rPr>
-              <a:t>MD5, TLS fraco, segredos hardcoded</a:t>
+              <a:t>MD5, TLS fraco, segredos no código (V-02/05/13)</a:t>
             </a:r>
           </a:p>
         </p:txBody>
@@ -6027,239 +6549,14 @@
                 </a:solidFill>
                 <a:latin typeface="Open Sans"/>
               </a:rPr>
-              <a:t>SQLi, XSS, comando</a:t>
-            </a:r>
-          </a:p>
-        </p:txBody>
-      </p:sp>
-      <p:sp>
-        <p:nvSpPr>
-          <p:cNvPr id="30" name="Rounded Rectangle 29"/>
-          <p:cNvSpPr/>
-          <p:nvPr/>
-        </p:nvSpPr>
-        <p:spPr>
-          <a:xfrm>
-            <a:off x="411480" y="5532119"/>
-            <a:ext cx="11384280" cy="749808"/>
-          </a:xfrm>
-          <a:prstGeom prst="roundRect">
-            <a:avLst/>
-          </a:prstGeom>
-          <a:solidFill>
-            <a:srgbClr val="E8F0DB"/>
-          </a:solidFill>
-          <a:ln w="12700">
-            <a:solidFill>
-              <a:srgbClr val="7CB342"/>
-            </a:solidFill>
-          </a:ln>
-          <a:effectLst/>
-        </p:spPr>
-        <p:style>
-          <a:lnRef idx="1">
-            <a:schemeClr val="accent1"/>
-          </a:lnRef>
-          <a:fillRef idx="3">
-            <a:schemeClr val="accent1"/>
-          </a:fillRef>
-          <a:effectRef idx="2">
-            <a:schemeClr val="accent1"/>
-          </a:effectRef>
-          <a:fontRef idx="minor">
-            <a:schemeClr val="lt1"/>
-          </a:fontRef>
-        </p:style>
-        <p:txBody>
-          <a:bodyPr rtlCol="0" anchor="ctr"/>
-          <a:lstStyle/>
-          <a:p>
-            <a:pPr algn="ctr"/>
-          </a:p>
-        </p:txBody>
-      </p:sp>
-      <p:sp>
-        <p:nvSpPr>
-          <p:cNvPr id="31" name="Rounded Rectangle 30"/>
-          <p:cNvSpPr/>
-          <p:nvPr/>
-        </p:nvSpPr>
-        <p:spPr>
-          <a:xfrm>
-            <a:off x="502920" y="5623559"/>
-            <a:ext cx="1920240" cy="566927"/>
-          </a:xfrm>
-          <a:prstGeom prst="roundRect">
-            <a:avLst/>
-          </a:prstGeom>
-          <a:solidFill>
-            <a:srgbClr val="2D7A3D"/>
-          </a:solidFill>
-          <a:ln>
-            <a:noFill/>
-          </a:ln>
-          <a:effectLst/>
-        </p:spPr>
-        <p:style>
-          <a:lnRef idx="1">
-            <a:schemeClr val="accent1"/>
-          </a:lnRef>
-          <a:fillRef idx="3">
-            <a:schemeClr val="accent1"/>
-          </a:fillRef>
-          <a:effectRef idx="2">
-            <a:schemeClr val="accent1"/>
-          </a:effectRef>
-          <a:fontRef idx="minor">
-            <a:schemeClr val="lt1"/>
-          </a:fontRef>
-        </p:style>
-        <p:txBody>
-          <a:bodyPr rtlCol="0" anchor="ctr"/>
-          <a:lstStyle/>
-          <a:p>
-            <a:pPr algn="ctr"/>
-          </a:p>
-        </p:txBody>
-      </p:sp>
-      <p:sp>
-        <p:nvSpPr>
-          <p:cNvPr id="32" name="TextBox 31"/>
-          <p:cNvSpPr txBox="1"/>
-          <p:nvPr/>
-        </p:nvSpPr>
-        <p:spPr>
-          <a:xfrm>
-            <a:off x="502920" y="5733287"/>
-            <a:ext cx="1920240" cy="457200"/>
-          </a:xfrm>
-          <a:prstGeom prst="rect">
-            <a:avLst/>
-          </a:prstGeom>
-          <a:noFill/>
-        </p:spPr>
-        <p:txBody>
-          <a:bodyPr wrap="square" anchor="t" lIns="0" rIns="0" tIns="0" bIns="0">
-            <a:spAutoFit/>
-          </a:bodyPr>
-          <a:lstStyle/>
-          <a:p>
-            <a:pPr algn="ctr">
-              <a:lnSpc>
-                <a:spcPct val="100000"/>
-              </a:lnSpc>
-              <a:spcBef>
-                <a:spcPts val="0"/>
-              </a:spcBef>
-              <a:spcAft>
-                <a:spcPts val="600"/>
-              </a:spcAft>
-            </a:pPr>
-            <a:r>
-              <a:rPr sz="1800" b="1" i="0">
-                <a:solidFill>
-                  <a:srgbClr val="FFFFFF"/>
-                </a:solidFill>
-                <a:latin typeface="Open Sans"/>
-              </a:rPr>
-              <a:t>A07 / A09</a:t>
-            </a:r>
-          </a:p>
-        </p:txBody>
-      </p:sp>
-      <p:sp>
-        <p:nvSpPr>
-          <p:cNvPr id="33" name="TextBox 32"/>
-          <p:cNvSpPr txBox="1"/>
-          <p:nvPr/>
-        </p:nvSpPr>
-        <p:spPr>
-          <a:xfrm>
-            <a:off x="2697480" y="5733287"/>
-            <a:ext cx="3657600" cy="457200"/>
-          </a:xfrm>
-          <a:prstGeom prst="rect">
-            <a:avLst/>
-          </a:prstGeom>
-          <a:noFill/>
-        </p:spPr>
-        <p:txBody>
-          <a:bodyPr wrap="square" anchor="t" lIns="0" rIns="0" tIns="0" bIns="0">
-            <a:spAutoFit/>
-          </a:bodyPr>
-          <a:lstStyle/>
-          <a:p>
-            <a:pPr algn="l">
-              <a:lnSpc>
-                <a:spcPct val="100000"/>
-              </a:lnSpc>
-              <a:spcBef>
-                <a:spcPts val="0"/>
-              </a:spcBef>
-              <a:spcAft>
-                <a:spcPts val="600"/>
-              </a:spcAft>
-            </a:pPr>
-            <a:r>
-              <a:rPr sz="1500" b="1" i="0">
-                <a:solidFill>
-                  <a:srgbClr val="2D7A3D"/>
-                </a:solidFill>
-                <a:latin typeface="Open Sans"/>
-              </a:rPr>
-              <a:t>Auth Failures / Logging</a:t>
-            </a:r>
-          </a:p>
-        </p:txBody>
-      </p:sp>
-      <p:sp>
-        <p:nvSpPr>
-          <p:cNvPr id="34" name="TextBox 33"/>
-          <p:cNvSpPr txBox="1"/>
-          <p:nvPr/>
-        </p:nvSpPr>
-        <p:spPr>
-          <a:xfrm>
-            <a:off x="6492240" y="5751575"/>
-            <a:ext cx="5120640" cy="457200"/>
-          </a:xfrm>
-          <a:prstGeom prst="rect">
-            <a:avLst/>
-          </a:prstGeom>
-          <a:noFill/>
-        </p:spPr>
-        <p:txBody>
-          <a:bodyPr wrap="square" anchor="t" lIns="0" rIns="0" tIns="0" bIns="0">
-            <a:spAutoFit/>
-          </a:bodyPr>
-          <a:lstStyle/>
-          <a:p>
-            <a:pPr algn="l">
-              <a:lnSpc>
-                <a:spcPct val="100000"/>
-              </a:lnSpc>
-              <a:spcBef>
-                <a:spcPts val="0"/>
-              </a:spcBef>
-              <a:spcAft>
-                <a:spcPts val="600"/>
-              </a:spcAft>
-            </a:pPr>
-            <a:r>
-              <a:rPr sz="1300" b="0" i="0">
-                <a:solidFill>
-                  <a:srgbClr val="212121"/>
-                </a:solidFill>
-                <a:latin typeface="Open Sans"/>
-              </a:rPr>
-              <a:t>sessão, rate limit / auditoria</a:t>
-            </a:r>
-          </a:p>
-        </p:txBody>
-      </p:sp>
-      <p:sp>
-        <p:nvSpPr>
-          <p:cNvPr id="35" name="TextBox 34"/>
+              <a:t>SQLi, XSS, comando (V-01/10)</a:t>
+            </a:r>
+          </a:p>
+        </p:txBody>
+      </p:sp>
+      <p:sp>
+        <p:nvSpPr>
+          <p:cNvPr id="30" name="TextBox 29"/>
           <p:cNvSpPr txBox="1"/>
           <p:nvPr/>
         </p:nvSpPr>
@@ -6329,13 +6626,13 @@
         <p:spPr>
           <a:xfrm>
             <a:off x="0" y="0"/>
-            <a:ext cx="12191695" cy="6858000"/>
+            <a:ext cx="12191695" cy="1234440"/>
           </a:xfrm>
           <a:prstGeom prst="rect">
             <a:avLst/>
           </a:prstGeom>
           <a:solidFill>
-            <a:srgbClr val="1F5232"/>
+            <a:srgbClr val="2D7A3D"/>
           </a:solidFill>
           <a:ln>
             <a:noFill/>
@@ -6372,8 +6669,188 @@
         </p:nvSpPr>
         <p:spPr>
           <a:xfrm>
-            <a:off x="457200" y="2194560"/>
-            <a:ext cx="11247120" cy="548640"/>
+            <a:off x="457200" y="164592"/>
+            <a:ext cx="11247120" cy="640080"/>
+          </a:xfrm>
+          <a:prstGeom prst="rect">
+            <a:avLst/>
+          </a:prstGeom>
+          <a:noFill/>
+        </p:spPr>
+        <p:txBody>
+          <a:bodyPr wrap="square" anchor="t" lIns="0" rIns="0" tIns="0" bIns="0">
+            <a:spAutoFit/>
+          </a:bodyPr>
+          <a:lstStyle/>
+          <a:p>
+            <a:pPr algn="l">
+              <a:lnSpc>
+                <a:spcPct val="100000"/>
+              </a:lnSpc>
+              <a:spcBef>
+                <a:spcPts val="0"/>
+              </a:spcBef>
+              <a:spcAft>
+                <a:spcPts val="600"/>
+              </a:spcAft>
+            </a:pPr>
+            <a:r>
+              <a:rPr sz="3200" b="1" i="0">
+                <a:solidFill>
+                  <a:srgbClr val="FFFFFF"/>
+                </a:solidFill>
+                <a:latin typeface="Open Sans"/>
+              </a:rPr>
+              <a:t>OWASP Top 10:2025 — 2/2</a:t>
+            </a:r>
+          </a:p>
+        </p:txBody>
+      </p:sp>
+      <p:sp>
+        <p:nvSpPr>
+          <p:cNvPr id="4" name="TextBox 3"/>
+          <p:cNvSpPr txBox="1"/>
+          <p:nvPr/>
+        </p:nvSpPr>
+        <p:spPr>
+          <a:xfrm>
+            <a:off x="457200" y="777240"/>
+            <a:ext cx="11247120" cy="365760"/>
+          </a:xfrm>
+          <a:prstGeom prst="rect">
+            <a:avLst/>
+          </a:prstGeom>
+          <a:noFill/>
+        </p:spPr>
+        <p:txBody>
+          <a:bodyPr wrap="square" anchor="t" lIns="0" rIns="0" tIns="0" bIns="0">
+            <a:spAutoFit/>
+          </a:bodyPr>
+          <a:lstStyle/>
+          <a:p>
+            <a:pPr algn="l">
+              <a:lnSpc>
+                <a:spcPct val="100000"/>
+              </a:lnSpc>
+              <a:spcBef>
+                <a:spcPts val="0"/>
+              </a:spcBef>
+              <a:spcAft>
+                <a:spcPts val="600"/>
+              </a:spcAft>
+            </a:pPr>
+            <a:r>
+              <a:rPr sz="1600" b="0" i="1">
+                <a:solidFill>
+                  <a:srgbClr val="E0E8DB"/>
+                </a:solidFill>
+                <a:latin typeface="Open Sans"/>
+              </a:rPr>
+              <a:t>As 5 seguintes (e o que cai no VidaPlus)</a:t>
+            </a:r>
+          </a:p>
+        </p:txBody>
+      </p:sp>
+      <p:sp>
+        <p:nvSpPr>
+          <p:cNvPr id="5" name="Rounded Rectangle 4"/>
+          <p:cNvSpPr/>
+          <p:nvPr/>
+        </p:nvSpPr>
+        <p:spPr>
+          <a:xfrm>
+            <a:off x="411480" y="1508760"/>
+            <a:ext cx="11384280" cy="749808"/>
+          </a:xfrm>
+          <a:prstGeom prst="roundRect">
+            <a:avLst/>
+          </a:prstGeom>
+          <a:solidFill>
+            <a:srgbClr val="E8F0DB"/>
+          </a:solidFill>
+          <a:ln w="12700">
+            <a:solidFill>
+              <a:srgbClr val="7CB342"/>
+            </a:solidFill>
+          </a:ln>
+          <a:effectLst/>
+        </p:spPr>
+        <p:style>
+          <a:lnRef idx="1">
+            <a:schemeClr val="accent1"/>
+          </a:lnRef>
+          <a:fillRef idx="3">
+            <a:schemeClr val="accent1"/>
+          </a:fillRef>
+          <a:effectRef idx="2">
+            <a:schemeClr val="accent1"/>
+          </a:effectRef>
+          <a:fontRef idx="minor">
+            <a:schemeClr val="lt1"/>
+          </a:fontRef>
+        </p:style>
+        <p:txBody>
+          <a:bodyPr rtlCol="0" anchor="ctr"/>
+          <a:lstStyle/>
+          <a:p>
+            <a:pPr algn="ctr"/>
+          </a:p>
+        </p:txBody>
+      </p:sp>
+      <p:sp>
+        <p:nvSpPr>
+          <p:cNvPr id="6" name="Rounded Rectangle 5"/>
+          <p:cNvSpPr/>
+          <p:nvPr/>
+        </p:nvSpPr>
+        <p:spPr>
+          <a:xfrm>
+            <a:off x="502920" y="1600200"/>
+            <a:ext cx="1920240" cy="566927"/>
+          </a:xfrm>
+          <a:prstGeom prst="roundRect">
+            <a:avLst/>
+          </a:prstGeom>
+          <a:solidFill>
+            <a:srgbClr val="2D7A3D"/>
+          </a:solidFill>
+          <a:ln>
+            <a:noFill/>
+          </a:ln>
+          <a:effectLst/>
+        </p:spPr>
+        <p:style>
+          <a:lnRef idx="1">
+            <a:schemeClr val="accent1"/>
+          </a:lnRef>
+          <a:fillRef idx="3">
+            <a:schemeClr val="accent1"/>
+          </a:fillRef>
+          <a:effectRef idx="2">
+            <a:schemeClr val="accent1"/>
+          </a:effectRef>
+          <a:fontRef idx="minor">
+            <a:schemeClr val="lt1"/>
+          </a:fontRef>
+        </p:style>
+        <p:txBody>
+          <a:bodyPr rtlCol="0" anchor="ctr"/>
+          <a:lstStyle/>
+          <a:p>
+            <a:pPr algn="ctr"/>
+          </a:p>
+        </p:txBody>
+      </p:sp>
+      <p:sp>
+        <p:nvSpPr>
+          <p:cNvPr id="7" name="TextBox 6"/>
+          <p:cNvSpPr txBox="1"/>
+          <p:nvPr/>
+        </p:nvSpPr>
+        <p:spPr>
+          <a:xfrm>
+            <a:off x="502920" y="1709928"/>
+            <a:ext cx="1920240" cy="457200"/>
           </a:xfrm>
           <a:prstGeom prst="rect">
             <a:avLst/>
@@ -6398,27 +6875,207 @@
               </a:spcAft>
             </a:pPr>
             <a:r>
-              <a:rPr sz="2000" b="1" i="0">
-                <a:solidFill>
-                  <a:srgbClr val="7CB342"/>
-                </a:solidFill>
-                <a:latin typeface="Open Sans"/>
-              </a:rPr>
-              <a:t>PARTE 2</a:t>
-            </a:r>
-          </a:p>
-        </p:txBody>
-      </p:sp>
-      <p:sp>
-        <p:nvSpPr>
-          <p:cNvPr id="4" name="TextBox 3"/>
+              <a:rPr sz="1800" b="1" i="0">
+                <a:solidFill>
+                  <a:srgbClr val="FFFFFF"/>
+                </a:solidFill>
+                <a:latin typeface="Open Sans"/>
+              </a:rPr>
+              <a:t>A06</a:t>
+            </a:r>
+          </a:p>
+        </p:txBody>
+      </p:sp>
+      <p:sp>
+        <p:nvSpPr>
+          <p:cNvPr id="8" name="TextBox 7"/>
           <p:cNvSpPr txBox="1"/>
           <p:nvPr/>
         </p:nvSpPr>
         <p:spPr>
           <a:xfrm>
-            <a:off x="457200" y="2834640"/>
-            <a:ext cx="11247120" cy="1280160"/>
+            <a:off x="2697480" y="1709928"/>
+            <a:ext cx="3657600" cy="457200"/>
+          </a:xfrm>
+          <a:prstGeom prst="rect">
+            <a:avLst/>
+          </a:prstGeom>
+          <a:noFill/>
+        </p:spPr>
+        <p:txBody>
+          <a:bodyPr wrap="square" anchor="t" lIns="0" rIns="0" tIns="0" bIns="0">
+            <a:spAutoFit/>
+          </a:bodyPr>
+          <a:lstStyle/>
+          <a:p>
+            <a:pPr algn="l">
+              <a:lnSpc>
+                <a:spcPct val="100000"/>
+              </a:lnSpc>
+              <a:spcBef>
+                <a:spcPts val="0"/>
+              </a:spcBef>
+              <a:spcAft>
+                <a:spcPts val="600"/>
+              </a:spcAft>
+            </a:pPr>
+            <a:r>
+              <a:rPr sz="1500" b="1" i="0">
+                <a:solidFill>
+                  <a:srgbClr val="2D7A3D"/>
+                </a:solidFill>
+                <a:latin typeface="Open Sans"/>
+              </a:rPr>
+              <a:t>Insecure Design</a:t>
+            </a:r>
+          </a:p>
+        </p:txBody>
+      </p:sp>
+      <p:sp>
+        <p:nvSpPr>
+          <p:cNvPr id="9" name="TextBox 8"/>
+          <p:cNvSpPr txBox="1"/>
+          <p:nvPr/>
+        </p:nvSpPr>
+        <p:spPr>
+          <a:xfrm>
+            <a:off x="6492240" y="1728216"/>
+            <a:ext cx="5120640" cy="457200"/>
+          </a:xfrm>
+          <a:prstGeom prst="rect">
+            <a:avLst/>
+          </a:prstGeom>
+          <a:noFill/>
+        </p:spPr>
+        <p:txBody>
+          <a:bodyPr wrap="square" anchor="t" lIns="0" rIns="0" tIns="0" bIns="0">
+            <a:spAutoFit/>
+          </a:bodyPr>
+          <a:lstStyle/>
+          <a:p>
+            <a:pPr algn="l">
+              <a:lnSpc>
+                <a:spcPct val="100000"/>
+              </a:lnSpc>
+              <a:spcBef>
+                <a:spcPts val="0"/>
+              </a:spcBef>
+              <a:spcAft>
+                <a:spcPts val="600"/>
+              </a:spcAft>
+            </a:pPr>
+            <a:r>
+              <a:rPr sz="1300" b="0" i="0">
+                <a:solidFill>
+                  <a:srgbClr val="212121"/>
+                </a:solidFill>
+                <a:latin typeface="Open Sans"/>
+              </a:rPr>
+              <a:t>sem threat modeling; sobrecoleta de dados (V-14)</a:t>
+            </a:r>
+          </a:p>
+        </p:txBody>
+      </p:sp>
+      <p:sp>
+        <p:nvSpPr>
+          <p:cNvPr id="10" name="Rounded Rectangle 9"/>
+          <p:cNvSpPr/>
+          <p:nvPr/>
+        </p:nvSpPr>
+        <p:spPr>
+          <a:xfrm>
+            <a:off x="411480" y="2313432"/>
+            <a:ext cx="11384280" cy="749808"/>
+          </a:xfrm>
+          <a:prstGeom prst="roundRect">
+            <a:avLst/>
+          </a:prstGeom>
+          <a:solidFill>
+            <a:srgbClr val="E8F0DB"/>
+          </a:solidFill>
+          <a:ln w="12700">
+            <a:solidFill>
+              <a:srgbClr val="7CB342"/>
+            </a:solidFill>
+          </a:ln>
+          <a:effectLst/>
+        </p:spPr>
+        <p:style>
+          <a:lnRef idx="1">
+            <a:schemeClr val="accent1"/>
+          </a:lnRef>
+          <a:fillRef idx="3">
+            <a:schemeClr val="accent1"/>
+          </a:fillRef>
+          <a:effectRef idx="2">
+            <a:schemeClr val="accent1"/>
+          </a:effectRef>
+          <a:fontRef idx="minor">
+            <a:schemeClr val="lt1"/>
+          </a:fontRef>
+        </p:style>
+        <p:txBody>
+          <a:bodyPr rtlCol="0" anchor="ctr"/>
+          <a:lstStyle/>
+          <a:p>
+            <a:pPr algn="ctr"/>
+          </a:p>
+        </p:txBody>
+      </p:sp>
+      <p:sp>
+        <p:nvSpPr>
+          <p:cNvPr id="11" name="Rounded Rectangle 10"/>
+          <p:cNvSpPr/>
+          <p:nvPr/>
+        </p:nvSpPr>
+        <p:spPr>
+          <a:xfrm>
+            <a:off x="502920" y="2404872"/>
+            <a:ext cx="1920240" cy="566927"/>
+          </a:xfrm>
+          <a:prstGeom prst="roundRect">
+            <a:avLst/>
+          </a:prstGeom>
+          <a:solidFill>
+            <a:srgbClr val="2D7A3D"/>
+          </a:solidFill>
+          <a:ln>
+            <a:noFill/>
+          </a:ln>
+          <a:effectLst/>
+        </p:spPr>
+        <p:style>
+          <a:lnRef idx="1">
+            <a:schemeClr val="accent1"/>
+          </a:lnRef>
+          <a:fillRef idx="3">
+            <a:schemeClr val="accent1"/>
+          </a:fillRef>
+          <a:effectRef idx="2">
+            <a:schemeClr val="accent1"/>
+          </a:effectRef>
+          <a:fontRef idx="minor">
+            <a:schemeClr val="lt1"/>
+          </a:fontRef>
+        </p:style>
+        <p:txBody>
+          <a:bodyPr rtlCol="0" anchor="ctr"/>
+          <a:lstStyle/>
+          <a:p>
+            <a:pPr algn="ctr"/>
+          </a:p>
+        </p:txBody>
+      </p:sp>
+      <p:sp>
+        <p:nvSpPr>
+          <p:cNvPr id="12" name="TextBox 11"/>
+          <p:cNvSpPr txBox="1"/>
+          <p:nvPr/>
+        </p:nvSpPr>
+        <p:spPr>
+          <a:xfrm>
+            <a:off x="502920" y="2514600"/>
+            <a:ext cx="1920240" cy="457200"/>
           </a:xfrm>
           <a:prstGeom prst="rect">
             <a:avLst/>
@@ -6443,27 +7100,207 @@
               </a:spcAft>
             </a:pPr>
             <a:r>
-              <a:rPr sz="6000" b="1" i="0">
+              <a:rPr sz="1800" b="1" i="0">
                 <a:solidFill>
                   <a:srgbClr val="FFFFFF"/>
                 </a:solidFill>
                 <a:latin typeface="Open Sans"/>
               </a:rPr>
-              <a:t>Controles por classe</a:t>
-            </a:r>
-          </a:p>
-        </p:txBody>
-      </p:sp>
-      <p:sp>
-        <p:nvSpPr>
-          <p:cNvPr id="5" name="TextBox 4"/>
+              <a:t>A07</a:t>
+            </a:r>
+          </a:p>
+        </p:txBody>
+      </p:sp>
+      <p:sp>
+        <p:nvSpPr>
+          <p:cNvPr id="13" name="TextBox 12"/>
           <p:cNvSpPr txBox="1"/>
           <p:nvPr/>
         </p:nvSpPr>
         <p:spPr>
           <a:xfrm>
-            <a:off x="457200" y="4297680"/>
-            <a:ext cx="11247120" cy="457200"/>
+            <a:off x="2697480" y="2514600"/>
+            <a:ext cx="3657600" cy="457200"/>
+          </a:xfrm>
+          <a:prstGeom prst="rect">
+            <a:avLst/>
+          </a:prstGeom>
+          <a:noFill/>
+        </p:spPr>
+        <p:txBody>
+          <a:bodyPr wrap="square" anchor="t" lIns="0" rIns="0" tIns="0" bIns="0">
+            <a:spAutoFit/>
+          </a:bodyPr>
+          <a:lstStyle/>
+          <a:p>
+            <a:pPr algn="l">
+              <a:lnSpc>
+                <a:spcPct val="100000"/>
+              </a:lnSpc>
+              <a:spcBef>
+                <a:spcPts val="0"/>
+              </a:spcBef>
+              <a:spcAft>
+                <a:spcPts val="600"/>
+              </a:spcAft>
+            </a:pPr>
+            <a:r>
+              <a:rPr sz="1500" b="1" i="0">
+                <a:solidFill>
+                  <a:srgbClr val="2D7A3D"/>
+                </a:solidFill>
+                <a:latin typeface="Open Sans"/>
+              </a:rPr>
+              <a:t>Authentication Failures</a:t>
+            </a:r>
+          </a:p>
+        </p:txBody>
+      </p:sp>
+      <p:sp>
+        <p:nvSpPr>
+          <p:cNvPr id="14" name="TextBox 13"/>
+          <p:cNvSpPr txBox="1"/>
+          <p:nvPr/>
+        </p:nvSpPr>
+        <p:spPr>
+          <a:xfrm>
+            <a:off x="6492240" y="2532887"/>
+            <a:ext cx="5120640" cy="457200"/>
+          </a:xfrm>
+          <a:prstGeom prst="rect">
+            <a:avLst/>
+          </a:prstGeom>
+          <a:noFill/>
+        </p:spPr>
+        <p:txBody>
+          <a:bodyPr wrap="square" anchor="t" lIns="0" rIns="0" tIns="0" bIns="0">
+            <a:spAutoFit/>
+          </a:bodyPr>
+          <a:lstStyle/>
+          <a:p>
+            <a:pPr algn="l">
+              <a:lnSpc>
+                <a:spcPct val="100000"/>
+              </a:lnSpc>
+              <a:spcBef>
+                <a:spcPts val="0"/>
+              </a:spcBef>
+              <a:spcAft>
+                <a:spcPts val="600"/>
+              </a:spcAft>
+            </a:pPr>
+            <a:r>
+              <a:rPr sz="1300" b="0" i="0">
+                <a:solidFill>
+                  <a:srgbClr val="212121"/>
+                </a:solidFill>
+                <a:latin typeface="Open Sans"/>
+              </a:rPr>
+              <a:t>sessão/JWT, rate limit, reset fraco (V-07/08)</a:t>
+            </a:r>
+          </a:p>
+        </p:txBody>
+      </p:sp>
+      <p:sp>
+        <p:nvSpPr>
+          <p:cNvPr id="15" name="Rounded Rectangle 14"/>
+          <p:cNvSpPr/>
+          <p:nvPr/>
+        </p:nvSpPr>
+        <p:spPr>
+          <a:xfrm>
+            <a:off x="411480" y="3118103"/>
+            <a:ext cx="11384280" cy="749808"/>
+          </a:xfrm>
+          <a:prstGeom prst="roundRect">
+            <a:avLst/>
+          </a:prstGeom>
+          <a:solidFill>
+            <a:srgbClr val="E8F0DB"/>
+          </a:solidFill>
+          <a:ln w="12700">
+            <a:solidFill>
+              <a:srgbClr val="7CB342"/>
+            </a:solidFill>
+          </a:ln>
+          <a:effectLst/>
+        </p:spPr>
+        <p:style>
+          <a:lnRef idx="1">
+            <a:schemeClr val="accent1"/>
+          </a:lnRef>
+          <a:fillRef idx="3">
+            <a:schemeClr val="accent1"/>
+          </a:fillRef>
+          <a:effectRef idx="2">
+            <a:schemeClr val="accent1"/>
+          </a:effectRef>
+          <a:fontRef idx="minor">
+            <a:schemeClr val="lt1"/>
+          </a:fontRef>
+        </p:style>
+        <p:txBody>
+          <a:bodyPr rtlCol="0" anchor="ctr"/>
+          <a:lstStyle/>
+          <a:p>
+            <a:pPr algn="ctr"/>
+          </a:p>
+        </p:txBody>
+      </p:sp>
+      <p:sp>
+        <p:nvSpPr>
+          <p:cNvPr id="16" name="Rounded Rectangle 15"/>
+          <p:cNvSpPr/>
+          <p:nvPr/>
+        </p:nvSpPr>
+        <p:spPr>
+          <a:xfrm>
+            <a:off x="502920" y="3209544"/>
+            <a:ext cx="1920240" cy="566927"/>
+          </a:xfrm>
+          <a:prstGeom prst="roundRect">
+            <a:avLst/>
+          </a:prstGeom>
+          <a:solidFill>
+            <a:srgbClr val="2D7A3D"/>
+          </a:solidFill>
+          <a:ln>
+            <a:noFill/>
+          </a:ln>
+          <a:effectLst/>
+        </p:spPr>
+        <p:style>
+          <a:lnRef idx="1">
+            <a:schemeClr val="accent1"/>
+          </a:lnRef>
+          <a:fillRef idx="3">
+            <a:schemeClr val="accent1"/>
+          </a:fillRef>
+          <a:effectRef idx="2">
+            <a:schemeClr val="accent1"/>
+          </a:effectRef>
+          <a:fontRef idx="minor">
+            <a:schemeClr val="lt1"/>
+          </a:fontRef>
+        </p:style>
+        <p:txBody>
+          <a:bodyPr rtlCol="0" anchor="ctr"/>
+          <a:lstStyle/>
+          <a:p>
+            <a:pPr algn="ctr"/>
+          </a:p>
+        </p:txBody>
+      </p:sp>
+      <p:sp>
+        <p:nvSpPr>
+          <p:cNvPr id="17" name="TextBox 16"/>
+          <p:cNvSpPr txBox="1"/>
+          <p:nvPr/>
+        </p:nvSpPr>
+        <p:spPr>
+          <a:xfrm>
+            <a:off x="502920" y="3319272"/>
+            <a:ext cx="1920240" cy="457200"/>
           </a:xfrm>
           <a:prstGeom prst="rect">
             <a:avLst/>
@@ -6488,33 +7325,169 @@
               </a:spcAft>
             </a:pPr>
             <a:r>
-              <a:rPr sz="2200" b="0" i="1">
-                <a:solidFill>
-                  <a:srgbClr val="CCD7C0"/>
-                </a:solidFill>
-                <a:latin typeface="Open Sans"/>
-              </a:rPr>
-              <a:t>Como corrigir de verdade</a:t>
-            </a:r>
-          </a:p>
-        </p:txBody>
-      </p:sp>
-      <p:sp>
-        <p:nvSpPr>
-          <p:cNvPr id="6" name="Rectangle 5"/>
+              <a:rPr sz="1800" b="1" i="0">
+                <a:solidFill>
+                  <a:srgbClr val="FFFFFF"/>
+                </a:solidFill>
+                <a:latin typeface="Open Sans"/>
+              </a:rPr>
+              <a:t>A08</a:t>
+            </a:r>
+          </a:p>
+        </p:txBody>
+      </p:sp>
+      <p:sp>
+        <p:nvSpPr>
+          <p:cNvPr id="18" name="TextBox 17"/>
+          <p:cNvSpPr txBox="1"/>
+          <p:nvPr/>
+        </p:nvSpPr>
+        <p:spPr>
+          <a:xfrm>
+            <a:off x="2697480" y="3319272"/>
+            <a:ext cx="3657600" cy="457200"/>
+          </a:xfrm>
+          <a:prstGeom prst="rect">
+            <a:avLst/>
+          </a:prstGeom>
+          <a:noFill/>
+        </p:spPr>
+        <p:txBody>
+          <a:bodyPr wrap="square" anchor="t" lIns="0" rIns="0" tIns="0" bIns="0">
+            <a:spAutoFit/>
+          </a:bodyPr>
+          <a:lstStyle/>
+          <a:p>
+            <a:pPr algn="l">
+              <a:lnSpc>
+                <a:spcPct val="100000"/>
+              </a:lnSpc>
+              <a:spcBef>
+                <a:spcPts val="0"/>
+              </a:spcBef>
+              <a:spcAft>
+                <a:spcPts val="600"/>
+              </a:spcAft>
+            </a:pPr>
+            <a:r>
+              <a:rPr sz="1500" b="1" i="0">
+                <a:solidFill>
+                  <a:srgbClr val="2D7A3D"/>
+                </a:solidFill>
+                <a:latin typeface="Open Sans"/>
+              </a:rPr>
+              <a:t>Software/Data Integrity Failures</a:t>
+            </a:r>
+          </a:p>
+        </p:txBody>
+      </p:sp>
+      <p:sp>
+        <p:nvSpPr>
+          <p:cNvPr id="19" name="TextBox 18"/>
+          <p:cNvSpPr txBox="1"/>
+          <p:nvPr/>
+        </p:nvSpPr>
+        <p:spPr>
+          <a:xfrm>
+            <a:off x="6492240" y="3337559"/>
+            <a:ext cx="5120640" cy="457200"/>
+          </a:xfrm>
+          <a:prstGeom prst="rect">
+            <a:avLst/>
+          </a:prstGeom>
+          <a:noFill/>
+        </p:spPr>
+        <p:txBody>
+          <a:bodyPr wrap="square" anchor="t" lIns="0" rIns="0" tIns="0" bIns="0">
+            <a:spAutoFit/>
+          </a:bodyPr>
+          <a:lstStyle/>
+          <a:p>
+            <a:pPr algn="l">
+              <a:lnSpc>
+                <a:spcPct val="100000"/>
+              </a:lnSpc>
+              <a:spcBef>
+                <a:spcPts val="0"/>
+              </a:spcBef>
+              <a:spcAft>
+                <a:spcPts val="600"/>
+              </a:spcAft>
+            </a:pPr>
+            <a:r>
+              <a:rPr sz="1300" b="0" i="0">
+                <a:solidFill>
+                  <a:srgbClr val="212121"/>
+                </a:solidFill>
+                <a:latin typeface="Open Sans"/>
+              </a:rPr>
+              <a:t>laudo sem hash/assinatura; update inseguro (F-07)</a:t>
+            </a:r>
+          </a:p>
+        </p:txBody>
+      </p:sp>
+      <p:sp>
+        <p:nvSpPr>
+          <p:cNvPr id="20" name="Rounded Rectangle 19"/>
           <p:cNvSpPr/>
           <p:nvPr/>
         </p:nvSpPr>
         <p:spPr>
           <a:xfrm>
-            <a:off x="5184648" y="4983480"/>
-            <a:ext cx="1828800" cy="25400"/>
-          </a:xfrm>
-          <a:prstGeom prst="rect">
+            <a:off x="411480" y="3922775"/>
+            <a:ext cx="11384280" cy="749808"/>
+          </a:xfrm>
+          <a:prstGeom prst="roundRect">
             <a:avLst/>
           </a:prstGeom>
           <a:solidFill>
-            <a:srgbClr val="7CB342"/>
+            <a:srgbClr val="E8F0DB"/>
+          </a:solidFill>
+          <a:ln w="12700">
+            <a:solidFill>
+              <a:srgbClr val="7CB342"/>
+            </a:solidFill>
+          </a:ln>
+          <a:effectLst/>
+        </p:spPr>
+        <p:style>
+          <a:lnRef idx="1">
+            <a:schemeClr val="accent1"/>
+          </a:lnRef>
+          <a:fillRef idx="3">
+            <a:schemeClr val="accent1"/>
+          </a:fillRef>
+          <a:effectRef idx="2">
+            <a:schemeClr val="accent1"/>
+          </a:effectRef>
+          <a:fontRef idx="minor">
+            <a:schemeClr val="lt1"/>
+          </a:fontRef>
+        </p:style>
+        <p:txBody>
+          <a:bodyPr rtlCol="0" anchor="ctr"/>
+          <a:lstStyle/>
+          <a:p>
+            <a:pPr algn="ctr"/>
+          </a:p>
+        </p:txBody>
+      </p:sp>
+      <p:sp>
+        <p:nvSpPr>
+          <p:cNvPr id="21" name="Rounded Rectangle 20"/>
+          <p:cNvSpPr/>
+          <p:nvPr/>
+        </p:nvSpPr>
+        <p:spPr>
+          <a:xfrm>
+            <a:off x="502920" y="4014215"/>
+            <a:ext cx="1920240" cy="566927"/>
+          </a:xfrm>
+          <a:prstGeom prst="roundRect">
+            <a:avLst/>
+          </a:prstGeom>
+          <a:solidFill>
+            <a:srgbClr val="2D7A3D"/>
           </a:solidFill>
           <a:ln>
             <a:noFill/>
@@ -6540,6 +7513,411 @@
           <a:lstStyle/>
           <a:p>
             <a:pPr algn="ctr"/>
+          </a:p>
+        </p:txBody>
+      </p:sp>
+      <p:sp>
+        <p:nvSpPr>
+          <p:cNvPr id="22" name="TextBox 21"/>
+          <p:cNvSpPr txBox="1"/>
+          <p:nvPr/>
+        </p:nvSpPr>
+        <p:spPr>
+          <a:xfrm>
+            <a:off x="502920" y="4123943"/>
+            <a:ext cx="1920240" cy="457200"/>
+          </a:xfrm>
+          <a:prstGeom prst="rect">
+            <a:avLst/>
+          </a:prstGeom>
+          <a:noFill/>
+        </p:spPr>
+        <p:txBody>
+          <a:bodyPr wrap="square" anchor="t" lIns="0" rIns="0" tIns="0" bIns="0">
+            <a:spAutoFit/>
+          </a:bodyPr>
+          <a:lstStyle/>
+          <a:p>
+            <a:pPr algn="ctr">
+              <a:lnSpc>
+                <a:spcPct val="100000"/>
+              </a:lnSpc>
+              <a:spcBef>
+                <a:spcPts val="0"/>
+              </a:spcBef>
+              <a:spcAft>
+                <a:spcPts val="600"/>
+              </a:spcAft>
+            </a:pPr>
+            <a:r>
+              <a:rPr sz="1800" b="1" i="0">
+                <a:solidFill>
+                  <a:srgbClr val="FFFFFF"/>
+                </a:solidFill>
+                <a:latin typeface="Open Sans"/>
+              </a:rPr>
+              <a:t>A09</a:t>
+            </a:r>
+          </a:p>
+        </p:txBody>
+      </p:sp>
+      <p:sp>
+        <p:nvSpPr>
+          <p:cNvPr id="23" name="TextBox 22"/>
+          <p:cNvSpPr txBox="1"/>
+          <p:nvPr/>
+        </p:nvSpPr>
+        <p:spPr>
+          <a:xfrm>
+            <a:off x="2697480" y="4123943"/>
+            <a:ext cx="3657600" cy="457200"/>
+          </a:xfrm>
+          <a:prstGeom prst="rect">
+            <a:avLst/>
+          </a:prstGeom>
+          <a:noFill/>
+        </p:spPr>
+        <p:txBody>
+          <a:bodyPr wrap="square" anchor="t" lIns="0" rIns="0" tIns="0" bIns="0">
+            <a:spAutoFit/>
+          </a:bodyPr>
+          <a:lstStyle/>
+          <a:p>
+            <a:pPr algn="l">
+              <a:lnSpc>
+                <a:spcPct val="100000"/>
+              </a:lnSpc>
+              <a:spcBef>
+                <a:spcPts val="0"/>
+              </a:spcBef>
+              <a:spcAft>
+                <a:spcPts val="600"/>
+              </a:spcAft>
+            </a:pPr>
+            <a:r>
+              <a:rPr sz="1500" b="1" i="0">
+                <a:solidFill>
+                  <a:srgbClr val="2D7A3D"/>
+                </a:solidFill>
+                <a:latin typeface="Open Sans"/>
+              </a:rPr>
+              <a:t>Logging &amp; Alerting Failures</a:t>
+            </a:r>
+          </a:p>
+        </p:txBody>
+      </p:sp>
+      <p:sp>
+        <p:nvSpPr>
+          <p:cNvPr id="24" name="TextBox 23"/>
+          <p:cNvSpPr txBox="1"/>
+          <p:nvPr/>
+        </p:nvSpPr>
+        <p:spPr>
+          <a:xfrm>
+            <a:off x="6492240" y="4142231"/>
+            <a:ext cx="5120640" cy="457200"/>
+          </a:xfrm>
+          <a:prstGeom prst="rect">
+            <a:avLst/>
+          </a:prstGeom>
+          <a:noFill/>
+        </p:spPr>
+        <p:txBody>
+          <a:bodyPr wrap="square" anchor="t" lIns="0" rIns="0" tIns="0" bIns="0">
+            <a:spAutoFit/>
+          </a:bodyPr>
+          <a:lstStyle/>
+          <a:p>
+            <a:pPr algn="l">
+              <a:lnSpc>
+                <a:spcPct val="100000"/>
+              </a:lnSpc>
+              <a:spcBef>
+                <a:spcPts val="0"/>
+              </a:spcBef>
+              <a:spcAft>
+                <a:spcPts val="600"/>
+              </a:spcAft>
+            </a:pPr>
+            <a:r>
+              <a:rPr sz="1300" b="0" i="0">
+                <a:solidFill>
+                  <a:srgbClr val="212121"/>
+                </a:solidFill>
+                <a:latin typeface="Open Sans"/>
+              </a:rPr>
+              <a:t>sem auditoria; PII em log (V-06/17)</a:t>
+            </a:r>
+          </a:p>
+        </p:txBody>
+      </p:sp>
+      <p:sp>
+        <p:nvSpPr>
+          <p:cNvPr id="25" name="Rounded Rectangle 24"/>
+          <p:cNvSpPr/>
+          <p:nvPr/>
+        </p:nvSpPr>
+        <p:spPr>
+          <a:xfrm>
+            <a:off x="411480" y="4727448"/>
+            <a:ext cx="11384280" cy="749808"/>
+          </a:xfrm>
+          <a:prstGeom prst="roundRect">
+            <a:avLst/>
+          </a:prstGeom>
+          <a:solidFill>
+            <a:srgbClr val="E8F0DB"/>
+          </a:solidFill>
+          <a:ln w="12700">
+            <a:solidFill>
+              <a:srgbClr val="7CB342"/>
+            </a:solidFill>
+          </a:ln>
+          <a:effectLst/>
+        </p:spPr>
+        <p:style>
+          <a:lnRef idx="1">
+            <a:schemeClr val="accent1"/>
+          </a:lnRef>
+          <a:fillRef idx="3">
+            <a:schemeClr val="accent1"/>
+          </a:fillRef>
+          <a:effectRef idx="2">
+            <a:schemeClr val="accent1"/>
+          </a:effectRef>
+          <a:fontRef idx="minor">
+            <a:schemeClr val="lt1"/>
+          </a:fontRef>
+        </p:style>
+        <p:txBody>
+          <a:bodyPr rtlCol="0" anchor="ctr"/>
+          <a:lstStyle/>
+          <a:p>
+            <a:pPr algn="ctr"/>
+          </a:p>
+        </p:txBody>
+      </p:sp>
+      <p:sp>
+        <p:nvSpPr>
+          <p:cNvPr id="26" name="Rounded Rectangle 25"/>
+          <p:cNvSpPr/>
+          <p:nvPr/>
+        </p:nvSpPr>
+        <p:spPr>
+          <a:xfrm>
+            <a:off x="502920" y="4818888"/>
+            <a:ext cx="1920240" cy="566927"/>
+          </a:xfrm>
+          <a:prstGeom prst="roundRect">
+            <a:avLst/>
+          </a:prstGeom>
+          <a:solidFill>
+            <a:srgbClr val="2D7A3D"/>
+          </a:solidFill>
+          <a:ln>
+            <a:noFill/>
+          </a:ln>
+          <a:effectLst/>
+        </p:spPr>
+        <p:style>
+          <a:lnRef idx="1">
+            <a:schemeClr val="accent1"/>
+          </a:lnRef>
+          <a:fillRef idx="3">
+            <a:schemeClr val="accent1"/>
+          </a:fillRef>
+          <a:effectRef idx="2">
+            <a:schemeClr val="accent1"/>
+          </a:effectRef>
+          <a:fontRef idx="minor">
+            <a:schemeClr val="lt1"/>
+          </a:fontRef>
+        </p:style>
+        <p:txBody>
+          <a:bodyPr rtlCol="0" anchor="ctr"/>
+          <a:lstStyle/>
+          <a:p>
+            <a:pPr algn="ctr"/>
+          </a:p>
+        </p:txBody>
+      </p:sp>
+      <p:sp>
+        <p:nvSpPr>
+          <p:cNvPr id="27" name="TextBox 26"/>
+          <p:cNvSpPr txBox="1"/>
+          <p:nvPr/>
+        </p:nvSpPr>
+        <p:spPr>
+          <a:xfrm>
+            <a:off x="502920" y="4928616"/>
+            <a:ext cx="1920240" cy="457200"/>
+          </a:xfrm>
+          <a:prstGeom prst="rect">
+            <a:avLst/>
+          </a:prstGeom>
+          <a:noFill/>
+        </p:spPr>
+        <p:txBody>
+          <a:bodyPr wrap="square" anchor="t" lIns="0" rIns="0" tIns="0" bIns="0">
+            <a:spAutoFit/>
+          </a:bodyPr>
+          <a:lstStyle/>
+          <a:p>
+            <a:pPr algn="ctr">
+              <a:lnSpc>
+                <a:spcPct val="100000"/>
+              </a:lnSpc>
+              <a:spcBef>
+                <a:spcPts val="0"/>
+              </a:spcBef>
+              <a:spcAft>
+                <a:spcPts val="600"/>
+              </a:spcAft>
+            </a:pPr>
+            <a:r>
+              <a:rPr sz="1800" b="1" i="0">
+                <a:solidFill>
+                  <a:srgbClr val="FFFFFF"/>
+                </a:solidFill>
+                <a:latin typeface="Open Sans"/>
+              </a:rPr>
+              <a:t>A10</a:t>
+            </a:r>
+          </a:p>
+        </p:txBody>
+      </p:sp>
+      <p:sp>
+        <p:nvSpPr>
+          <p:cNvPr id="28" name="TextBox 27"/>
+          <p:cNvSpPr txBox="1"/>
+          <p:nvPr/>
+        </p:nvSpPr>
+        <p:spPr>
+          <a:xfrm>
+            <a:off x="2697480" y="4928616"/>
+            <a:ext cx="3657600" cy="457200"/>
+          </a:xfrm>
+          <a:prstGeom prst="rect">
+            <a:avLst/>
+          </a:prstGeom>
+          <a:noFill/>
+        </p:spPr>
+        <p:txBody>
+          <a:bodyPr wrap="square" anchor="t" lIns="0" rIns="0" tIns="0" bIns="0">
+            <a:spAutoFit/>
+          </a:bodyPr>
+          <a:lstStyle/>
+          <a:p>
+            <a:pPr algn="l">
+              <a:lnSpc>
+                <a:spcPct val="100000"/>
+              </a:lnSpc>
+              <a:spcBef>
+                <a:spcPts val="0"/>
+              </a:spcBef>
+              <a:spcAft>
+                <a:spcPts val="600"/>
+              </a:spcAft>
+            </a:pPr>
+            <a:r>
+              <a:rPr sz="1500" b="1" i="0">
+                <a:solidFill>
+                  <a:srgbClr val="2D7A3D"/>
+                </a:solidFill>
+                <a:latin typeface="Open Sans"/>
+              </a:rPr>
+              <a:t>Mishandling of Exceptional Conditions (NOVA)</a:t>
+            </a:r>
+          </a:p>
+        </p:txBody>
+      </p:sp>
+      <p:sp>
+        <p:nvSpPr>
+          <p:cNvPr id="29" name="TextBox 28"/>
+          <p:cNvSpPr txBox="1"/>
+          <p:nvPr/>
+        </p:nvSpPr>
+        <p:spPr>
+          <a:xfrm>
+            <a:off x="6492240" y="4946904"/>
+            <a:ext cx="5120640" cy="457200"/>
+          </a:xfrm>
+          <a:prstGeom prst="rect">
+            <a:avLst/>
+          </a:prstGeom>
+          <a:noFill/>
+        </p:spPr>
+        <p:txBody>
+          <a:bodyPr wrap="square" anchor="t" lIns="0" rIns="0" tIns="0" bIns="0">
+            <a:spAutoFit/>
+          </a:bodyPr>
+          <a:lstStyle/>
+          <a:p>
+            <a:pPr algn="l">
+              <a:lnSpc>
+                <a:spcPct val="100000"/>
+              </a:lnSpc>
+              <a:spcBef>
+                <a:spcPts val="0"/>
+              </a:spcBef>
+              <a:spcAft>
+                <a:spcPts val="600"/>
+              </a:spcAft>
+            </a:pPr>
+            <a:r>
+              <a:rPr sz="1300" b="0" i="0">
+                <a:solidFill>
+                  <a:srgbClr val="212121"/>
+                </a:solidFill>
+                <a:latin typeface="Open Sans"/>
+              </a:rPr>
+              <a:t>stack trace/erro verboso ao cliente (V-11)</a:t>
+            </a:r>
+          </a:p>
+        </p:txBody>
+      </p:sp>
+      <p:sp>
+        <p:nvSpPr>
+          <p:cNvPr id="30" name="TextBox 29"/>
+          <p:cNvSpPr txBox="1"/>
+          <p:nvPr/>
+        </p:nvSpPr>
+        <p:spPr>
+          <a:xfrm>
+            <a:off x="10972800" y="6446520"/>
+            <a:ext cx="914400" cy="320040"/>
+          </a:xfrm>
+          <a:prstGeom prst="rect">
+            <a:avLst/>
+          </a:prstGeom>
+          <a:noFill/>
+        </p:spPr>
+        <p:txBody>
+          <a:bodyPr wrap="square" anchor="t" lIns="0" rIns="0" tIns="0" bIns="0">
+            <a:spAutoFit/>
+          </a:bodyPr>
+          <a:lstStyle/>
+          <a:p>
+            <a:pPr algn="r">
+              <a:lnSpc>
+                <a:spcPct val="100000"/>
+              </a:lnSpc>
+              <a:spcBef>
+                <a:spcPts val="0"/>
+              </a:spcBef>
+              <a:spcAft>
+                <a:spcPts val="600"/>
+              </a:spcAft>
+            </a:pPr>
+            <a:r>
+              <a:rPr sz="1100" b="0" i="0">
+                <a:solidFill>
+                  <a:srgbClr val="616161"/>
+                </a:solidFill>
+                <a:latin typeface="Open Sans"/>
+              </a:rPr>
+              <a:t>4</a:t>
+            </a:r>
           </a:p>
         </p:txBody>
       </p:sp>
@@ -6570,13 +7948,13 @@
         <p:spPr>
           <a:xfrm>
             <a:off x="0" y="0"/>
-            <a:ext cx="12191695" cy="1234440"/>
+            <a:ext cx="12191695" cy="6858000"/>
           </a:xfrm>
           <a:prstGeom prst="rect">
             <a:avLst/>
           </a:prstGeom>
           <a:solidFill>
-            <a:srgbClr val="2D7A3D"/>
+            <a:srgbClr val="1F5232"/>
           </a:solidFill>
           <a:ln>
             <a:noFill/>
@@ -6613,8 +7991,8 @@
         </p:nvSpPr>
         <p:spPr>
           <a:xfrm>
-            <a:off x="457200" y="164592"/>
-            <a:ext cx="11247120" cy="640080"/>
+            <a:off x="457200" y="2194560"/>
+            <a:ext cx="11247120" cy="548640"/>
           </a:xfrm>
           <a:prstGeom prst="rect">
             <a:avLst/>
@@ -6627,7 +8005,7 @@
           </a:bodyPr>
           <a:lstStyle/>
           <a:p>
-            <a:pPr algn="l">
+            <a:pPr algn="ctr">
               <a:lnSpc>
                 <a:spcPct val="100000"/>
               </a:lnSpc>
@@ -6639,13 +8017,13 @@
               </a:spcAft>
             </a:pPr>
             <a:r>
-              <a:rPr sz="3200" b="1" i="0">
-                <a:solidFill>
-                  <a:srgbClr val="FFFFFF"/>
-                </a:solidFill>
-                <a:latin typeface="Open Sans"/>
-              </a:rPr>
-              <a:t>Correções essenciais</a:t>
+              <a:rPr sz="2000" b="1" i="0">
+                <a:solidFill>
+                  <a:srgbClr val="7CB342"/>
+                </a:solidFill>
+                <a:latin typeface="Open Sans"/>
+              </a:rPr>
+              <a:t>PARTE 2</a:t>
             </a:r>
           </a:p>
         </p:txBody>
@@ -6658,8 +8036,8 @@
         </p:nvSpPr>
         <p:spPr>
           <a:xfrm>
-            <a:off x="457200" y="777240"/>
-            <a:ext cx="11247120" cy="365760"/>
+            <a:off x="457200" y="2834640"/>
+            <a:ext cx="11247120" cy="1280160"/>
           </a:xfrm>
           <a:prstGeom prst="rect">
             <a:avLst/>
@@ -6672,7 +8050,7 @@
           </a:bodyPr>
           <a:lstStyle/>
           <a:p>
-            <a:pPr algn="l">
+            <a:pPr algn="ctr">
               <a:lnSpc>
                 <a:spcPct val="100000"/>
               </a:lnSpc>
@@ -6684,73 +8062,27 @@
               </a:spcAft>
             </a:pPr>
             <a:r>
-              <a:rPr sz="1600" b="0" i="1">
-                <a:solidFill>
-                  <a:srgbClr val="E0E8DB"/>
-                </a:solidFill>
-                <a:latin typeface="Open Sans"/>
-              </a:rPr>
-              <a:t>Do padrão vulnerável ao seguro</a:t>
-            </a:r>
-          </a:p>
-        </p:txBody>
-      </p:sp>
-      <p:sp>
-        <p:nvSpPr>
-          <p:cNvPr id="5" name="Rounded Rectangle 4"/>
-          <p:cNvSpPr/>
-          <p:nvPr/>
-        </p:nvSpPr>
-        <p:spPr>
-          <a:xfrm>
-            <a:off x="411480" y="1463040"/>
-            <a:ext cx="5468112" cy="2423160"/>
-          </a:xfrm>
-          <a:prstGeom prst="roundRect">
-            <a:avLst/>
-          </a:prstGeom>
-          <a:solidFill>
-            <a:srgbClr val="F5F5F5"/>
-          </a:solidFill>
-          <a:ln w="19050">
-            <a:solidFill>
-              <a:srgbClr val="2D7A3D"/>
-            </a:solidFill>
-          </a:ln>
-          <a:effectLst/>
-        </p:spPr>
-        <p:style>
-          <a:lnRef idx="1">
-            <a:schemeClr val="accent1"/>
-          </a:lnRef>
-          <a:fillRef idx="3">
-            <a:schemeClr val="accent1"/>
-          </a:fillRef>
-          <a:effectRef idx="2">
-            <a:schemeClr val="accent1"/>
-          </a:effectRef>
-          <a:fontRef idx="minor">
-            <a:schemeClr val="lt1"/>
-          </a:fontRef>
-        </p:style>
-        <p:txBody>
-          <a:bodyPr rtlCol="0" anchor="ctr"/>
-          <a:lstStyle/>
-          <a:p>
-            <a:pPr algn="ctr"/>
-          </a:p>
-        </p:txBody>
-      </p:sp>
-      <p:sp>
-        <p:nvSpPr>
-          <p:cNvPr id="6" name="TextBox 5"/>
+              <a:rPr sz="6000" b="1" i="0">
+                <a:solidFill>
+                  <a:srgbClr val="FFFFFF"/>
+                </a:solidFill>
+                <a:latin typeface="Open Sans"/>
+              </a:rPr>
+              <a:t>Controles por classe</a:t>
+            </a:r>
+          </a:p>
+        </p:txBody>
+      </p:sp>
+      <p:sp>
+        <p:nvSpPr>
+          <p:cNvPr id="5" name="TextBox 4"/>
           <p:cNvSpPr txBox="1"/>
           <p:nvPr/>
         </p:nvSpPr>
         <p:spPr>
           <a:xfrm>
-            <a:off x="777240" y="1737360"/>
-            <a:ext cx="4754880" cy="548640"/>
+            <a:off x="457200" y="4297680"/>
+            <a:ext cx="11247120" cy="457200"/>
           </a:xfrm>
           <a:prstGeom prst="rect">
             <a:avLst/>
@@ -6763,7 +8095,7 @@
           </a:bodyPr>
           <a:lstStyle/>
           <a:p>
-            <a:pPr algn="l">
+            <a:pPr algn="ctr">
               <a:lnSpc>
                 <a:spcPct val="100000"/>
               </a:lnSpc>
@@ -6775,83 +8107,36 @@
               </a:spcAft>
             </a:pPr>
             <a:r>
-              <a:rPr sz="2200" b="1" i="0">
-                <a:solidFill>
-                  <a:srgbClr val="2D7A3D"/>
-                </a:solidFill>
-                <a:latin typeface="Open Sans"/>
-              </a:rPr>
-              <a:t>Injection</a:t>
-            </a:r>
-          </a:p>
-        </p:txBody>
-      </p:sp>
-      <p:sp>
-        <p:nvSpPr>
-          <p:cNvPr id="7" name="TextBox 6"/>
-          <p:cNvSpPr txBox="1"/>
-          <p:nvPr/>
-        </p:nvSpPr>
-        <p:spPr>
-          <a:xfrm>
-            <a:off x="777240" y="2377440"/>
-            <a:ext cx="4754880" cy="1371600"/>
-          </a:xfrm>
-          <a:prstGeom prst="rect">
-            <a:avLst/>
-          </a:prstGeom>
-          <a:noFill/>
-        </p:spPr>
-        <p:txBody>
-          <a:bodyPr wrap="square" anchor="t" lIns="0" rIns="0" tIns="0" bIns="0">
-            <a:spAutoFit/>
-          </a:bodyPr>
-          <a:lstStyle/>
-          <a:p>
-            <a:pPr algn="l">
-              <a:lnSpc>
-                <a:spcPct val="110000"/>
-              </a:lnSpc>
-              <a:spcBef>
-                <a:spcPts val="0"/>
-              </a:spcBef>
-              <a:spcAft>
-                <a:spcPts val="600"/>
-              </a:spcAft>
-            </a:pPr>
-            <a:r>
-              <a:rPr sz="1500" b="0" i="0">
-                <a:solidFill>
-                  <a:srgbClr val="212121"/>
-                </a:solidFill>
-                <a:latin typeface="Open Sans"/>
-              </a:rPr>
-              <a:t>consultas parametrizadas (prepared statements); allowlist</a:t>
-            </a:r>
-          </a:p>
-        </p:txBody>
-      </p:sp>
-      <p:sp>
-        <p:nvSpPr>
-          <p:cNvPr id="8" name="Rounded Rectangle 7"/>
+              <a:rPr sz="2200" b="0" i="1">
+                <a:solidFill>
+                  <a:srgbClr val="CCD7C0"/>
+                </a:solidFill>
+                <a:latin typeface="Open Sans"/>
+              </a:rPr>
+              <a:t>Como corrigir de verdade</a:t>
+            </a:r>
+          </a:p>
+        </p:txBody>
+      </p:sp>
+      <p:sp>
+        <p:nvSpPr>
+          <p:cNvPr id="6" name="Rectangle 5"/>
           <p:cNvSpPr/>
           <p:nvPr/>
         </p:nvSpPr>
         <p:spPr>
           <a:xfrm>
-            <a:off x="6309360" y="1463040"/>
-            <a:ext cx="5468112" cy="2423160"/>
-          </a:xfrm>
-          <a:prstGeom prst="roundRect">
+            <a:off x="5184648" y="4983480"/>
+            <a:ext cx="1828800" cy="25400"/>
+          </a:xfrm>
+          <a:prstGeom prst="rect">
             <a:avLst/>
           </a:prstGeom>
           <a:solidFill>
-            <a:srgbClr val="F5F5F5"/>
+            <a:srgbClr val="7CB342"/>
           </a:solidFill>
-          <a:ln w="19050">
-            <a:solidFill>
-              <a:srgbClr val="1976D2"/>
-            </a:solidFill>
+          <a:ln>
+            <a:noFill/>
           </a:ln>
           <a:effectLst/>
         </p:spPr>
@@ -6874,413 +8159,6 @@
           <a:lstStyle/>
           <a:p>
             <a:pPr algn="ctr"/>
-          </a:p>
-        </p:txBody>
-      </p:sp>
-      <p:sp>
-        <p:nvSpPr>
-          <p:cNvPr id="9" name="TextBox 8"/>
-          <p:cNvSpPr txBox="1"/>
-          <p:nvPr/>
-        </p:nvSpPr>
-        <p:spPr>
-          <a:xfrm>
-            <a:off x="6675120" y="1737360"/>
-            <a:ext cx="4754880" cy="548640"/>
-          </a:xfrm>
-          <a:prstGeom prst="rect">
-            <a:avLst/>
-          </a:prstGeom>
-          <a:noFill/>
-        </p:spPr>
-        <p:txBody>
-          <a:bodyPr wrap="square" anchor="t" lIns="0" rIns="0" tIns="0" bIns="0">
-            <a:spAutoFit/>
-          </a:bodyPr>
-          <a:lstStyle/>
-          <a:p>
-            <a:pPr algn="l">
-              <a:lnSpc>
-                <a:spcPct val="100000"/>
-              </a:lnSpc>
-              <a:spcBef>
-                <a:spcPts val="0"/>
-              </a:spcBef>
-              <a:spcAft>
-                <a:spcPts val="600"/>
-              </a:spcAft>
-            </a:pPr>
-            <a:r>
-              <a:rPr sz="2200" b="1" i="0">
-                <a:solidFill>
-                  <a:srgbClr val="1976D2"/>
-                </a:solidFill>
-                <a:latin typeface="Open Sans"/>
-              </a:rPr>
-              <a:t>Access Control</a:t>
-            </a:r>
-          </a:p>
-        </p:txBody>
-      </p:sp>
-      <p:sp>
-        <p:nvSpPr>
-          <p:cNvPr id="10" name="TextBox 9"/>
-          <p:cNvSpPr txBox="1"/>
-          <p:nvPr/>
-        </p:nvSpPr>
-        <p:spPr>
-          <a:xfrm>
-            <a:off x="6675120" y="2377440"/>
-            <a:ext cx="4754880" cy="1371600"/>
-          </a:xfrm>
-          <a:prstGeom prst="rect">
-            <a:avLst/>
-          </a:prstGeom>
-          <a:noFill/>
-        </p:spPr>
-        <p:txBody>
-          <a:bodyPr wrap="square" anchor="t" lIns="0" rIns="0" tIns="0" bIns="0">
-            <a:spAutoFit/>
-          </a:bodyPr>
-          <a:lstStyle/>
-          <a:p>
-            <a:pPr algn="l">
-              <a:lnSpc>
-                <a:spcPct val="110000"/>
-              </a:lnSpc>
-              <a:spcBef>
-                <a:spcPts val="0"/>
-              </a:spcBef>
-              <a:spcAft>
-                <a:spcPts val="600"/>
-              </a:spcAft>
-            </a:pPr>
-            <a:r>
-              <a:rPr sz="1500" b="0" i="0">
-                <a:solidFill>
-                  <a:srgbClr val="212121"/>
-                </a:solidFill>
-                <a:latin typeface="Open Sans"/>
-              </a:rPr>
-              <a:t>validar ownership no servidor; deny by default; RBAC</a:t>
-            </a:r>
-          </a:p>
-        </p:txBody>
-      </p:sp>
-      <p:sp>
-        <p:nvSpPr>
-          <p:cNvPr id="11" name="Rounded Rectangle 10"/>
-          <p:cNvSpPr/>
-          <p:nvPr/>
-        </p:nvSpPr>
-        <p:spPr>
-          <a:xfrm>
-            <a:off x="411480" y="4069080"/>
-            <a:ext cx="5468112" cy="2423160"/>
-          </a:xfrm>
-          <a:prstGeom prst="roundRect">
-            <a:avLst/>
-          </a:prstGeom>
-          <a:solidFill>
-            <a:srgbClr val="F5F5F5"/>
-          </a:solidFill>
-          <a:ln w="19050">
-            <a:solidFill>
-              <a:srgbClr val="E65100"/>
-            </a:solidFill>
-          </a:ln>
-          <a:effectLst/>
-        </p:spPr>
-        <p:style>
-          <a:lnRef idx="1">
-            <a:schemeClr val="accent1"/>
-          </a:lnRef>
-          <a:fillRef idx="3">
-            <a:schemeClr val="accent1"/>
-          </a:fillRef>
-          <a:effectRef idx="2">
-            <a:schemeClr val="accent1"/>
-          </a:effectRef>
-          <a:fontRef idx="minor">
-            <a:schemeClr val="lt1"/>
-          </a:fontRef>
-        </p:style>
-        <p:txBody>
-          <a:bodyPr rtlCol="0" anchor="ctr"/>
-          <a:lstStyle/>
-          <a:p>
-            <a:pPr algn="ctr"/>
-          </a:p>
-        </p:txBody>
-      </p:sp>
-      <p:sp>
-        <p:nvSpPr>
-          <p:cNvPr id="12" name="TextBox 11"/>
-          <p:cNvSpPr txBox="1"/>
-          <p:nvPr/>
-        </p:nvSpPr>
-        <p:spPr>
-          <a:xfrm>
-            <a:off x="777240" y="4343400"/>
-            <a:ext cx="4754880" cy="548640"/>
-          </a:xfrm>
-          <a:prstGeom prst="rect">
-            <a:avLst/>
-          </a:prstGeom>
-          <a:noFill/>
-        </p:spPr>
-        <p:txBody>
-          <a:bodyPr wrap="square" anchor="t" lIns="0" rIns="0" tIns="0" bIns="0">
-            <a:spAutoFit/>
-          </a:bodyPr>
-          <a:lstStyle/>
-          <a:p>
-            <a:pPr algn="l">
-              <a:lnSpc>
-                <a:spcPct val="100000"/>
-              </a:lnSpc>
-              <a:spcBef>
-                <a:spcPts val="0"/>
-              </a:spcBef>
-              <a:spcAft>
-                <a:spcPts val="600"/>
-              </a:spcAft>
-            </a:pPr>
-            <a:r>
-              <a:rPr sz="2200" b="1" i="0">
-                <a:solidFill>
-                  <a:srgbClr val="E65100"/>
-                </a:solidFill>
-                <a:latin typeface="Open Sans"/>
-              </a:rPr>
-              <a:t>Crypto</a:t>
-            </a:r>
-          </a:p>
-        </p:txBody>
-      </p:sp>
-      <p:sp>
-        <p:nvSpPr>
-          <p:cNvPr id="13" name="TextBox 12"/>
-          <p:cNvSpPr txBox="1"/>
-          <p:nvPr/>
-        </p:nvSpPr>
-        <p:spPr>
-          <a:xfrm>
-            <a:off x="777240" y="4983480"/>
-            <a:ext cx="4754880" cy="1371600"/>
-          </a:xfrm>
-          <a:prstGeom prst="rect">
-            <a:avLst/>
-          </a:prstGeom>
-          <a:noFill/>
-        </p:spPr>
-        <p:txBody>
-          <a:bodyPr wrap="square" anchor="t" lIns="0" rIns="0" tIns="0" bIns="0">
-            <a:spAutoFit/>
-          </a:bodyPr>
-          <a:lstStyle/>
-          <a:p>
-            <a:pPr algn="l">
-              <a:lnSpc>
-                <a:spcPct val="110000"/>
-              </a:lnSpc>
-              <a:spcBef>
-                <a:spcPts val="0"/>
-              </a:spcBef>
-              <a:spcAft>
-                <a:spcPts val="600"/>
-              </a:spcAft>
-            </a:pPr>
-            <a:r>
-              <a:rPr sz="1500" b="0" i="0">
-                <a:solidFill>
-                  <a:srgbClr val="212121"/>
-                </a:solidFill>
-                <a:latin typeface="Open Sans"/>
-              </a:rPr>
-              <a:t>Argon2id; TLS 1.3; AES-256-GCM; nunca MD5/SHA-1</a:t>
-            </a:r>
-          </a:p>
-        </p:txBody>
-      </p:sp>
-      <p:sp>
-        <p:nvSpPr>
-          <p:cNvPr id="14" name="Rounded Rectangle 13"/>
-          <p:cNvSpPr/>
-          <p:nvPr/>
-        </p:nvSpPr>
-        <p:spPr>
-          <a:xfrm>
-            <a:off x="6309360" y="4069080"/>
-            <a:ext cx="5468112" cy="2423160"/>
-          </a:xfrm>
-          <a:prstGeom prst="roundRect">
-            <a:avLst/>
-          </a:prstGeom>
-          <a:solidFill>
-            <a:srgbClr val="F5F5F5"/>
-          </a:solidFill>
-          <a:ln w="19050">
-            <a:solidFill>
-              <a:srgbClr val="B71C1C"/>
-            </a:solidFill>
-          </a:ln>
-          <a:effectLst/>
-        </p:spPr>
-        <p:style>
-          <a:lnRef idx="1">
-            <a:schemeClr val="accent1"/>
-          </a:lnRef>
-          <a:fillRef idx="3">
-            <a:schemeClr val="accent1"/>
-          </a:fillRef>
-          <a:effectRef idx="2">
-            <a:schemeClr val="accent1"/>
-          </a:effectRef>
-          <a:fontRef idx="minor">
-            <a:schemeClr val="lt1"/>
-          </a:fontRef>
-        </p:style>
-        <p:txBody>
-          <a:bodyPr rtlCol="0" anchor="ctr"/>
-          <a:lstStyle/>
-          <a:p>
-            <a:pPr algn="ctr"/>
-          </a:p>
-        </p:txBody>
-      </p:sp>
-      <p:sp>
-        <p:nvSpPr>
-          <p:cNvPr id="15" name="TextBox 14"/>
-          <p:cNvSpPr txBox="1"/>
-          <p:nvPr/>
-        </p:nvSpPr>
-        <p:spPr>
-          <a:xfrm>
-            <a:off x="6675120" y="4343400"/>
-            <a:ext cx="4754880" cy="548640"/>
-          </a:xfrm>
-          <a:prstGeom prst="rect">
-            <a:avLst/>
-          </a:prstGeom>
-          <a:noFill/>
-        </p:spPr>
-        <p:txBody>
-          <a:bodyPr wrap="square" anchor="t" lIns="0" rIns="0" tIns="0" bIns="0">
-            <a:spAutoFit/>
-          </a:bodyPr>
-          <a:lstStyle/>
-          <a:p>
-            <a:pPr algn="l">
-              <a:lnSpc>
-                <a:spcPct val="100000"/>
-              </a:lnSpc>
-              <a:spcBef>
-                <a:spcPts val="0"/>
-              </a:spcBef>
-              <a:spcAft>
-                <a:spcPts val="600"/>
-              </a:spcAft>
-            </a:pPr>
-            <a:r>
-              <a:rPr sz="2200" b="1" i="0">
-                <a:solidFill>
-                  <a:srgbClr val="B71C1C"/>
-                </a:solidFill>
-                <a:latin typeface="Open Sans"/>
-              </a:rPr>
-              <a:t>Segredos</a:t>
-            </a:r>
-          </a:p>
-        </p:txBody>
-      </p:sp>
-      <p:sp>
-        <p:nvSpPr>
-          <p:cNvPr id="16" name="TextBox 15"/>
-          <p:cNvSpPr txBox="1"/>
-          <p:nvPr/>
-        </p:nvSpPr>
-        <p:spPr>
-          <a:xfrm>
-            <a:off x="6675120" y="4983480"/>
-            <a:ext cx="4754880" cy="1371600"/>
-          </a:xfrm>
-          <a:prstGeom prst="rect">
-            <a:avLst/>
-          </a:prstGeom>
-          <a:noFill/>
-        </p:spPr>
-        <p:txBody>
-          <a:bodyPr wrap="square" anchor="t" lIns="0" rIns="0" tIns="0" bIns="0">
-            <a:spAutoFit/>
-          </a:bodyPr>
-          <a:lstStyle/>
-          <a:p>
-            <a:pPr algn="l">
-              <a:lnSpc>
-                <a:spcPct val="110000"/>
-              </a:lnSpc>
-              <a:spcBef>
-                <a:spcPts val="0"/>
-              </a:spcBef>
-              <a:spcAft>
-                <a:spcPts val="600"/>
-              </a:spcAft>
-            </a:pPr>
-            <a:r>
-              <a:rPr sz="1500" b="0" i="0">
-                <a:solidFill>
-                  <a:srgbClr val="212121"/>
-                </a:solidFill>
-                <a:latin typeface="Open Sans"/>
-              </a:rPr>
-              <a:t>cofre/variável de ambiente; secret scanning no CI</a:t>
-            </a:r>
-          </a:p>
-        </p:txBody>
-      </p:sp>
-      <p:sp>
-        <p:nvSpPr>
-          <p:cNvPr id="17" name="TextBox 16"/>
-          <p:cNvSpPr txBox="1"/>
-          <p:nvPr/>
-        </p:nvSpPr>
-        <p:spPr>
-          <a:xfrm>
-            <a:off x="10972800" y="6446520"/>
-            <a:ext cx="914400" cy="320040"/>
-          </a:xfrm>
-          <a:prstGeom prst="rect">
-            <a:avLst/>
-          </a:prstGeom>
-          <a:noFill/>
-        </p:spPr>
-        <p:txBody>
-          <a:bodyPr wrap="square" anchor="t" lIns="0" rIns="0" tIns="0" bIns="0">
-            <a:spAutoFit/>
-          </a:bodyPr>
-          <a:lstStyle/>
-          <a:p>
-            <a:pPr algn="r">
-              <a:lnSpc>
-                <a:spcPct val="100000"/>
-              </a:lnSpc>
-              <a:spcBef>
-                <a:spcPts val="0"/>
-              </a:spcBef>
-              <a:spcAft>
-                <a:spcPts val="600"/>
-              </a:spcAft>
-            </a:pPr>
-            <a:r>
-              <a:rPr sz="1100" b="0" i="0">
-                <a:solidFill>
-                  <a:srgbClr val="616161"/>
-                </a:solidFill>
-                <a:latin typeface="Open Sans"/>
-              </a:rPr>
-              <a:t>5</a:t>
-            </a:r>
           </a:p>
         </p:txBody>
       </p:sp>
@@ -7386,7 +8264,7 @@
                 </a:solidFill>
                 <a:latin typeface="Open Sans"/>
               </a:rPr>
-              <a:t>Exemplo: corrigir o IDOR (A01)</a:t>
+              <a:t>Correções essenciais</a:t>
             </a:r>
           </a:p>
         </p:txBody>
@@ -7431,7 +8309,7 @@
                 </a:solidFill>
                 <a:latin typeface="Open Sans"/>
               </a:rPr>
-              <a:t>O padrão do VidaPlus (F-02)</a:t>
+              <a:t>Do padrão vulnerável ao seguro</a:t>
             </a:r>
           </a:p>
         </p:txBody>
@@ -7445,7 +8323,7 @@
         <p:spPr>
           <a:xfrm>
             <a:off x="411480" y="1463040"/>
-            <a:ext cx="11384280" cy="5029200"/>
+            <a:ext cx="5468112" cy="2423160"/>
           </a:xfrm>
           <a:prstGeom prst="roundRect">
             <a:avLst/>
@@ -7453,9 +8331,9 @@
           <a:solidFill>
             <a:srgbClr val="F5F5F5"/>
           </a:solidFill>
-          <a:ln w="15875">
+          <a:ln w="19050">
             <a:solidFill>
-              <a:srgbClr val="7CB342"/>
+              <a:srgbClr val="2D7A3D"/>
             </a:solidFill>
           </a:ln>
           <a:effectLst/>
@@ -7490,8 +8368,8 @@
         </p:nvSpPr>
         <p:spPr>
           <a:xfrm>
-            <a:off x="868680" y="1783080"/>
-            <a:ext cx="10515600" cy="4572000"/>
+            <a:off x="777240" y="1737360"/>
+            <a:ext cx="4754880" cy="548640"/>
           </a:xfrm>
           <a:prstGeom prst="rect">
             <a:avLst/>
@@ -7499,7 +8377,52 @@
           <a:noFill/>
         </p:spPr>
         <p:txBody>
-          <a:bodyPr wrap="square">
+          <a:bodyPr wrap="square" anchor="t" lIns="0" rIns="0" tIns="0" bIns="0">
+            <a:spAutoFit/>
+          </a:bodyPr>
+          <a:lstStyle/>
+          <a:p>
+            <a:pPr algn="l">
+              <a:lnSpc>
+                <a:spcPct val="100000"/>
+              </a:lnSpc>
+              <a:spcBef>
+                <a:spcPts val="0"/>
+              </a:spcBef>
+              <a:spcAft>
+                <a:spcPts val="600"/>
+              </a:spcAft>
+            </a:pPr>
+            <a:r>
+              <a:rPr sz="2200" b="1" i="0">
+                <a:solidFill>
+                  <a:srgbClr val="2D7A3D"/>
+                </a:solidFill>
+                <a:latin typeface="Open Sans"/>
+              </a:rPr>
+              <a:t>Injection</a:t>
+            </a:r>
+          </a:p>
+        </p:txBody>
+      </p:sp>
+      <p:sp>
+        <p:nvSpPr>
+          <p:cNvPr id="7" name="TextBox 6"/>
+          <p:cNvSpPr txBox="1"/>
+          <p:nvPr/>
+        </p:nvSpPr>
+        <p:spPr>
+          <a:xfrm>
+            <a:off x="777240" y="2377440"/>
+            <a:ext cx="4754880" cy="1371600"/>
+          </a:xfrm>
+          <a:prstGeom prst="rect">
+            <a:avLst/>
+          </a:prstGeom>
+          <a:noFill/>
+        </p:spPr>
+        <p:txBody>
+          <a:bodyPr wrap="square" anchor="t" lIns="0" rIns="0" tIns="0" bIns="0">
             <a:spAutoFit/>
           </a:bodyPr>
           <a:lstStyle/>
@@ -7508,191 +8431,436 @@
               <a:lnSpc>
                 <a:spcPct val="110000"/>
               </a:lnSpc>
+              <a:spcBef>
+                <a:spcPts val="0"/>
+              </a:spcBef>
               <a:spcAft>
-                <a:spcPts val="1400"/>
+                <a:spcPts val="600"/>
               </a:spcAft>
             </a:pPr>
             <a:r>
-              <a:rPr sz="2000" b="1">
-                <a:solidFill>
-                  <a:srgbClr val="7CB342"/>
-                </a:solidFill>
-                <a:latin typeface="Open Sans"/>
-              </a:rPr>
-              <a:t>▸ </a:t>
-            </a:r>
-            <a:r>
-              <a:rPr sz="1800" b="1">
-                <a:solidFill>
-                  <a:srgbClr val="2D7A3D"/>
-                </a:solidFill>
-                <a:latin typeface="Open Sans"/>
-              </a:rPr>
-              <a:t>Antes (vulnerável): </a:t>
-            </a:r>
-            <a:r>
-              <a:rPr sz="1800">
+              <a:rPr sz="1500" b="0" i="0">
                 <a:solidFill>
                   <a:srgbClr val="212121"/>
                 </a:solidFill>
                 <a:latin typeface="Open Sans"/>
               </a:rPr>
-              <a:t>GET /api/exames/{id} devolve qualquer exame.</a:t>
-            </a:r>
-          </a:p>
+              <a:t>consultas parametrizadas (prepared statements); allowlist</a:t>
+            </a:r>
+          </a:p>
+        </p:txBody>
+      </p:sp>
+      <p:sp>
+        <p:nvSpPr>
+          <p:cNvPr id="8" name="Rounded Rectangle 7"/>
+          <p:cNvSpPr/>
+          <p:nvPr/>
+        </p:nvSpPr>
+        <p:spPr>
+          <a:xfrm>
+            <a:off x="6309360" y="1463040"/>
+            <a:ext cx="5468112" cy="2423160"/>
+          </a:xfrm>
+          <a:prstGeom prst="roundRect">
+            <a:avLst/>
+          </a:prstGeom>
+          <a:solidFill>
+            <a:srgbClr val="F5F5F5"/>
+          </a:solidFill>
+          <a:ln w="19050">
+            <a:solidFill>
+              <a:srgbClr val="1976D2"/>
+            </a:solidFill>
+          </a:ln>
+          <a:effectLst/>
+        </p:spPr>
+        <p:style>
+          <a:lnRef idx="1">
+            <a:schemeClr val="accent1"/>
+          </a:lnRef>
+          <a:fillRef idx="3">
+            <a:schemeClr val="accent1"/>
+          </a:fillRef>
+          <a:effectRef idx="2">
+            <a:schemeClr val="accent1"/>
+          </a:effectRef>
+          <a:fontRef idx="minor">
+            <a:schemeClr val="lt1"/>
+          </a:fontRef>
+        </p:style>
+        <p:txBody>
+          <a:bodyPr rtlCol="0" anchor="ctr"/>
+          <a:lstStyle/>
+          <a:p>
+            <a:pPr algn="ctr"/>
+          </a:p>
+        </p:txBody>
+      </p:sp>
+      <p:sp>
+        <p:nvSpPr>
+          <p:cNvPr id="9" name="TextBox 8"/>
+          <p:cNvSpPr txBox="1"/>
+          <p:nvPr/>
+        </p:nvSpPr>
+        <p:spPr>
+          <a:xfrm>
+            <a:off x="6675120" y="1737360"/>
+            <a:ext cx="4754880" cy="548640"/>
+          </a:xfrm>
+          <a:prstGeom prst="rect">
+            <a:avLst/>
+          </a:prstGeom>
+          <a:noFill/>
+        </p:spPr>
+        <p:txBody>
+          <a:bodyPr wrap="square" anchor="t" lIns="0" rIns="0" tIns="0" bIns="0">
+            <a:spAutoFit/>
+          </a:bodyPr>
+          <a:lstStyle/>
+          <a:p>
+            <a:pPr algn="l">
+              <a:lnSpc>
+                <a:spcPct val="100000"/>
+              </a:lnSpc>
+              <a:spcBef>
+                <a:spcPts val="0"/>
+              </a:spcBef>
+              <a:spcAft>
+                <a:spcPts val="600"/>
+              </a:spcAft>
+            </a:pPr>
+            <a:r>
+              <a:rPr sz="2200" b="1" i="0">
+                <a:solidFill>
+                  <a:srgbClr val="1976D2"/>
+                </a:solidFill>
+                <a:latin typeface="Open Sans"/>
+              </a:rPr>
+              <a:t>Access Control</a:t>
+            </a:r>
+          </a:p>
+        </p:txBody>
+      </p:sp>
+      <p:sp>
+        <p:nvSpPr>
+          <p:cNvPr id="10" name="TextBox 9"/>
+          <p:cNvSpPr txBox="1"/>
+          <p:nvPr/>
+        </p:nvSpPr>
+        <p:spPr>
+          <a:xfrm>
+            <a:off x="6675120" y="2377440"/>
+            <a:ext cx="4754880" cy="1371600"/>
+          </a:xfrm>
+          <a:prstGeom prst="rect">
+            <a:avLst/>
+          </a:prstGeom>
+          <a:noFill/>
+        </p:spPr>
+        <p:txBody>
+          <a:bodyPr wrap="square" anchor="t" lIns="0" rIns="0" tIns="0" bIns="0">
+            <a:spAutoFit/>
+          </a:bodyPr>
+          <a:lstStyle/>
           <a:p>
             <a:pPr algn="l">
               <a:lnSpc>
                 <a:spcPct val="110000"/>
               </a:lnSpc>
+              <a:spcBef>
+                <a:spcPts val="0"/>
+              </a:spcBef>
               <a:spcAft>
-                <a:spcPts val="1400"/>
+                <a:spcPts val="600"/>
               </a:spcAft>
             </a:pPr>
             <a:r>
-              <a:rPr sz="2000" b="1">
-                <a:solidFill>
-                  <a:srgbClr val="7CB342"/>
-                </a:solidFill>
-                <a:latin typeface="Open Sans"/>
-              </a:rPr>
-              <a:t>▸ </a:t>
-            </a:r>
-            <a:r>
-              <a:rPr sz="1800" b="1">
-                <a:solidFill>
-                  <a:srgbClr val="2D7A3D"/>
-                </a:solidFill>
-                <a:latin typeface="Open Sans"/>
-              </a:rPr>
-              <a:t>Ataque: </a:t>
-            </a:r>
-            <a:r>
-              <a:rPr sz="1800">
+              <a:rPr sz="1500" b="0" i="0">
                 <a:solidFill>
                   <a:srgbClr val="212121"/>
                 </a:solidFill>
                 <a:latin typeface="Open Sans"/>
               </a:rPr>
-              <a:t>paciente A troca o id e baixa o exame do paciente B.</a:t>
-            </a:r>
-          </a:p>
+              <a:t>validar ownership no servidor; deny by default; RBAC</a:t>
+            </a:r>
+          </a:p>
+        </p:txBody>
+      </p:sp>
+      <p:sp>
+        <p:nvSpPr>
+          <p:cNvPr id="11" name="Rounded Rectangle 10"/>
+          <p:cNvSpPr/>
+          <p:nvPr/>
+        </p:nvSpPr>
+        <p:spPr>
+          <a:xfrm>
+            <a:off x="411480" y="4069080"/>
+            <a:ext cx="5468112" cy="2423160"/>
+          </a:xfrm>
+          <a:prstGeom prst="roundRect">
+            <a:avLst/>
+          </a:prstGeom>
+          <a:solidFill>
+            <a:srgbClr val="F5F5F5"/>
+          </a:solidFill>
+          <a:ln w="19050">
+            <a:solidFill>
+              <a:srgbClr val="E65100"/>
+            </a:solidFill>
+          </a:ln>
+          <a:effectLst/>
+        </p:spPr>
+        <p:style>
+          <a:lnRef idx="1">
+            <a:schemeClr val="accent1"/>
+          </a:lnRef>
+          <a:fillRef idx="3">
+            <a:schemeClr val="accent1"/>
+          </a:fillRef>
+          <a:effectRef idx="2">
+            <a:schemeClr val="accent1"/>
+          </a:effectRef>
+          <a:fontRef idx="minor">
+            <a:schemeClr val="lt1"/>
+          </a:fontRef>
+        </p:style>
+        <p:txBody>
+          <a:bodyPr rtlCol="0" anchor="ctr"/>
+          <a:lstStyle/>
+          <a:p>
+            <a:pPr algn="ctr"/>
+          </a:p>
+        </p:txBody>
+      </p:sp>
+      <p:sp>
+        <p:nvSpPr>
+          <p:cNvPr id="12" name="TextBox 11"/>
+          <p:cNvSpPr txBox="1"/>
+          <p:nvPr/>
+        </p:nvSpPr>
+        <p:spPr>
+          <a:xfrm>
+            <a:off x="777240" y="4343400"/>
+            <a:ext cx="4754880" cy="548640"/>
+          </a:xfrm>
+          <a:prstGeom prst="rect">
+            <a:avLst/>
+          </a:prstGeom>
+          <a:noFill/>
+        </p:spPr>
+        <p:txBody>
+          <a:bodyPr wrap="square" anchor="t" lIns="0" rIns="0" tIns="0" bIns="0">
+            <a:spAutoFit/>
+          </a:bodyPr>
+          <a:lstStyle/>
+          <a:p>
+            <a:pPr algn="l">
+              <a:lnSpc>
+                <a:spcPct val="100000"/>
+              </a:lnSpc>
+              <a:spcBef>
+                <a:spcPts val="0"/>
+              </a:spcBef>
+              <a:spcAft>
+                <a:spcPts val="600"/>
+              </a:spcAft>
+            </a:pPr>
+            <a:r>
+              <a:rPr sz="2200" b="1" i="0">
+                <a:solidFill>
+                  <a:srgbClr val="E65100"/>
+                </a:solidFill>
+                <a:latin typeface="Open Sans"/>
+              </a:rPr>
+              <a:t>Crypto</a:t>
+            </a:r>
+          </a:p>
+        </p:txBody>
+      </p:sp>
+      <p:sp>
+        <p:nvSpPr>
+          <p:cNvPr id="13" name="TextBox 12"/>
+          <p:cNvSpPr txBox="1"/>
+          <p:nvPr/>
+        </p:nvSpPr>
+        <p:spPr>
+          <a:xfrm>
+            <a:off x="777240" y="4983480"/>
+            <a:ext cx="4754880" cy="1371600"/>
+          </a:xfrm>
+          <a:prstGeom prst="rect">
+            <a:avLst/>
+          </a:prstGeom>
+          <a:noFill/>
+        </p:spPr>
+        <p:txBody>
+          <a:bodyPr wrap="square" anchor="t" lIns="0" rIns="0" tIns="0" bIns="0">
+            <a:spAutoFit/>
+          </a:bodyPr>
+          <a:lstStyle/>
           <a:p>
             <a:pPr algn="l">
               <a:lnSpc>
                 <a:spcPct val="110000"/>
               </a:lnSpc>
+              <a:spcBef>
+                <a:spcPts val="0"/>
+              </a:spcBef>
               <a:spcAft>
-                <a:spcPts val="1400"/>
+                <a:spcPts val="600"/>
               </a:spcAft>
             </a:pPr>
             <a:r>
-              <a:rPr sz="2000" b="1">
-                <a:solidFill>
-                  <a:srgbClr val="7CB342"/>
-                </a:solidFill>
-                <a:latin typeface="Open Sans"/>
-              </a:rPr>
-              <a:t>▸ </a:t>
-            </a:r>
-            <a:r>
-              <a:rPr sz="1800" b="1">
-                <a:solidFill>
-                  <a:srgbClr val="2D7A3D"/>
-                </a:solidFill>
-                <a:latin typeface="Open Sans"/>
-              </a:rPr>
-              <a:t>Correção: </a:t>
-            </a:r>
-            <a:r>
-              <a:rPr sz="1800">
+              <a:rPr sz="1500" b="0" i="0">
                 <a:solidFill>
                   <a:srgbClr val="212121"/>
                 </a:solidFill>
                 <a:latin typeface="Open Sans"/>
               </a:rPr>
-              <a:t>if (exame.pacienteId != usuarioAtual.id) return 403;</a:t>
-            </a:r>
-          </a:p>
+              <a:t>Argon2id; TLS 1.3; AES-256-GCM; nunca MD5/SHA-1</a:t>
+            </a:r>
+          </a:p>
+        </p:txBody>
+      </p:sp>
+      <p:sp>
+        <p:nvSpPr>
+          <p:cNvPr id="14" name="Rounded Rectangle 13"/>
+          <p:cNvSpPr/>
+          <p:nvPr/>
+        </p:nvSpPr>
+        <p:spPr>
+          <a:xfrm>
+            <a:off x="6309360" y="4069080"/>
+            <a:ext cx="5468112" cy="2423160"/>
+          </a:xfrm>
+          <a:prstGeom prst="roundRect">
+            <a:avLst/>
+          </a:prstGeom>
+          <a:solidFill>
+            <a:srgbClr val="F5F5F5"/>
+          </a:solidFill>
+          <a:ln w="19050">
+            <a:solidFill>
+              <a:srgbClr val="B71C1C"/>
+            </a:solidFill>
+          </a:ln>
+          <a:effectLst/>
+        </p:spPr>
+        <p:style>
+          <a:lnRef idx="1">
+            <a:schemeClr val="accent1"/>
+          </a:lnRef>
+          <a:fillRef idx="3">
+            <a:schemeClr val="accent1"/>
+          </a:fillRef>
+          <a:effectRef idx="2">
+            <a:schemeClr val="accent1"/>
+          </a:effectRef>
+          <a:fontRef idx="minor">
+            <a:schemeClr val="lt1"/>
+          </a:fontRef>
+        </p:style>
+        <p:txBody>
+          <a:bodyPr rtlCol="0" anchor="ctr"/>
+          <a:lstStyle/>
+          <a:p>
+            <a:pPr algn="ctr"/>
+          </a:p>
+        </p:txBody>
+      </p:sp>
+      <p:sp>
+        <p:nvSpPr>
+          <p:cNvPr id="15" name="TextBox 14"/>
+          <p:cNvSpPr txBox="1"/>
+          <p:nvPr/>
+        </p:nvSpPr>
+        <p:spPr>
+          <a:xfrm>
+            <a:off x="6675120" y="4343400"/>
+            <a:ext cx="4754880" cy="548640"/>
+          </a:xfrm>
+          <a:prstGeom prst="rect">
+            <a:avLst/>
+          </a:prstGeom>
+          <a:noFill/>
+        </p:spPr>
+        <p:txBody>
+          <a:bodyPr wrap="square" anchor="t" lIns="0" rIns="0" tIns="0" bIns="0">
+            <a:spAutoFit/>
+          </a:bodyPr>
+          <a:lstStyle/>
+          <a:p>
+            <a:pPr algn="l">
+              <a:lnSpc>
+                <a:spcPct val="100000"/>
+              </a:lnSpc>
+              <a:spcBef>
+                <a:spcPts val="0"/>
+              </a:spcBef>
+              <a:spcAft>
+                <a:spcPts val="600"/>
+              </a:spcAft>
+            </a:pPr>
+            <a:r>
+              <a:rPr sz="2200" b="1" i="0">
+                <a:solidFill>
+                  <a:srgbClr val="B71C1C"/>
+                </a:solidFill>
+                <a:latin typeface="Open Sans"/>
+              </a:rPr>
+              <a:t>Segredos</a:t>
+            </a:r>
+          </a:p>
+        </p:txBody>
+      </p:sp>
+      <p:sp>
+        <p:nvSpPr>
+          <p:cNvPr id="16" name="TextBox 15"/>
+          <p:cNvSpPr txBox="1"/>
+          <p:nvPr/>
+        </p:nvSpPr>
+        <p:spPr>
+          <a:xfrm>
+            <a:off x="6675120" y="4983480"/>
+            <a:ext cx="4754880" cy="1371600"/>
+          </a:xfrm>
+          <a:prstGeom prst="rect">
+            <a:avLst/>
+          </a:prstGeom>
+          <a:noFill/>
+        </p:spPr>
+        <p:txBody>
+          <a:bodyPr wrap="square" anchor="t" lIns="0" rIns="0" tIns="0" bIns="0">
+            <a:spAutoFit/>
+          </a:bodyPr>
+          <a:lstStyle/>
           <a:p>
             <a:pPr algn="l">
               <a:lnSpc>
                 <a:spcPct val="110000"/>
               </a:lnSpc>
+              <a:spcBef>
+                <a:spcPts val="0"/>
+              </a:spcBef>
               <a:spcAft>
-                <a:spcPts val="1400"/>
+                <a:spcPts val="600"/>
               </a:spcAft>
             </a:pPr>
             <a:r>
-              <a:rPr sz="2000" b="1">
-                <a:solidFill>
-                  <a:srgbClr val="7CB342"/>
-                </a:solidFill>
-                <a:latin typeface="Open Sans"/>
-              </a:rPr>
-              <a:t>▸ </a:t>
-            </a:r>
-            <a:r>
-              <a:rPr sz="1800" b="1">
-                <a:solidFill>
-                  <a:srgbClr val="2D7A3D"/>
-                </a:solidFill>
-                <a:latin typeface="Open Sans"/>
-              </a:rPr>
-              <a:t>Fail-secure: </a:t>
-            </a:r>
-            <a:r>
-              <a:rPr sz="1800">
+              <a:rPr sz="1500" b="0" i="0">
                 <a:solidFill>
                   <a:srgbClr val="212121"/>
                 </a:solidFill>
                 <a:latin typeface="Open Sans"/>
               </a:rPr>
-              <a:t>deny by default; 403 sem vazar metadados do exame.</a:t>
-            </a:r>
-          </a:p>
-          <a:p>
-            <a:pPr algn="l">
-              <a:lnSpc>
-                <a:spcPct val="110000"/>
-              </a:lnSpc>
-              <a:spcAft>
-                <a:spcPts val="1400"/>
-              </a:spcAft>
-            </a:pPr>
-            <a:r>
-              <a:rPr sz="2000" b="1">
-                <a:solidFill>
-                  <a:srgbClr val="7CB342"/>
-                </a:solidFill>
-                <a:latin typeface="Open Sans"/>
-              </a:rPr>
-              <a:t>▸ </a:t>
-            </a:r>
-            <a:r>
-              <a:rPr sz="1800" b="1">
-                <a:solidFill>
-                  <a:srgbClr val="2D7A3D"/>
-                </a:solidFill>
-                <a:latin typeface="Open Sans"/>
-              </a:rPr>
-              <a:t>Garantia (RGS): </a:t>
-            </a:r>
-            <a:r>
-              <a:rPr sz="1800">
-                <a:solidFill>
-                  <a:srgbClr val="212121"/>
-                </a:solidFill>
-                <a:latin typeface="Open Sans"/>
-              </a:rPr>
-              <a:t>teste anti-IDOR no CI — falha bloqueia o merge.</a:t>
-            </a:r>
-          </a:p>
-        </p:txBody>
-      </p:sp>
-      <p:sp>
-        <p:nvSpPr>
-          <p:cNvPr id="7" name="TextBox 6"/>
+              <a:t>cofre/variável de ambiente; secret scanning no CI</a:t>
+            </a:r>
+          </a:p>
+        </p:txBody>
+      </p:sp>
+      <p:sp>
+        <p:nvSpPr>
+          <p:cNvPr id="17" name="TextBox 16"/>
           <p:cNvSpPr txBox="1"/>
           <p:nvPr/>
         </p:nvSpPr>
@@ -7837,7 +9005,7 @@
                 </a:solidFill>
                 <a:latin typeface="Open Sans"/>
               </a:rPr>
-              <a:t>Módulos LGPD a criar</a:t>
+              <a:t>Exemplo: corrigir o IDOR (A01)</a:t>
             </a:r>
           </a:p>
         </p:txBody>
@@ -7882,7 +9050,7 @@
                 </a:solidFill>
                 <a:latin typeface="Open Sans"/>
               </a:rPr>
-              <a:t>Direitos do titular viram código</a:t>
+              <a:t>O padrão do VidaPlus (F-02)</a:t>
             </a:r>
           </a:p>
         </p:txBody>
@@ -7896,7 +9064,7 @@
         <p:spPr>
           <a:xfrm>
             <a:off x="411480" y="1463040"/>
-            <a:ext cx="5468112" cy="2423160"/>
+            <a:ext cx="11384280" cy="5029200"/>
           </a:xfrm>
           <a:prstGeom prst="roundRect">
             <a:avLst/>
@@ -7904,9 +9072,9 @@
           <a:solidFill>
             <a:srgbClr val="F5F5F5"/>
           </a:solidFill>
-          <a:ln w="19050">
+          <a:ln w="15875">
             <a:solidFill>
-              <a:srgbClr val="2D7A3D"/>
+              <a:srgbClr val="7CB342"/>
             </a:solidFill>
           </a:ln>
           <a:effectLst/>
@@ -7941,8 +9109,8 @@
         </p:nvSpPr>
         <p:spPr>
           <a:xfrm>
-            <a:off x="777240" y="1737360"/>
-            <a:ext cx="4754880" cy="548640"/>
+            <a:off x="868680" y="1783080"/>
+            <a:ext cx="10515600" cy="4572000"/>
           </a:xfrm>
           <a:prstGeom prst="rect">
             <a:avLst/>
@@ -7950,52 +9118,7 @@
           <a:noFill/>
         </p:spPr>
         <p:txBody>
-          <a:bodyPr wrap="square" anchor="t" lIns="0" rIns="0" tIns="0" bIns="0">
-            <a:spAutoFit/>
-          </a:bodyPr>
-          <a:lstStyle/>
-          <a:p>
-            <a:pPr algn="l">
-              <a:lnSpc>
-                <a:spcPct val="100000"/>
-              </a:lnSpc>
-              <a:spcBef>
-                <a:spcPts val="0"/>
-              </a:spcBef>
-              <a:spcAft>
-                <a:spcPts val="600"/>
-              </a:spcAft>
-            </a:pPr>
-            <a:r>
-              <a:rPr sz="2200" b="1" i="0">
-                <a:solidFill>
-                  <a:srgbClr val="2D7A3D"/>
-                </a:solidFill>
-                <a:latin typeface="Open Sans"/>
-              </a:rPr>
-              <a:t>Consentimento</a:t>
-            </a:r>
-          </a:p>
-        </p:txBody>
-      </p:sp>
-      <p:sp>
-        <p:nvSpPr>
-          <p:cNvPr id="7" name="TextBox 6"/>
-          <p:cNvSpPr txBox="1"/>
-          <p:nvPr/>
-        </p:nvSpPr>
-        <p:spPr>
-          <a:xfrm>
-            <a:off x="777240" y="2377440"/>
-            <a:ext cx="4754880" cy="1371600"/>
-          </a:xfrm>
-          <a:prstGeom prst="rect">
-            <a:avLst/>
-          </a:prstGeom>
-          <a:noFill/>
-        </p:spPr>
-        <p:txBody>
-          <a:bodyPr wrap="square" anchor="t" lIns="0" rIns="0" tIns="0" bIns="0">
+          <a:bodyPr wrap="square">
             <a:spAutoFit/>
           </a:bodyPr>
           <a:lstStyle/>
@@ -8004,436 +9127,191 @@
               <a:lnSpc>
                 <a:spcPct val="110000"/>
               </a:lnSpc>
-              <a:spcBef>
-                <a:spcPts val="0"/>
-              </a:spcBef>
               <a:spcAft>
-                <a:spcPts val="600"/>
+                <a:spcPts val="1400"/>
               </a:spcAft>
             </a:pPr>
             <a:r>
-              <a:rPr sz="1500" b="0" i="0">
+              <a:rPr sz="2000" b="1">
+                <a:solidFill>
+                  <a:srgbClr val="7CB342"/>
+                </a:solidFill>
+                <a:latin typeface="Open Sans"/>
+              </a:rPr>
+              <a:t>▸ </a:t>
+            </a:r>
+            <a:r>
+              <a:rPr sz="1800" b="1">
+                <a:solidFill>
+                  <a:srgbClr val="2D7A3D"/>
+                </a:solidFill>
+                <a:latin typeface="Open Sans"/>
+              </a:rPr>
+              <a:t>Antes (vulnerável): </a:t>
+            </a:r>
+            <a:r>
+              <a:rPr sz="1800">
                 <a:solidFill>
                   <a:srgbClr val="212121"/>
                 </a:solidFill>
                 <a:latin typeface="Open Sans"/>
               </a:rPr>
-              <a:t>específico, versionado, revogável (art. 8/9)</a:t>
-            </a:r>
-          </a:p>
-        </p:txBody>
-      </p:sp>
-      <p:sp>
-        <p:nvSpPr>
-          <p:cNvPr id="8" name="Rounded Rectangle 7"/>
-          <p:cNvSpPr/>
-          <p:nvPr/>
-        </p:nvSpPr>
-        <p:spPr>
-          <a:xfrm>
-            <a:off x="6309360" y="1463040"/>
-            <a:ext cx="5468112" cy="2423160"/>
-          </a:xfrm>
-          <a:prstGeom prst="roundRect">
-            <a:avLst/>
-          </a:prstGeom>
-          <a:solidFill>
-            <a:srgbClr val="F5F5F5"/>
-          </a:solidFill>
-          <a:ln w="19050">
-            <a:solidFill>
-              <a:srgbClr val="1976D2"/>
-            </a:solidFill>
-          </a:ln>
-          <a:effectLst/>
-        </p:spPr>
-        <p:style>
-          <a:lnRef idx="1">
-            <a:schemeClr val="accent1"/>
-          </a:lnRef>
-          <a:fillRef idx="3">
-            <a:schemeClr val="accent1"/>
-          </a:fillRef>
-          <a:effectRef idx="2">
-            <a:schemeClr val="accent1"/>
-          </a:effectRef>
-          <a:fontRef idx="minor">
-            <a:schemeClr val="lt1"/>
-          </a:fontRef>
-        </p:style>
-        <p:txBody>
-          <a:bodyPr rtlCol="0" anchor="ctr"/>
-          <a:lstStyle/>
-          <a:p>
-            <a:pPr algn="ctr"/>
-          </a:p>
-        </p:txBody>
-      </p:sp>
-      <p:sp>
-        <p:nvSpPr>
-          <p:cNvPr id="9" name="TextBox 8"/>
-          <p:cNvSpPr txBox="1"/>
-          <p:nvPr/>
-        </p:nvSpPr>
-        <p:spPr>
-          <a:xfrm>
-            <a:off x="6675120" y="1737360"/>
-            <a:ext cx="4754880" cy="548640"/>
-          </a:xfrm>
-          <a:prstGeom prst="rect">
-            <a:avLst/>
-          </a:prstGeom>
-          <a:noFill/>
-        </p:spPr>
-        <p:txBody>
-          <a:bodyPr wrap="square" anchor="t" lIns="0" rIns="0" tIns="0" bIns="0">
-            <a:spAutoFit/>
-          </a:bodyPr>
-          <a:lstStyle/>
-          <a:p>
-            <a:pPr algn="l">
-              <a:lnSpc>
-                <a:spcPct val="100000"/>
-              </a:lnSpc>
-              <a:spcBef>
-                <a:spcPts val="0"/>
-              </a:spcBef>
-              <a:spcAft>
-                <a:spcPts val="600"/>
-              </a:spcAft>
-            </a:pPr>
-            <a:r>
-              <a:rPr sz="2200" b="1" i="0">
-                <a:solidFill>
-                  <a:srgbClr val="1976D2"/>
-                </a:solidFill>
-                <a:latin typeface="Open Sans"/>
-              </a:rPr>
-              <a:t>Portabilidade</a:t>
-            </a:r>
-          </a:p>
-        </p:txBody>
-      </p:sp>
-      <p:sp>
-        <p:nvSpPr>
-          <p:cNvPr id="10" name="TextBox 9"/>
-          <p:cNvSpPr txBox="1"/>
-          <p:nvPr/>
-        </p:nvSpPr>
-        <p:spPr>
-          <a:xfrm>
-            <a:off x="6675120" y="2377440"/>
-            <a:ext cx="4754880" cy="1371600"/>
-          </a:xfrm>
-          <a:prstGeom prst="rect">
-            <a:avLst/>
-          </a:prstGeom>
-          <a:noFill/>
-        </p:spPr>
-        <p:txBody>
-          <a:bodyPr wrap="square" anchor="t" lIns="0" rIns="0" tIns="0" bIns="0">
-            <a:spAutoFit/>
-          </a:bodyPr>
-          <a:lstStyle/>
+              <a:t>GET /api/exames/{id} devolve qualquer exame.</a:t>
+            </a:r>
+          </a:p>
           <a:p>
             <a:pPr algn="l">
               <a:lnSpc>
                 <a:spcPct val="110000"/>
               </a:lnSpc>
-              <a:spcBef>
-                <a:spcPts val="0"/>
-              </a:spcBef>
               <a:spcAft>
-                <a:spcPts val="600"/>
+                <a:spcPts val="1400"/>
               </a:spcAft>
             </a:pPr>
             <a:r>
-              <a:rPr sz="1500" b="0" i="0">
+              <a:rPr sz="2000" b="1">
+                <a:solidFill>
+                  <a:srgbClr val="7CB342"/>
+                </a:solidFill>
+                <a:latin typeface="Open Sans"/>
+              </a:rPr>
+              <a:t>▸ </a:t>
+            </a:r>
+            <a:r>
+              <a:rPr sz="1800" b="1">
+                <a:solidFill>
+                  <a:srgbClr val="2D7A3D"/>
+                </a:solidFill>
+                <a:latin typeface="Open Sans"/>
+              </a:rPr>
+              <a:t>Ataque: </a:t>
+            </a:r>
+            <a:r>
+              <a:rPr sz="1800">
                 <a:solidFill>
                   <a:srgbClr val="212121"/>
                 </a:solidFill>
                 <a:latin typeface="Open Sans"/>
               </a:rPr>
-              <a:t>exportar todos os dados do titular (art. 18)</a:t>
-            </a:r>
-          </a:p>
-        </p:txBody>
-      </p:sp>
-      <p:sp>
-        <p:nvSpPr>
-          <p:cNvPr id="11" name="Rounded Rectangle 10"/>
-          <p:cNvSpPr/>
-          <p:nvPr/>
-        </p:nvSpPr>
-        <p:spPr>
-          <a:xfrm>
-            <a:off x="411480" y="4069080"/>
-            <a:ext cx="5468112" cy="2423160"/>
-          </a:xfrm>
-          <a:prstGeom prst="roundRect">
-            <a:avLst/>
-          </a:prstGeom>
-          <a:solidFill>
-            <a:srgbClr val="F5F5F5"/>
-          </a:solidFill>
-          <a:ln w="19050">
-            <a:solidFill>
-              <a:srgbClr val="7CB342"/>
-            </a:solidFill>
-          </a:ln>
-          <a:effectLst/>
-        </p:spPr>
-        <p:style>
-          <a:lnRef idx="1">
-            <a:schemeClr val="accent1"/>
-          </a:lnRef>
-          <a:fillRef idx="3">
-            <a:schemeClr val="accent1"/>
-          </a:fillRef>
-          <a:effectRef idx="2">
-            <a:schemeClr val="accent1"/>
-          </a:effectRef>
-          <a:fontRef idx="minor">
-            <a:schemeClr val="lt1"/>
-          </a:fontRef>
-        </p:style>
-        <p:txBody>
-          <a:bodyPr rtlCol="0" anchor="ctr"/>
-          <a:lstStyle/>
-          <a:p>
-            <a:pPr algn="ctr"/>
-          </a:p>
-        </p:txBody>
-      </p:sp>
-      <p:sp>
-        <p:nvSpPr>
-          <p:cNvPr id="12" name="TextBox 11"/>
-          <p:cNvSpPr txBox="1"/>
-          <p:nvPr/>
-        </p:nvSpPr>
-        <p:spPr>
-          <a:xfrm>
-            <a:off x="777240" y="4343400"/>
-            <a:ext cx="4754880" cy="548640"/>
-          </a:xfrm>
-          <a:prstGeom prst="rect">
-            <a:avLst/>
-          </a:prstGeom>
-          <a:noFill/>
-        </p:spPr>
-        <p:txBody>
-          <a:bodyPr wrap="square" anchor="t" lIns="0" rIns="0" tIns="0" bIns="0">
-            <a:spAutoFit/>
-          </a:bodyPr>
-          <a:lstStyle/>
-          <a:p>
-            <a:pPr algn="l">
-              <a:lnSpc>
-                <a:spcPct val="100000"/>
-              </a:lnSpc>
-              <a:spcBef>
-                <a:spcPts val="0"/>
-              </a:spcBef>
-              <a:spcAft>
-                <a:spcPts val="600"/>
-              </a:spcAft>
-            </a:pPr>
-            <a:r>
-              <a:rPr sz="2200" b="1" i="0">
-                <a:solidFill>
-                  <a:srgbClr val="7CB342"/>
-                </a:solidFill>
-                <a:latin typeface="Open Sans"/>
-              </a:rPr>
-              <a:t>Eliminação</a:t>
-            </a:r>
-          </a:p>
-        </p:txBody>
-      </p:sp>
-      <p:sp>
-        <p:nvSpPr>
-          <p:cNvPr id="13" name="TextBox 12"/>
-          <p:cNvSpPr txBox="1"/>
-          <p:nvPr/>
-        </p:nvSpPr>
-        <p:spPr>
-          <a:xfrm>
-            <a:off x="777240" y="4983480"/>
-            <a:ext cx="4754880" cy="1371600"/>
-          </a:xfrm>
-          <a:prstGeom prst="rect">
-            <a:avLst/>
-          </a:prstGeom>
-          <a:noFill/>
-        </p:spPr>
-        <p:txBody>
-          <a:bodyPr wrap="square" anchor="t" lIns="0" rIns="0" tIns="0" bIns="0">
-            <a:spAutoFit/>
-          </a:bodyPr>
-          <a:lstStyle/>
+              <a:t>paciente A troca o id e baixa o exame do paciente B.</a:t>
+            </a:r>
+          </a:p>
           <a:p>
             <a:pPr algn="l">
               <a:lnSpc>
                 <a:spcPct val="110000"/>
               </a:lnSpc>
-              <a:spcBef>
-                <a:spcPts val="0"/>
-              </a:spcBef>
               <a:spcAft>
-                <a:spcPts val="600"/>
+                <a:spcPts val="1400"/>
               </a:spcAft>
             </a:pPr>
             <a:r>
-              <a:rPr sz="1500" b="0" i="0">
+              <a:rPr sz="2000" b="1">
+                <a:solidFill>
+                  <a:srgbClr val="7CB342"/>
+                </a:solidFill>
+                <a:latin typeface="Open Sans"/>
+              </a:rPr>
+              <a:t>▸ </a:t>
+            </a:r>
+            <a:r>
+              <a:rPr sz="1800" b="1">
+                <a:solidFill>
+                  <a:srgbClr val="2D7A3D"/>
+                </a:solidFill>
+                <a:latin typeface="Open Sans"/>
+              </a:rPr>
+              <a:t>Correção: </a:t>
+            </a:r>
+            <a:r>
+              <a:rPr sz="1800">
                 <a:solidFill>
                   <a:srgbClr val="212121"/>
                 </a:solidFill>
                 <a:latin typeface="Open Sans"/>
               </a:rPr>
-              <a:t>excluir/anonimizar respeitando retenção (art. 18)</a:t>
-            </a:r>
-          </a:p>
-        </p:txBody>
-      </p:sp>
-      <p:sp>
-        <p:nvSpPr>
-          <p:cNvPr id="14" name="Rounded Rectangle 13"/>
-          <p:cNvSpPr/>
-          <p:nvPr/>
-        </p:nvSpPr>
-        <p:spPr>
-          <a:xfrm>
-            <a:off x="6309360" y="4069080"/>
-            <a:ext cx="5468112" cy="2423160"/>
-          </a:xfrm>
-          <a:prstGeom prst="roundRect">
-            <a:avLst/>
-          </a:prstGeom>
-          <a:solidFill>
-            <a:srgbClr val="F5F5F5"/>
-          </a:solidFill>
-          <a:ln w="19050">
-            <a:solidFill>
-              <a:srgbClr val="E65100"/>
-            </a:solidFill>
-          </a:ln>
-          <a:effectLst/>
-        </p:spPr>
-        <p:style>
-          <a:lnRef idx="1">
-            <a:schemeClr val="accent1"/>
-          </a:lnRef>
-          <a:fillRef idx="3">
-            <a:schemeClr val="accent1"/>
-          </a:fillRef>
-          <a:effectRef idx="2">
-            <a:schemeClr val="accent1"/>
-          </a:effectRef>
-          <a:fontRef idx="minor">
-            <a:schemeClr val="lt1"/>
-          </a:fontRef>
-        </p:style>
-        <p:txBody>
-          <a:bodyPr rtlCol="0" anchor="ctr"/>
-          <a:lstStyle/>
-          <a:p>
-            <a:pPr algn="ctr"/>
-          </a:p>
-        </p:txBody>
-      </p:sp>
-      <p:sp>
-        <p:nvSpPr>
-          <p:cNvPr id="15" name="TextBox 14"/>
-          <p:cNvSpPr txBox="1"/>
-          <p:nvPr/>
-        </p:nvSpPr>
-        <p:spPr>
-          <a:xfrm>
-            <a:off x="6675120" y="4343400"/>
-            <a:ext cx="4754880" cy="548640"/>
-          </a:xfrm>
-          <a:prstGeom prst="rect">
-            <a:avLst/>
-          </a:prstGeom>
-          <a:noFill/>
-        </p:spPr>
-        <p:txBody>
-          <a:bodyPr wrap="square" anchor="t" lIns="0" rIns="0" tIns="0" bIns="0">
-            <a:spAutoFit/>
-          </a:bodyPr>
-          <a:lstStyle/>
-          <a:p>
-            <a:pPr algn="l">
-              <a:lnSpc>
-                <a:spcPct val="100000"/>
-              </a:lnSpc>
-              <a:spcBef>
-                <a:spcPts val="0"/>
-              </a:spcBef>
-              <a:spcAft>
-                <a:spcPts val="600"/>
-              </a:spcAft>
-            </a:pPr>
-            <a:r>
-              <a:rPr sz="2200" b="1" i="0">
-                <a:solidFill>
-                  <a:srgbClr val="E65100"/>
-                </a:solidFill>
-                <a:latin typeface="Open Sans"/>
-              </a:rPr>
-              <a:t>Auditoria</a:t>
-            </a:r>
-          </a:p>
-        </p:txBody>
-      </p:sp>
-      <p:sp>
-        <p:nvSpPr>
-          <p:cNvPr id="16" name="TextBox 15"/>
-          <p:cNvSpPr txBox="1"/>
-          <p:nvPr/>
-        </p:nvSpPr>
-        <p:spPr>
-          <a:xfrm>
-            <a:off x="6675120" y="4983480"/>
-            <a:ext cx="4754880" cy="1371600"/>
-          </a:xfrm>
-          <a:prstGeom prst="rect">
-            <a:avLst/>
-          </a:prstGeom>
-          <a:noFill/>
-        </p:spPr>
-        <p:txBody>
-          <a:bodyPr wrap="square" anchor="t" lIns="0" rIns="0" tIns="0" bIns="0">
-            <a:spAutoFit/>
-          </a:bodyPr>
-          <a:lstStyle/>
+              <a:t>if (exame.pacienteId != usuarioAtual.id) return 403;</a:t>
+            </a:r>
+          </a:p>
           <a:p>
             <a:pPr algn="l">
               <a:lnSpc>
                 <a:spcPct val="110000"/>
               </a:lnSpc>
-              <a:spcBef>
-                <a:spcPts val="0"/>
-              </a:spcBef>
               <a:spcAft>
-                <a:spcPts val="600"/>
+                <a:spcPts val="1400"/>
               </a:spcAft>
             </a:pPr>
             <a:r>
-              <a:rPr sz="1500" b="0" i="0">
+              <a:rPr sz="2000" b="1">
+                <a:solidFill>
+                  <a:srgbClr val="7CB342"/>
+                </a:solidFill>
+                <a:latin typeface="Open Sans"/>
+              </a:rPr>
+              <a:t>▸ </a:t>
+            </a:r>
+            <a:r>
+              <a:rPr sz="1800" b="1">
+                <a:solidFill>
+                  <a:srgbClr val="2D7A3D"/>
+                </a:solidFill>
+                <a:latin typeface="Open Sans"/>
+              </a:rPr>
+              <a:t>Fail-secure: </a:t>
+            </a:r>
+            <a:r>
+              <a:rPr sz="1800">
                 <a:solidFill>
                   <a:srgbClr val="212121"/>
                 </a:solidFill>
                 <a:latin typeface="Open Sans"/>
               </a:rPr>
-              <a:t>trilha append-only, sem PII, hash-chain (art. 37/46)</a:t>
-            </a:r>
-          </a:p>
-        </p:txBody>
-      </p:sp>
-      <p:sp>
-        <p:nvSpPr>
-          <p:cNvPr id="17" name="TextBox 16"/>
+              <a:t>deny by default; 403 sem vazar metadados do exame.</a:t>
+            </a:r>
+          </a:p>
+          <a:p>
+            <a:pPr algn="l">
+              <a:lnSpc>
+                <a:spcPct val="110000"/>
+              </a:lnSpc>
+              <a:spcAft>
+                <a:spcPts val="1400"/>
+              </a:spcAft>
+            </a:pPr>
+            <a:r>
+              <a:rPr sz="2000" b="1">
+                <a:solidFill>
+                  <a:srgbClr val="7CB342"/>
+                </a:solidFill>
+                <a:latin typeface="Open Sans"/>
+              </a:rPr>
+              <a:t>▸ </a:t>
+            </a:r>
+            <a:r>
+              <a:rPr sz="1800" b="1">
+                <a:solidFill>
+                  <a:srgbClr val="2D7A3D"/>
+                </a:solidFill>
+                <a:latin typeface="Open Sans"/>
+              </a:rPr>
+              <a:t>Garantia (RGS): </a:t>
+            </a:r>
+            <a:r>
+              <a:rPr sz="1800">
+                <a:solidFill>
+                  <a:srgbClr val="212121"/>
+                </a:solidFill>
+                <a:latin typeface="Open Sans"/>
+              </a:rPr>
+              <a:t>teste anti-IDOR no CI — falha bloqueia o merge.</a:t>
+            </a:r>
+          </a:p>
+        </p:txBody>
+      </p:sp>
+      <p:sp>
+        <p:nvSpPr>
+          <p:cNvPr id="7" name="TextBox 6"/>
           <p:cNvSpPr txBox="1"/>
           <p:nvPr/>
         </p:nvSpPr>
@@ -8503,13 +9381,13 @@
         <p:spPr>
           <a:xfrm>
             <a:off x="0" y="0"/>
-            <a:ext cx="12191695" cy="6858000"/>
+            <a:ext cx="12191695" cy="1234440"/>
           </a:xfrm>
           <a:prstGeom prst="rect">
             <a:avLst/>
           </a:prstGeom>
           <a:solidFill>
-            <a:srgbClr val="1F5232"/>
+            <a:srgbClr val="2D7A3D"/>
           </a:solidFill>
           <a:ln>
             <a:noFill/>
@@ -8546,8 +9424,8 @@
         </p:nvSpPr>
         <p:spPr>
           <a:xfrm>
-            <a:off x="457200" y="2194560"/>
-            <a:ext cx="11247120" cy="548640"/>
+            <a:off x="457200" y="164592"/>
+            <a:ext cx="11247120" cy="640080"/>
           </a:xfrm>
           <a:prstGeom prst="rect">
             <a:avLst/>
@@ -8560,7 +9438,7 @@
           </a:bodyPr>
           <a:lstStyle/>
           <a:p>
-            <a:pPr algn="ctr">
+            <a:pPr algn="l">
               <a:lnSpc>
                 <a:spcPct val="100000"/>
               </a:lnSpc>
@@ -8572,13 +9450,13 @@
               </a:spcAft>
             </a:pPr>
             <a:r>
-              <a:rPr sz="2000" b="1" i="0">
-                <a:solidFill>
-                  <a:srgbClr val="7CB342"/>
-                </a:solidFill>
-                <a:latin typeface="Open Sans"/>
-              </a:rPr>
-              <a:t>PARTE 3</a:t>
+              <a:rPr sz="3200" b="1" i="0">
+                <a:solidFill>
+                  <a:srgbClr val="FFFFFF"/>
+                </a:solidFill>
+                <a:latin typeface="Open Sans"/>
+              </a:rPr>
+              <a:t>Módulos LGPD a criar</a:t>
             </a:r>
           </a:p>
         </p:txBody>
@@ -8591,8 +9469,8 @@
         </p:nvSpPr>
         <p:spPr>
           <a:xfrm>
-            <a:off x="457200" y="2834640"/>
-            <a:ext cx="11247120" cy="1280160"/>
+            <a:off x="457200" y="777240"/>
+            <a:ext cx="11247120" cy="365760"/>
           </a:xfrm>
           <a:prstGeom prst="rect">
             <a:avLst/>
@@ -8605,7 +9483,7 @@
           </a:bodyPr>
           <a:lstStyle/>
           <a:p>
-            <a:pPr algn="ctr">
+            <a:pPr algn="l">
               <a:lnSpc>
                 <a:spcPct val="100000"/>
               </a:lnSpc>
@@ -8617,27 +9495,73 @@
               </a:spcAft>
             </a:pPr>
             <a:r>
-              <a:rPr sz="6000" b="1" i="0">
-                <a:solidFill>
-                  <a:srgbClr val="FFFFFF"/>
-                </a:solidFill>
-                <a:latin typeface="Open Sans"/>
-              </a:rPr>
-              <a:t>No VidaPlus</a:t>
-            </a:r>
-          </a:p>
-        </p:txBody>
-      </p:sp>
-      <p:sp>
-        <p:nvSpPr>
-          <p:cNvPr id="5" name="TextBox 4"/>
+              <a:rPr sz="1600" b="0" i="1">
+                <a:solidFill>
+                  <a:srgbClr val="E0E8DB"/>
+                </a:solidFill>
+                <a:latin typeface="Open Sans"/>
+              </a:rPr>
+              <a:t>Direitos do titular viram código</a:t>
+            </a:r>
+          </a:p>
+        </p:txBody>
+      </p:sp>
+      <p:sp>
+        <p:nvSpPr>
+          <p:cNvPr id="5" name="Rounded Rectangle 4"/>
+          <p:cNvSpPr/>
+          <p:nvPr/>
+        </p:nvSpPr>
+        <p:spPr>
+          <a:xfrm>
+            <a:off x="411480" y="1463040"/>
+            <a:ext cx="5468112" cy="2423160"/>
+          </a:xfrm>
+          <a:prstGeom prst="roundRect">
+            <a:avLst/>
+          </a:prstGeom>
+          <a:solidFill>
+            <a:srgbClr val="F5F5F5"/>
+          </a:solidFill>
+          <a:ln w="19050">
+            <a:solidFill>
+              <a:srgbClr val="2D7A3D"/>
+            </a:solidFill>
+          </a:ln>
+          <a:effectLst/>
+        </p:spPr>
+        <p:style>
+          <a:lnRef idx="1">
+            <a:schemeClr val="accent1"/>
+          </a:lnRef>
+          <a:fillRef idx="3">
+            <a:schemeClr val="accent1"/>
+          </a:fillRef>
+          <a:effectRef idx="2">
+            <a:schemeClr val="accent1"/>
+          </a:effectRef>
+          <a:fontRef idx="minor">
+            <a:schemeClr val="lt1"/>
+          </a:fontRef>
+        </p:style>
+        <p:txBody>
+          <a:bodyPr rtlCol="0" anchor="ctr"/>
+          <a:lstStyle/>
+          <a:p>
+            <a:pPr algn="ctr"/>
+          </a:p>
+        </p:txBody>
+      </p:sp>
+      <p:sp>
+        <p:nvSpPr>
+          <p:cNvPr id="6" name="TextBox 5"/>
           <p:cNvSpPr txBox="1"/>
           <p:nvPr/>
         </p:nvSpPr>
         <p:spPr>
           <a:xfrm>
-            <a:off x="457200" y="4297680"/>
-            <a:ext cx="11247120" cy="457200"/>
+            <a:off x="777240" y="1737360"/>
+            <a:ext cx="4754880" cy="548640"/>
           </a:xfrm>
           <a:prstGeom prst="rect">
             <a:avLst/>
@@ -8650,7 +9574,7 @@
           </a:bodyPr>
           <a:lstStyle/>
           <a:p>
-            <a:pPr algn="ctr">
+            <a:pPr algn="l">
               <a:lnSpc>
                 <a:spcPct val="100000"/>
               </a:lnSpc>
@@ -8662,36 +9586,83 @@
               </a:spcAft>
             </a:pPr>
             <a:r>
-              <a:rPr sz="2200" b="0" i="1">
-                <a:solidFill>
-                  <a:srgbClr val="CCD7C0"/>
-                </a:solidFill>
-                <a:latin typeface="Open Sans"/>
-              </a:rPr>
-              <a:t>A etapa das próximas semanas (Fase 4)</a:t>
-            </a:r>
-          </a:p>
-        </p:txBody>
-      </p:sp>
-      <p:sp>
-        <p:nvSpPr>
-          <p:cNvPr id="6" name="Rectangle 5"/>
+              <a:rPr sz="2200" b="1" i="0">
+                <a:solidFill>
+                  <a:srgbClr val="2D7A3D"/>
+                </a:solidFill>
+                <a:latin typeface="Open Sans"/>
+              </a:rPr>
+              <a:t>Consentimento</a:t>
+            </a:r>
+          </a:p>
+        </p:txBody>
+      </p:sp>
+      <p:sp>
+        <p:nvSpPr>
+          <p:cNvPr id="7" name="TextBox 6"/>
+          <p:cNvSpPr txBox="1"/>
+          <p:nvPr/>
+        </p:nvSpPr>
+        <p:spPr>
+          <a:xfrm>
+            <a:off x="777240" y="2377440"/>
+            <a:ext cx="4754880" cy="1371600"/>
+          </a:xfrm>
+          <a:prstGeom prst="rect">
+            <a:avLst/>
+          </a:prstGeom>
+          <a:noFill/>
+        </p:spPr>
+        <p:txBody>
+          <a:bodyPr wrap="square" anchor="t" lIns="0" rIns="0" tIns="0" bIns="0">
+            <a:spAutoFit/>
+          </a:bodyPr>
+          <a:lstStyle/>
+          <a:p>
+            <a:pPr algn="l">
+              <a:lnSpc>
+                <a:spcPct val="110000"/>
+              </a:lnSpc>
+              <a:spcBef>
+                <a:spcPts val="0"/>
+              </a:spcBef>
+              <a:spcAft>
+                <a:spcPts val="600"/>
+              </a:spcAft>
+            </a:pPr>
+            <a:r>
+              <a:rPr sz="1500" b="0" i="0">
+                <a:solidFill>
+                  <a:srgbClr val="212121"/>
+                </a:solidFill>
+                <a:latin typeface="Open Sans"/>
+              </a:rPr>
+              <a:t>específico, versionado, revogável (art. 8/9)</a:t>
+            </a:r>
+          </a:p>
+        </p:txBody>
+      </p:sp>
+      <p:sp>
+        <p:nvSpPr>
+          <p:cNvPr id="8" name="Rounded Rectangle 7"/>
           <p:cNvSpPr/>
           <p:nvPr/>
         </p:nvSpPr>
         <p:spPr>
           <a:xfrm>
-            <a:off x="5184648" y="4983480"/>
-            <a:ext cx="1828800" cy="25400"/>
-          </a:xfrm>
-          <a:prstGeom prst="rect">
+            <a:off x="6309360" y="1463040"/>
+            <a:ext cx="5468112" cy="2423160"/>
+          </a:xfrm>
+          <a:prstGeom prst="roundRect">
             <a:avLst/>
           </a:prstGeom>
           <a:solidFill>
-            <a:srgbClr val="7CB342"/>
+            <a:srgbClr val="F5F5F5"/>
           </a:solidFill>
-          <a:ln>
-            <a:noFill/>
+          <a:ln w="19050">
+            <a:solidFill>
+              <a:srgbClr val="1976D2"/>
+            </a:solidFill>
           </a:ln>
           <a:effectLst/>
         </p:spPr>
@@ -8714,6 +9685,413 @@
           <a:lstStyle/>
           <a:p>
             <a:pPr algn="ctr"/>
+          </a:p>
+        </p:txBody>
+      </p:sp>
+      <p:sp>
+        <p:nvSpPr>
+          <p:cNvPr id="9" name="TextBox 8"/>
+          <p:cNvSpPr txBox="1"/>
+          <p:nvPr/>
+        </p:nvSpPr>
+        <p:spPr>
+          <a:xfrm>
+            <a:off x="6675120" y="1737360"/>
+            <a:ext cx="4754880" cy="548640"/>
+          </a:xfrm>
+          <a:prstGeom prst="rect">
+            <a:avLst/>
+          </a:prstGeom>
+          <a:noFill/>
+        </p:spPr>
+        <p:txBody>
+          <a:bodyPr wrap="square" anchor="t" lIns="0" rIns="0" tIns="0" bIns="0">
+            <a:spAutoFit/>
+          </a:bodyPr>
+          <a:lstStyle/>
+          <a:p>
+            <a:pPr algn="l">
+              <a:lnSpc>
+                <a:spcPct val="100000"/>
+              </a:lnSpc>
+              <a:spcBef>
+                <a:spcPts val="0"/>
+              </a:spcBef>
+              <a:spcAft>
+                <a:spcPts val="600"/>
+              </a:spcAft>
+            </a:pPr>
+            <a:r>
+              <a:rPr sz="2200" b="1" i="0">
+                <a:solidFill>
+                  <a:srgbClr val="1976D2"/>
+                </a:solidFill>
+                <a:latin typeface="Open Sans"/>
+              </a:rPr>
+              <a:t>Portabilidade</a:t>
+            </a:r>
+          </a:p>
+        </p:txBody>
+      </p:sp>
+      <p:sp>
+        <p:nvSpPr>
+          <p:cNvPr id="10" name="TextBox 9"/>
+          <p:cNvSpPr txBox="1"/>
+          <p:nvPr/>
+        </p:nvSpPr>
+        <p:spPr>
+          <a:xfrm>
+            <a:off x="6675120" y="2377440"/>
+            <a:ext cx="4754880" cy="1371600"/>
+          </a:xfrm>
+          <a:prstGeom prst="rect">
+            <a:avLst/>
+          </a:prstGeom>
+          <a:noFill/>
+        </p:spPr>
+        <p:txBody>
+          <a:bodyPr wrap="square" anchor="t" lIns="0" rIns="0" tIns="0" bIns="0">
+            <a:spAutoFit/>
+          </a:bodyPr>
+          <a:lstStyle/>
+          <a:p>
+            <a:pPr algn="l">
+              <a:lnSpc>
+                <a:spcPct val="110000"/>
+              </a:lnSpc>
+              <a:spcBef>
+                <a:spcPts val="0"/>
+              </a:spcBef>
+              <a:spcAft>
+                <a:spcPts val="600"/>
+              </a:spcAft>
+            </a:pPr>
+            <a:r>
+              <a:rPr sz="1500" b="0" i="0">
+                <a:solidFill>
+                  <a:srgbClr val="212121"/>
+                </a:solidFill>
+                <a:latin typeface="Open Sans"/>
+              </a:rPr>
+              <a:t>exportar todos os dados do titular (art. 18)</a:t>
+            </a:r>
+          </a:p>
+        </p:txBody>
+      </p:sp>
+      <p:sp>
+        <p:nvSpPr>
+          <p:cNvPr id="11" name="Rounded Rectangle 10"/>
+          <p:cNvSpPr/>
+          <p:nvPr/>
+        </p:nvSpPr>
+        <p:spPr>
+          <a:xfrm>
+            <a:off x="411480" y="4069080"/>
+            <a:ext cx="5468112" cy="2423160"/>
+          </a:xfrm>
+          <a:prstGeom prst="roundRect">
+            <a:avLst/>
+          </a:prstGeom>
+          <a:solidFill>
+            <a:srgbClr val="F5F5F5"/>
+          </a:solidFill>
+          <a:ln w="19050">
+            <a:solidFill>
+              <a:srgbClr val="7CB342"/>
+            </a:solidFill>
+          </a:ln>
+          <a:effectLst/>
+        </p:spPr>
+        <p:style>
+          <a:lnRef idx="1">
+            <a:schemeClr val="accent1"/>
+          </a:lnRef>
+          <a:fillRef idx="3">
+            <a:schemeClr val="accent1"/>
+          </a:fillRef>
+          <a:effectRef idx="2">
+            <a:schemeClr val="accent1"/>
+          </a:effectRef>
+          <a:fontRef idx="minor">
+            <a:schemeClr val="lt1"/>
+          </a:fontRef>
+        </p:style>
+        <p:txBody>
+          <a:bodyPr rtlCol="0" anchor="ctr"/>
+          <a:lstStyle/>
+          <a:p>
+            <a:pPr algn="ctr"/>
+          </a:p>
+        </p:txBody>
+      </p:sp>
+      <p:sp>
+        <p:nvSpPr>
+          <p:cNvPr id="12" name="TextBox 11"/>
+          <p:cNvSpPr txBox="1"/>
+          <p:nvPr/>
+        </p:nvSpPr>
+        <p:spPr>
+          <a:xfrm>
+            <a:off x="777240" y="4343400"/>
+            <a:ext cx="4754880" cy="548640"/>
+          </a:xfrm>
+          <a:prstGeom prst="rect">
+            <a:avLst/>
+          </a:prstGeom>
+          <a:noFill/>
+        </p:spPr>
+        <p:txBody>
+          <a:bodyPr wrap="square" anchor="t" lIns="0" rIns="0" tIns="0" bIns="0">
+            <a:spAutoFit/>
+          </a:bodyPr>
+          <a:lstStyle/>
+          <a:p>
+            <a:pPr algn="l">
+              <a:lnSpc>
+                <a:spcPct val="100000"/>
+              </a:lnSpc>
+              <a:spcBef>
+                <a:spcPts val="0"/>
+              </a:spcBef>
+              <a:spcAft>
+                <a:spcPts val="600"/>
+              </a:spcAft>
+            </a:pPr>
+            <a:r>
+              <a:rPr sz="2200" b="1" i="0">
+                <a:solidFill>
+                  <a:srgbClr val="7CB342"/>
+                </a:solidFill>
+                <a:latin typeface="Open Sans"/>
+              </a:rPr>
+              <a:t>Eliminação</a:t>
+            </a:r>
+          </a:p>
+        </p:txBody>
+      </p:sp>
+      <p:sp>
+        <p:nvSpPr>
+          <p:cNvPr id="13" name="TextBox 12"/>
+          <p:cNvSpPr txBox="1"/>
+          <p:nvPr/>
+        </p:nvSpPr>
+        <p:spPr>
+          <a:xfrm>
+            <a:off x="777240" y="4983480"/>
+            <a:ext cx="4754880" cy="1371600"/>
+          </a:xfrm>
+          <a:prstGeom prst="rect">
+            <a:avLst/>
+          </a:prstGeom>
+          <a:noFill/>
+        </p:spPr>
+        <p:txBody>
+          <a:bodyPr wrap="square" anchor="t" lIns="0" rIns="0" tIns="0" bIns="0">
+            <a:spAutoFit/>
+          </a:bodyPr>
+          <a:lstStyle/>
+          <a:p>
+            <a:pPr algn="l">
+              <a:lnSpc>
+                <a:spcPct val="110000"/>
+              </a:lnSpc>
+              <a:spcBef>
+                <a:spcPts val="0"/>
+              </a:spcBef>
+              <a:spcAft>
+                <a:spcPts val="600"/>
+              </a:spcAft>
+            </a:pPr>
+            <a:r>
+              <a:rPr sz="1500" b="0" i="0">
+                <a:solidFill>
+                  <a:srgbClr val="212121"/>
+                </a:solidFill>
+                <a:latin typeface="Open Sans"/>
+              </a:rPr>
+              <a:t>excluir/anonimizar respeitando retenção (art. 18)</a:t>
+            </a:r>
+          </a:p>
+        </p:txBody>
+      </p:sp>
+      <p:sp>
+        <p:nvSpPr>
+          <p:cNvPr id="14" name="Rounded Rectangle 13"/>
+          <p:cNvSpPr/>
+          <p:nvPr/>
+        </p:nvSpPr>
+        <p:spPr>
+          <a:xfrm>
+            <a:off x="6309360" y="4069080"/>
+            <a:ext cx="5468112" cy="2423160"/>
+          </a:xfrm>
+          <a:prstGeom prst="roundRect">
+            <a:avLst/>
+          </a:prstGeom>
+          <a:solidFill>
+            <a:srgbClr val="F5F5F5"/>
+          </a:solidFill>
+          <a:ln w="19050">
+            <a:solidFill>
+              <a:srgbClr val="E65100"/>
+            </a:solidFill>
+          </a:ln>
+          <a:effectLst/>
+        </p:spPr>
+        <p:style>
+          <a:lnRef idx="1">
+            <a:schemeClr val="accent1"/>
+          </a:lnRef>
+          <a:fillRef idx="3">
+            <a:schemeClr val="accent1"/>
+          </a:fillRef>
+          <a:effectRef idx="2">
+            <a:schemeClr val="accent1"/>
+          </a:effectRef>
+          <a:fontRef idx="minor">
+            <a:schemeClr val="lt1"/>
+          </a:fontRef>
+        </p:style>
+        <p:txBody>
+          <a:bodyPr rtlCol="0" anchor="ctr"/>
+          <a:lstStyle/>
+          <a:p>
+            <a:pPr algn="ctr"/>
+          </a:p>
+        </p:txBody>
+      </p:sp>
+      <p:sp>
+        <p:nvSpPr>
+          <p:cNvPr id="15" name="TextBox 14"/>
+          <p:cNvSpPr txBox="1"/>
+          <p:nvPr/>
+        </p:nvSpPr>
+        <p:spPr>
+          <a:xfrm>
+            <a:off x="6675120" y="4343400"/>
+            <a:ext cx="4754880" cy="548640"/>
+          </a:xfrm>
+          <a:prstGeom prst="rect">
+            <a:avLst/>
+          </a:prstGeom>
+          <a:noFill/>
+        </p:spPr>
+        <p:txBody>
+          <a:bodyPr wrap="square" anchor="t" lIns="0" rIns="0" tIns="0" bIns="0">
+            <a:spAutoFit/>
+          </a:bodyPr>
+          <a:lstStyle/>
+          <a:p>
+            <a:pPr algn="l">
+              <a:lnSpc>
+                <a:spcPct val="100000"/>
+              </a:lnSpc>
+              <a:spcBef>
+                <a:spcPts val="0"/>
+              </a:spcBef>
+              <a:spcAft>
+                <a:spcPts val="600"/>
+              </a:spcAft>
+            </a:pPr>
+            <a:r>
+              <a:rPr sz="2200" b="1" i="0">
+                <a:solidFill>
+                  <a:srgbClr val="E65100"/>
+                </a:solidFill>
+                <a:latin typeface="Open Sans"/>
+              </a:rPr>
+              <a:t>Auditoria</a:t>
+            </a:r>
+          </a:p>
+        </p:txBody>
+      </p:sp>
+      <p:sp>
+        <p:nvSpPr>
+          <p:cNvPr id="16" name="TextBox 15"/>
+          <p:cNvSpPr txBox="1"/>
+          <p:nvPr/>
+        </p:nvSpPr>
+        <p:spPr>
+          <a:xfrm>
+            <a:off x="6675120" y="4983480"/>
+            <a:ext cx="4754880" cy="1371600"/>
+          </a:xfrm>
+          <a:prstGeom prst="rect">
+            <a:avLst/>
+          </a:prstGeom>
+          <a:noFill/>
+        </p:spPr>
+        <p:txBody>
+          <a:bodyPr wrap="square" anchor="t" lIns="0" rIns="0" tIns="0" bIns="0">
+            <a:spAutoFit/>
+          </a:bodyPr>
+          <a:lstStyle/>
+          <a:p>
+            <a:pPr algn="l">
+              <a:lnSpc>
+                <a:spcPct val="110000"/>
+              </a:lnSpc>
+              <a:spcBef>
+                <a:spcPts val="0"/>
+              </a:spcBef>
+              <a:spcAft>
+                <a:spcPts val="600"/>
+              </a:spcAft>
+            </a:pPr>
+            <a:r>
+              <a:rPr sz="1500" b="0" i="0">
+                <a:solidFill>
+                  <a:srgbClr val="212121"/>
+                </a:solidFill>
+                <a:latin typeface="Open Sans"/>
+              </a:rPr>
+              <a:t>trilha append-only, sem PII, hash-chain (art. 37/46)</a:t>
+            </a:r>
+          </a:p>
+        </p:txBody>
+      </p:sp>
+      <p:sp>
+        <p:nvSpPr>
+          <p:cNvPr id="17" name="TextBox 16"/>
+          <p:cNvSpPr txBox="1"/>
+          <p:nvPr/>
+        </p:nvSpPr>
+        <p:spPr>
+          <a:xfrm>
+            <a:off x="10972800" y="6446520"/>
+            <a:ext cx="914400" cy="320040"/>
+          </a:xfrm>
+          <a:prstGeom prst="rect">
+            <a:avLst/>
+          </a:prstGeom>
+          <a:noFill/>
+        </p:spPr>
+        <p:txBody>
+          <a:bodyPr wrap="square" anchor="t" lIns="0" rIns="0" tIns="0" bIns="0">
+            <a:spAutoFit/>
+          </a:bodyPr>
+          <a:lstStyle/>
+          <a:p>
+            <a:pPr algn="r">
+              <a:lnSpc>
+                <a:spcPct val="100000"/>
+              </a:lnSpc>
+              <a:spcBef>
+                <a:spcPts val="0"/>
+              </a:spcBef>
+              <a:spcAft>
+                <a:spcPts val="600"/>
+              </a:spcAft>
+            </a:pPr>
+            <a:r>
+              <a:rPr sz="1100" b="0" i="0">
+                <a:solidFill>
+                  <a:srgbClr val="616161"/>
+                </a:solidFill>
+                <a:latin typeface="Open Sans"/>
+              </a:rPr>
+              <a:t>8</a:t>
+            </a:r>
           </a:p>
         </p:txBody>
       </p:sp>
@@ -8744,13 +10122,13 @@
         <p:spPr>
           <a:xfrm>
             <a:off x="0" y="0"/>
-            <a:ext cx="12191695" cy="1234440"/>
+            <a:ext cx="12191695" cy="6858000"/>
           </a:xfrm>
           <a:prstGeom prst="rect">
             <a:avLst/>
           </a:prstGeom>
           <a:solidFill>
-            <a:srgbClr val="2D7A3D"/>
+            <a:srgbClr val="1F5232"/>
           </a:solidFill>
           <a:ln>
             <a:noFill/>
@@ -8787,8 +10165,8 @@
         </p:nvSpPr>
         <p:spPr>
           <a:xfrm>
-            <a:off x="457200" y="164592"/>
-            <a:ext cx="11247120" cy="640080"/>
+            <a:off x="457200" y="2194560"/>
+            <a:ext cx="11247120" cy="548640"/>
           </a:xfrm>
           <a:prstGeom prst="rect">
             <a:avLst/>
@@ -8801,7 +10179,7 @@
           </a:bodyPr>
           <a:lstStyle/>
           <a:p>
-            <a:pPr algn="l">
+            <a:pPr algn="ctr">
               <a:lnSpc>
                 <a:spcPct val="100000"/>
               </a:lnSpc>
@@ -8813,13 +10191,13 @@
               </a:spcAft>
             </a:pPr>
             <a:r>
-              <a:rPr sz="3200" b="1" i="0">
-                <a:solidFill>
-                  <a:srgbClr val="FFFFFF"/>
-                </a:solidFill>
-                <a:latin typeface="Open Sans"/>
-              </a:rPr>
-              <a:t>Entregável da Fase 4</a:t>
+              <a:rPr sz="2000" b="1" i="0">
+                <a:solidFill>
+                  <a:srgbClr val="7CB342"/>
+                </a:solidFill>
+                <a:latin typeface="Open Sans"/>
+              </a:rPr>
+              <a:t>PARTE 3</a:t>
             </a:r>
           </a:p>
         </p:txBody>
@@ -8832,8 +10210,8 @@
         </p:nvSpPr>
         <p:spPr>
           <a:xfrm>
-            <a:off x="457200" y="777240"/>
-            <a:ext cx="11247120" cy="365760"/>
+            <a:off x="457200" y="2834640"/>
+            <a:ext cx="11247120" cy="1280160"/>
           </a:xfrm>
           <a:prstGeom prst="rect">
             <a:avLst/>
@@ -8846,7 +10224,7 @@
           </a:bodyPr>
           <a:lstStyle/>
           <a:p>
-            <a:pPr algn="l">
+            <a:pPr algn="ctr">
               <a:lnSpc>
                 <a:spcPct val="100000"/>
               </a:lnSpc>
@@ -8858,281 +10236,27 @@
               </a:spcAft>
             </a:pPr>
             <a:r>
-              <a:rPr sz="1600" b="0" i="1">
-                <a:solidFill>
-                  <a:srgbClr val="E0E8DB"/>
-                </a:solidFill>
-                <a:latin typeface="Open Sans"/>
-              </a:rPr>
-              <a:t>Remediação como prova de conceito</a:t>
-            </a:r>
-          </a:p>
-        </p:txBody>
-      </p:sp>
-      <p:sp>
-        <p:nvSpPr>
-          <p:cNvPr id="5" name="Rounded Rectangle 4"/>
-          <p:cNvSpPr/>
-          <p:nvPr/>
-        </p:nvSpPr>
-        <p:spPr>
-          <a:xfrm>
-            <a:off x="411480" y="1463040"/>
-            <a:ext cx="11384280" cy="5029200"/>
-          </a:xfrm>
-          <a:prstGeom prst="roundRect">
-            <a:avLst/>
-          </a:prstGeom>
-          <a:solidFill>
-            <a:srgbClr val="F5F5F5"/>
-          </a:solidFill>
-          <a:ln w="15875">
-            <a:solidFill>
-              <a:srgbClr val="7CB342"/>
-            </a:solidFill>
-          </a:ln>
-          <a:effectLst/>
-        </p:spPr>
-        <p:style>
-          <a:lnRef idx="1">
-            <a:schemeClr val="accent1"/>
-          </a:lnRef>
-          <a:fillRef idx="3">
-            <a:schemeClr val="accent1"/>
-          </a:fillRef>
-          <a:effectRef idx="2">
-            <a:schemeClr val="accent1"/>
-          </a:effectRef>
-          <a:fontRef idx="minor">
-            <a:schemeClr val="lt1"/>
-          </a:fontRef>
-        </p:style>
-        <p:txBody>
-          <a:bodyPr rtlCol="0" anchor="ctr"/>
-          <a:lstStyle/>
-          <a:p>
-            <a:pPr algn="ctr"/>
-          </a:p>
-        </p:txBody>
-      </p:sp>
-      <p:sp>
-        <p:nvSpPr>
-          <p:cNvPr id="6" name="TextBox 5"/>
+              <a:rPr sz="6000" b="1" i="0">
+                <a:solidFill>
+                  <a:srgbClr val="FFFFFF"/>
+                </a:solidFill>
+                <a:latin typeface="Open Sans"/>
+              </a:rPr>
+              <a:t>No VidaPlus</a:t>
+            </a:r>
+          </a:p>
+        </p:txBody>
+      </p:sp>
+      <p:sp>
+        <p:nvSpPr>
+          <p:cNvPr id="5" name="TextBox 4"/>
           <p:cNvSpPr txBox="1"/>
           <p:nvPr/>
         </p:nvSpPr>
         <p:spPr>
           <a:xfrm>
-            <a:off x="868680" y="1783080"/>
-            <a:ext cx="10515600" cy="4572000"/>
-          </a:xfrm>
-          <a:prstGeom prst="rect">
-            <a:avLst/>
-          </a:prstGeom>
-          <a:noFill/>
-        </p:spPr>
-        <p:txBody>
-          <a:bodyPr wrap="square">
-            <a:spAutoFit/>
-          </a:bodyPr>
-          <a:lstStyle/>
-          <a:p>
-            <a:pPr algn="l">
-              <a:lnSpc>
-                <a:spcPct val="110000"/>
-              </a:lnSpc>
-              <a:spcAft>
-                <a:spcPts val="1400"/>
-              </a:spcAft>
-            </a:pPr>
-            <a:r>
-              <a:rPr sz="2000" b="1">
-                <a:solidFill>
-                  <a:srgbClr val="7CB342"/>
-                </a:solidFill>
-                <a:latin typeface="Open Sans"/>
-              </a:rPr>
-              <a:t>▸ </a:t>
-            </a:r>
-            <a:r>
-              <a:rPr sz="1800" b="1">
-                <a:solidFill>
-                  <a:srgbClr val="2D7A3D"/>
-                </a:solidFill>
-                <a:latin typeface="Open Sans"/>
-              </a:rPr>
-              <a:t>PoC: </a:t>
-            </a:r>
-            <a:r>
-              <a:rPr sz="1800">
-                <a:solidFill>
-                  <a:srgbClr val="212121"/>
-                </a:solidFill>
-                <a:latin typeface="Open Sans"/>
-              </a:rPr>
-              <a:t>corrija 1-2 controles ponta-a-ponta (≥1 P0) num Pull Request.</a:t>
-            </a:r>
-          </a:p>
-          <a:p>
-            <a:pPr algn="l">
-              <a:lnSpc>
-                <a:spcPct val="110000"/>
-              </a:lnSpc>
-              <a:spcAft>
-                <a:spcPts val="1400"/>
-              </a:spcAft>
-            </a:pPr>
-            <a:r>
-              <a:rPr sz="2000" b="1">
-                <a:solidFill>
-                  <a:srgbClr val="7CB342"/>
-                </a:solidFill>
-                <a:latin typeface="Open Sans"/>
-              </a:rPr>
-              <a:t>▸ </a:t>
-            </a:r>
-            <a:r>
-              <a:rPr sz="1800" b="1">
-                <a:solidFill>
-                  <a:srgbClr val="2D7A3D"/>
-                </a:solidFill>
-                <a:latin typeface="Open Sans"/>
-              </a:rPr>
-              <a:t>Teste: </a:t>
-            </a:r>
-            <a:r>
-              <a:rPr sz="1800">
-                <a:solidFill>
-                  <a:srgbClr val="212121"/>
-                </a:solidFill>
-                <a:latin typeface="Open Sans"/>
-              </a:rPr>
-              <a:t>cada correção acompanha o teste que a prova.</a:t>
-            </a:r>
-          </a:p>
-          <a:p>
-            <a:pPr algn="l">
-              <a:lnSpc>
-                <a:spcPct val="110000"/>
-              </a:lnSpc>
-              <a:spcAft>
-                <a:spcPts val="1400"/>
-              </a:spcAft>
-            </a:pPr>
-            <a:r>
-              <a:rPr sz="2000" b="1">
-                <a:solidFill>
-                  <a:srgbClr val="7CB342"/>
-                </a:solidFill>
-                <a:latin typeface="Open Sans"/>
-              </a:rPr>
-              <a:t>▸ </a:t>
-            </a:r>
-            <a:r>
-              <a:rPr sz="1800" b="1">
-                <a:solidFill>
-                  <a:srgbClr val="2D7A3D"/>
-                </a:solidFill>
-                <a:latin typeface="Open Sans"/>
-              </a:rPr>
-              <a:t>Plano: </a:t>
-            </a:r>
-            <a:r>
-              <a:rPr sz="1800">
-                <a:solidFill>
-                  <a:srgbClr val="212121"/>
-                </a:solidFill>
-                <a:latin typeface="Open Sans"/>
-              </a:rPr>
-              <a:t>para o resto do pacote, entregue um plano de remediação.</a:t>
-            </a:r>
-          </a:p>
-          <a:p>
-            <a:pPr algn="l">
-              <a:lnSpc>
-                <a:spcPct val="110000"/>
-              </a:lnSpc>
-              <a:spcAft>
-                <a:spcPts val="1400"/>
-              </a:spcAft>
-            </a:pPr>
-            <a:r>
-              <a:rPr sz="2000" b="1">
-                <a:solidFill>
-                  <a:srgbClr val="7CB342"/>
-                </a:solidFill>
-                <a:latin typeface="Open Sans"/>
-              </a:rPr>
-              <a:t>▸ </a:t>
-            </a:r>
-            <a:r>
-              <a:rPr sz="1800" b="1">
-                <a:solidFill>
-                  <a:srgbClr val="2D7A3D"/>
-                </a:solidFill>
-                <a:latin typeface="Open Sans"/>
-              </a:rPr>
-              <a:t>Foco: </a:t>
-            </a:r>
-            <a:r>
-              <a:rPr sz="1800">
-                <a:solidFill>
-                  <a:srgbClr val="212121"/>
-                </a:solidFill>
-                <a:latin typeface="Open Sans"/>
-              </a:rPr>
-              <a:t>o objetivo é fechar o fio completo, não corrigir tudo.</a:t>
-            </a:r>
-          </a:p>
-          <a:p>
-            <a:pPr algn="l">
-              <a:lnSpc>
-                <a:spcPct val="110000"/>
-              </a:lnSpc>
-              <a:spcAft>
-                <a:spcPts val="1400"/>
-              </a:spcAft>
-            </a:pPr>
-            <a:r>
-              <a:rPr sz="2000" b="1">
-                <a:solidFill>
-                  <a:srgbClr val="7CB342"/>
-                </a:solidFill>
-                <a:latin typeface="Open Sans"/>
-              </a:rPr>
-              <a:t>▸ </a:t>
-            </a:r>
-            <a:r>
-              <a:rPr sz="1800" b="1">
-                <a:solidFill>
-                  <a:srgbClr val="2D7A3D"/>
-                </a:solidFill>
-                <a:latin typeface="Open Sans"/>
-              </a:rPr>
-              <a:t>Gate: </a:t>
-            </a:r>
-            <a:r>
-              <a:rPr sz="1800">
-                <a:solidFill>
-                  <a:srgbClr val="212121"/>
-                </a:solidFill>
-                <a:latin typeface="Open Sans"/>
-              </a:rPr>
-              <a:t>a classe corrigida deve passar de vermelho a verde no CI.</a:t>
-            </a:r>
-          </a:p>
-        </p:txBody>
-      </p:sp>
-      <p:sp>
-        <p:nvSpPr>
-          <p:cNvPr id="7" name="TextBox 6"/>
-          <p:cNvSpPr txBox="1"/>
-          <p:nvPr/>
-        </p:nvSpPr>
-        <p:spPr>
-          <a:xfrm>
-            <a:off x="10972800" y="6446520"/>
-            <a:ext cx="914400" cy="320040"/>
+            <a:off x="457200" y="4297680"/>
+            <a:ext cx="11247120" cy="457200"/>
           </a:xfrm>
           <a:prstGeom prst="rect">
             <a:avLst/>
@@ -9145,7 +10269,7 @@
           </a:bodyPr>
           <a:lstStyle/>
           <a:p>
-            <a:pPr algn="r">
+            <a:pPr algn="ctr">
               <a:lnSpc>
                 <a:spcPct val="100000"/>
               </a:lnSpc>
@@ -9157,14 +10281,58 @@
               </a:spcAft>
             </a:pPr>
             <a:r>
-              <a:rPr sz="1100" b="0" i="0">
-                <a:solidFill>
-                  <a:srgbClr val="616161"/>
-                </a:solidFill>
-                <a:latin typeface="Open Sans"/>
-              </a:rPr>
-              <a:t>9</a:t>
-            </a:r>
+              <a:rPr sz="2200" b="0" i="1">
+                <a:solidFill>
+                  <a:srgbClr val="CCD7C0"/>
+                </a:solidFill>
+                <a:latin typeface="Open Sans"/>
+              </a:rPr>
+              <a:t>A etapa das próximas semanas (Fase 4)</a:t>
+            </a:r>
+          </a:p>
+        </p:txBody>
+      </p:sp>
+      <p:sp>
+        <p:nvSpPr>
+          <p:cNvPr id="6" name="Rectangle 5"/>
+          <p:cNvSpPr/>
+          <p:nvPr/>
+        </p:nvSpPr>
+        <p:spPr>
+          <a:xfrm>
+            <a:off x="5184648" y="4983480"/>
+            <a:ext cx="1828800" cy="25400"/>
+          </a:xfrm>
+          <a:prstGeom prst="rect">
+            <a:avLst/>
+          </a:prstGeom>
+          <a:solidFill>
+            <a:srgbClr val="7CB342"/>
+          </a:solidFill>
+          <a:ln>
+            <a:noFill/>
+          </a:ln>
+          <a:effectLst/>
+        </p:spPr>
+        <p:style>
+          <a:lnRef idx="1">
+            <a:schemeClr val="accent1"/>
+          </a:lnRef>
+          <a:fillRef idx="3">
+            <a:schemeClr val="accent1"/>
+          </a:fillRef>
+          <a:effectRef idx="2">
+            <a:schemeClr val="accent1"/>
+          </a:effectRef>
+          <a:fontRef idx="minor">
+            <a:schemeClr val="lt1"/>
+          </a:fontRef>
+        </p:style>
+        <p:txBody>
+          <a:bodyPr rtlCol="0" anchor="ctr"/>
+          <a:lstStyle/>
+          <a:p>
+            <a:pPr algn="ctr"/>
           </a:p>
         </p:txBody>
       </p:sp>

--- a/aulas/aula-06-implementacao-segura.pptx
+++ b/aulas/aula-06-implementacao-segura.pptx
@@ -4225,7 +4225,7 @@
                 </a:solidFill>
                 <a:latin typeface="Open Sans"/>
               </a:rPr>
-              <a:t>TADS · Segurança em Sistemas Computacionais</a:t>
+              <a:t>TADS · Segurança de Sistemas Computacionais</a:t>
             </a:r>
           </a:p>
         </p:txBody>
